--- a/reference/Putting Numbers In.pptx
+++ b/reference/Putting Numbers In.pptx
@@ -71,13 +71,13 @@
         </a:solidFill>
         <a:effectLst/>
         <a:uFillTx/>
-        <a:latin typeface="+mj-lt"/>
-        <a:ea typeface="+mj-ea"/>
-        <a:cs typeface="+mj-cs"/>
-        <a:sym typeface="Calibri"/>
+        <a:latin typeface="+mn-lt"/>
+        <a:ea typeface="+mn-ea"/>
+        <a:cs typeface="+mn-cs"/>
+        <a:sym typeface="Helvetica"/>
       </a:defRPr>
     </a:lvl1pPr>
-    <a:lvl2pPr marL="0" marR="0" indent="457200" algn="l" defTabSz="914400" rtl="0" fontAlgn="auto" latinLnBrk="0" hangingPunct="0">
+    <a:lvl2pPr marL="0" marR="0" indent="0" algn="l" defTabSz="914400" rtl="0" fontAlgn="auto" latinLnBrk="0" hangingPunct="0">
       <a:lnSpc>
         <a:spcPct val="100000"/>
       </a:lnSpc>
@@ -101,13 +101,13 @@
         </a:solidFill>
         <a:effectLst/>
         <a:uFillTx/>
-        <a:latin typeface="+mj-lt"/>
-        <a:ea typeface="+mj-ea"/>
-        <a:cs typeface="+mj-cs"/>
-        <a:sym typeface="Calibri"/>
+        <a:latin typeface="+mn-lt"/>
+        <a:ea typeface="+mn-ea"/>
+        <a:cs typeface="+mn-cs"/>
+        <a:sym typeface="Helvetica"/>
       </a:defRPr>
     </a:lvl2pPr>
-    <a:lvl3pPr marL="0" marR="0" indent="914400" algn="l" defTabSz="914400" rtl="0" fontAlgn="auto" latinLnBrk="0" hangingPunct="0">
+    <a:lvl3pPr marL="0" marR="0" indent="0" algn="l" defTabSz="914400" rtl="0" fontAlgn="auto" latinLnBrk="0" hangingPunct="0">
       <a:lnSpc>
         <a:spcPct val="100000"/>
       </a:lnSpc>
@@ -131,13 +131,13 @@
         </a:solidFill>
         <a:effectLst/>
         <a:uFillTx/>
-        <a:latin typeface="+mj-lt"/>
-        <a:ea typeface="+mj-ea"/>
-        <a:cs typeface="+mj-cs"/>
-        <a:sym typeface="Calibri"/>
+        <a:latin typeface="+mn-lt"/>
+        <a:ea typeface="+mn-ea"/>
+        <a:cs typeface="+mn-cs"/>
+        <a:sym typeface="Helvetica"/>
       </a:defRPr>
     </a:lvl3pPr>
-    <a:lvl4pPr marL="0" marR="0" indent="1371600" algn="l" defTabSz="914400" rtl="0" fontAlgn="auto" latinLnBrk="0" hangingPunct="0">
+    <a:lvl4pPr marL="0" marR="0" indent="0" algn="l" defTabSz="914400" rtl="0" fontAlgn="auto" latinLnBrk="0" hangingPunct="0">
       <a:lnSpc>
         <a:spcPct val="100000"/>
       </a:lnSpc>
@@ -161,13 +161,13 @@
         </a:solidFill>
         <a:effectLst/>
         <a:uFillTx/>
-        <a:latin typeface="+mj-lt"/>
-        <a:ea typeface="+mj-ea"/>
-        <a:cs typeface="+mj-cs"/>
-        <a:sym typeface="Calibri"/>
+        <a:latin typeface="+mn-lt"/>
+        <a:ea typeface="+mn-ea"/>
+        <a:cs typeface="+mn-cs"/>
+        <a:sym typeface="Helvetica"/>
       </a:defRPr>
     </a:lvl4pPr>
-    <a:lvl5pPr marL="0" marR="0" indent="1828800" algn="l" defTabSz="914400" rtl="0" fontAlgn="auto" latinLnBrk="0" hangingPunct="0">
+    <a:lvl5pPr marL="0" marR="0" indent="0" algn="l" defTabSz="914400" rtl="0" fontAlgn="auto" latinLnBrk="0" hangingPunct="0">
       <a:lnSpc>
         <a:spcPct val="100000"/>
       </a:lnSpc>
@@ -191,13 +191,13 @@
         </a:solidFill>
         <a:effectLst/>
         <a:uFillTx/>
-        <a:latin typeface="+mj-lt"/>
-        <a:ea typeface="+mj-ea"/>
-        <a:cs typeface="+mj-cs"/>
-        <a:sym typeface="Calibri"/>
+        <a:latin typeface="+mn-lt"/>
+        <a:ea typeface="+mn-ea"/>
+        <a:cs typeface="+mn-cs"/>
+        <a:sym typeface="Helvetica"/>
       </a:defRPr>
     </a:lvl5pPr>
-    <a:lvl6pPr marL="0" marR="0" indent="2286000" algn="l" defTabSz="914400" rtl="0" fontAlgn="auto" latinLnBrk="0" hangingPunct="0">
+    <a:lvl6pPr marL="0" marR="0" indent="0" algn="l" defTabSz="914400" rtl="0" fontAlgn="auto" latinLnBrk="0" hangingPunct="0">
       <a:lnSpc>
         <a:spcPct val="100000"/>
       </a:lnSpc>
@@ -221,13 +221,13 @@
         </a:solidFill>
         <a:effectLst/>
         <a:uFillTx/>
-        <a:latin typeface="+mj-lt"/>
-        <a:ea typeface="+mj-ea"/>
-        <a:cs typeface="+mj-cs"/>
-        <a:sym typeface="Calibri"/>
+        <a:latin typeface="+mn-lt"/>
+        <a:ea typeface="+mn-ea"/>
+        <a:cs typeface="+mn-cs"/>
+        <a:sym typeface="Helvetica"/>
       </a:defRPr>
     </a:lvl6pPr>
-    <a:lvl7pPr marL="0" marR="0" indent="2743200" algn="l" defTabSz="914400" rtl="0" fontAlgn="auto" latinLnBrk="0" hangingPunct="0">
+    <a:lvl7pPr marL="0" marR="0" indent="0" algn="l" defTabSz="914400" rtl="0" fontAlgn="auto" latinLnBrk="0" hangingPunct="0">
       <a:lnSpc>
         <a:spcPct val="100000"/>
       </a:lnSpc>
@@ -251,13 +251,13 @@
         </a:solidFill>
         <a:effectLst/>
         <a:uFillTx/>
-        <a:latin typeface="+mj-lt"/>
-        <a:ea typeface="+mj-ea"/>
-        <a:cs typeface="+mj-cs"/>
-        <a:sym typeface="Calibri"/>
+        <a:latin typeface="+mn-lt"/>
+        <a:ea typeface="+mn-ea"/>
+        <a:cs typeface="+mn-cs"/>
+        <a:sym typeface="Helvetica"/>
       </a:defRPr>
     </a:lvl7pPr>
-    <a:lvl8pPr marL="0" marR="0" indent="3200400" algn="l" defTabSz="914400" rtl="0" fontAlgn="auto" latinLnBrk="0" hangingPunct="0">
+    <a:lvl8pPr marL="0" marR="0" indent="0" algn="l" defTabSz="914400" rtl="0" fontAlgn="auto" latinLnBrk="0" hangingPunct="0">
       <a:lnSpc>
         <a:spcPct val="100000"/>
       </a:lnSpc>
@@ -281,13 +281,13 @@
         </a:solidFill>
         <a:effectLst/>
         <a:uFillTx/>
-        <a:latin typeface="+mj-lt"/>
-        <a:ea typeface="+mj-ea"/>
-        <a:cs typeface="+mj-cs"/>
-        <a:sym typeface="Calibri"/>
+        <a:latin typeface="+mn-lt"/>
+        <a:ea typeface="+mn-ea"/>
+        <a:cs typeface="+mn-cs"/>
+        <a:sym typeface="Helvetica"/>
       </a:defRPr>
     </a:lvl8pPr>
-    <a:lvl9pPr marL="0" marR="0" indent="3657600" algn="l" defTabSz="914400" rtl="0" fontAlgn="auto" latinLnBrk="0" hangingPunct="0">
+    <a:lvl9pPr marL="0" marR="0" indent="0" algn="l" defTabSz="914400" rtl="0" fontAlgn="auto" latinLnBrk="0" hangingPunct="0">
       <a:lnSpc>
         <a:spcPct val="100000"/>
       </a:lnSpc>
@@ -311,10 +311,10 @@
         </a:solidFill>
         <a:effectLst/>
         <a:uFillTx/>
-        <a:latin typeface="+mj-lt"/>
-        <a:ea typeface="+mj-ea"/>
-        <a:cs typeface="+mj-cs"/>
-        <a:sym typeface="Calibri"/>
+        <a:latin typeface="+mn-lt"/>
+        <a:ea typeface="+mn-ea"/>
+        <a:cs typeface="+mn-cs"/>
+        <a:sym typeface="Helvetica"/>
       </a:defRPr>
     </a:lvl9pPr>
   </p:defaultTextStyle>
@@ -1571,8 +1571,8 @@
         </p:nvSpPr>
         <p:spPr>
           <a:xfrm>
-            <a:off x="457200" y="69056"/>
-            <a:ext cx="8229600" cy="1131094"/>
+            <a:off x="1370012" y="577453"/>
+            <a:ext cx="7315201" cy="1251347"/>
           </a:xfrm>
           <a:prstGeom prst="rect">
             <a:avLst/>
@@ -1587,7 +1587,7 @@
           </a:extLst>
         </p:spPr>
         <p:txBody>
-          <a:bodyPr lIns="45719" rIns="45719" anchor="ctr"/>
+          <a:bodyPr lIns="45718" tIns="45718" rIns="45718" bIns="45718" anchor="ctr"/>
           <a:lstStyle/>
           <a:p>
             <a:pPr/>
@@ -1607,8 +1607,8 @@
         </p:nvSpPr>
         <p:spPr>
           <a:xfrm>
-            <a:off x="457200" y="1200150"/>
-            <a:ext cx="8229600" cy="3943350"/>
+            <a:off x="5103812" y="1828800"/>
+            <a:ext cx="3581401" cy="3314700"/>
           </a:xfrm>
           <a:prstGeom prst="rect">
             <a:avLst/>
@@ -1623,7 +1623,7 @@
           </a:extLst>
         </p:spPr>
         <p:txBody>
-          <a:bodyPr lIns="45719" rIns="45719"/>
+          <a:bodyPr lIns="45718" tIns="45718" rIns="45718" bIns="45718"/>
           <a:lstStyle/>
           <a:p>
             <a:pPr/>
@@ -1667,8 +1667,8 @@
         </p:nvSpPr>
         <p:spPr>
           <a:xfrm>
-            <a:off x="4419600" y="4627562"/>
-            <a:ext cx="2133600" cy="279401"/>
+            <a:off x="6294578" y="4643111"/>
+            <a:ext cx="258623" cy="248304"/>
           </a:xfrm>
           <a:prstGeom prst="rect">
             <a:avLst/>
@@ -1678,12 +1678,17 @@
           </a:ln>
         </p:spPr>
         <p:txBody>
-          <a:bodyPr wrap="none" lIns="45719" rIns="45719" anchor="ctr">
+          <a:bodyPr wrap="none" lIns="45718" tIns="45718" rIns="45718" bIns="45718" anchor="ctr">
             <a:spAutoFit/>
           </a:bodyPr>
           <a:lstStyle>
             <a:lvl1pPr algn="r">
-              <a:defRPr sz="1200"/>
+              <a:defRPr sz="1200">
+                <a:latin typeface="+mj-lt"/>
+                <a:ea typeface="+mj-ea"/>
+                <a:cs typeface="+mj-cs"/>
+                <a:sym typeface="Calibri"/>
+              </a:defRPr>
             </a:lvl1pPr>
           </a:lstStyle>
           <a:p>
@@ -2199,7 +2204,7 @@
           <a:sym typeface="Calibri"/>
         </a:defRPr>
       </a:lvl1pPr>
-      <a:lvl2pPr marL="0" marR="0" indent="457200" algn="r" defTabSz="914400" rtl="0" latinLnBrk="0">
+      <a:lvl2pPr marL="0" marR="0" indent="0" algn="r" defTabSz="914400" rtl="0" latinLnBrk="0">
         <a:lnSpc>
           <a:spcPct val="100000"/>
         </a:lnSpc>
@@ -2225,7 +2230,7 @@
           <a:sym typeface="Calibri"/>
         </a:defRPr>
       </a:lvl2pPr>
-      <a:lvl3pPr marL="0" marR="0" indent="914400" algn="r" defTabSz="914400" rtl="0" latinLnBrk="0">
+      <a:lvl3pPr marL="0" marR="0" indent="0" algn="r" defTabSz="914400" rtl="0" latinLnBrk="0">
         <a:lnSpc>
           <a:spcPct val="100000"/>
         </a:lnSpc>
@@ -2251,7 +2256,7 @@
           <a:sym typeface="Calibri"/>
         </a:defRPr>
       </a:lvl3pPr>
-      <a:lvl4pPr marL="0" marR="0" indent="1371600" algn="r" defTabSz="914400" rtl="0" latinLnBrk="0">
+      <a:lvl4pPr marL="0" marR="0" indent="0" algn="r" defTabSz="914400" rtl="0" latinLnBrk="0">
         <a:lnSpc>
           <a:spcPct val="100000"/>
         </a:lnSpc>
@@ -2277,7 +2282,7 @@
           <a:sym typeface="Calibri"/>
         </a:defRPr>
       </a:lvl4pPr>
-      <a:lvl5pPr marL="0" marR="0" indent="1828800" algn="r" defTabSz="914400" rtl="0" latinLnBrk="0">
+      <a:lvl5pPr marL="0" marR="0" indent="0" algn="r" defTabSz="914400" rtl="0" latinLnBrk="0">
         <a:lnSpc>
           <a:spcPct val="100000"/>
         </a:lnSpc>
@@ -2303,7 +2308,7 @@
           <a:sym typeface="Calibri"/>
         </a:defRPr>
       </a:lvl5pPr>
-      <a:lvl6pPr marL="0" marR="0" indent="2286000" algn="r" defTabSz="914400" rtl="0" latinLnBrk="0">
+      <a:lvl6pPr marL="0" marR="0" indent="0" algn="r" defTabSz="914400" rtl="0" latinLnBrk="0">
         <a:lnSpc>
           <a:spcPct val="100000"/>
         </a:lnSpc>
@@ -2329,7 +2334,7 @@
           <a:sym typeface="Calibri"/>
         </a:defRPr>
       </a:lvl6pPr>
-      <a:lvl7pPr marL="0" marR="0" indent="2743200" algn="r" defTabSz="914400" rtl="0" latinLnBrk="0">
+      <a:lvl7pPr marL="0" marR="0" indent="0" algn="r" defTabSz="914400" rtl="0" latinLnBrk="0">
         <a:lnSpc>
           <a:spcPct val="100000"/>
         </a:lnSpc>
@@ -2355,7 +2360,7 @@
           <a:sym typeface="Calibri"/>
         </a:defRPr>
       </a:lvl7pPr>
-      <a:lvl8pPr marL="0" marR="0" indent="3200400" algn="r" defTabSz="914400" rtl="0" latinLnBrk="0">
+      <a:lvl8pPr marL="0" marR="0" indent="0" algn="r" defTabSz="914400" rtl="0" latinLnBrk="0">
         <a:lnSpc>
           <a:spcPct val="100000"/>
         </a:lnSpc>
@@ -2381,7 +2386,7 @@
           <a:sym typeface="Calibri"/>
         </a:defRPr>
       </a:lvl8pPr>
-      <a:lvl9pPr marL="0" marR="0" indent="3657600" algn="r" defTabSz="914400" rtl="0" latinLnBrk="0">
+      <a:lvl9pPr marL="0" marR="0" indent="0" algn="r" defTabSz="914400" rtl="0" latinLnBrk="0">
         <a:lnSpc>
           <a:spcPct val="100000"/>
         </a:lnSpc>
@@ -2455,7 +2460,7 @@
         <p:spPr>
           <a:xfrm>
             <a:off x="182879" y="182879"/>
-            <a:ext cx="310897" cy="4777742"/>
+            <a:ext cx="310898" cy="4777743"/>
           </a:xfrm>
           <a:prstGeom prst="rect">
             <a:avLst/>
@@ -2474,9 +2479,9 @@
         <p:grpSpPr>
           <a:xfrm>
             <a:off x="777240" y="274320"/>
-            <a:ext cx="1602029" cy="292609"/>
+            <a:ext cx="1602030" cy="292611"/>
             <a:chOff x="0" y="0"/>
-            <a:chExt cx="1602028" cy="292608"/>
+            <a:chExt cx="1602029" cy="292609"/>
           </a:xfrm>
         </p:grpSpPr>
         <p:sp>
@@ -2488,7 +2493,7 @@
           <p:spPr>
             <a:xfrm>
               <a:off x="0" y="0"/>
-              <a:ext cx="1602029" cy="292609"/>
+              <a:ext cx="1602030" cy="292611"/>
             </a:xfrm>
             <a:prstGeom prst="roundRect">
               <a:avLst>
@@ -2505,13 +2510,18 @@
             <a:effectLst/>
           </p:spPr>
           <p:txBody>
-            <a:bodyPr wrap="square" lIns="45719" tIns="45719" rIns="45719" bIns="45719" numCol="1" anchor="ctr">
+            <a:bodyPr wrap="square" lIns="45718" tIns="45718" rIns="45718" bIns="45718" numCol="1" anchor="ctr">
               <a:noAutofit/>
             </a:bodyPr>
             <a:lstStyle/>
             <a:p>
               <a:pPr algn="ctr">
-                <a:defRPr sz="900"/>
+                <a:defRPr sz="900">
+                  <a:latin typeface="+mj-lt"/>
+                  <a:ea typeface="+mj-ea"/>
+                  <a:cs typeface="+mj-cs"/>
+                  <a:sym typeface="Calibri"/>
+                </a:defRPr>
               </a:pPr>
             </a:p>
           </p:txBody>
@@ -2525,7 +2535,7 @@
           <p:spPr>
             <a:xfrm>
               <a:off x="37494" y="82803"/>
-              <a:ext cx="1527041" cy="127001"/>
+              <a:ext cx="1527042" cy="127001"/>
             </a:xfrm>
             <a:prstGeom prst="rect">
               <a:avLst/>
@@ -2576,7 +2586,7 @@
         </p:nvSpPr>
         <p:spPr>
           <a:xfrm>
-            <a:off x="2331720" y="239268"/>
+            <a:off x="2331720" y="239267"/>
             <a:ext cx="4480560" cy="381001"/>
           </a:xfrm>
           <a:prstGeom prst="rect">
@@ -2624,8 +2634,8 @@
         </p:nvSpPr>
         <p:spPr>
           <a:xfrm>
-            <a:off x="6629399" y="346709"/>
-            <a:ext cx="2103122" cy="147830"/>
+            <a:off x="6629399" y="346708"/>
+            <a:ext cx="2103123" cy="147831"/>
           </a:xfrm>
           <a:prstGeom prst="rect">
             <a:avLst/>
@@ -2688,10 +2698,17 @@
           </a:ln>
         </p:spPr>
         <p:txBody>
-          <a:bodyPr lIns="45719" rIns="45719"/>
+          <a:bodyPr lIns="45718" tIns="45718" rIns="45718" bIns="45718"/>
           <a:lstStyle/>
           <a:p>
-            <a:pPr/>
+            <a:pPr>
+              <a:defRPr>
+                <a:latin typeface="+mj-lt"/>
+                <a:ea typeface="+mj-ea"/>
+                <a:cs typeface="+mj-cs"/>
+                <a:sym typeface="Calibri"/>
+              </a:defRPr>
+            </a:pPr>
           </a:p>
         </p:txBody>
       </p:sp>
@@ -2704,7 +2721,7 @@
         <p:spPr>
           <a:xfrm>
             <a:off x="777240" y="932688"/>
-            <a:ext cx="3867912" cy="1261873"/>
+            <a:ext cx="3867912" cy="1261874"/>
           </a:xfrm>
           <a:prstGeom prst="roundRect">
             <a:avLst>
@@ -2721,10 +2738,17 @@
           </a:ln>
         </p:spPr>
         <p:txBody>
-          <a:bodyPr lIns="45719" rIns="45719"/>
+          <a:bodyPr lIns="45718" tIns="45718" rIns="45718" bIns="45718"/>
           <a:lstStyle/>
           <a:p>
-            <a:pPr/>
+            <a:pPr>
+              <a:defRPr>
+                <a:latin typeface="+mj-lt"/>
+                <a:ea typeface="+mj-ea"/>
+                <a:cs typeface="+mj-cs"/>
+                <a:sym typeface="Calibri"/>
+              </a:defRPr>
+            </a:pPr>
           </a:p>
         </p:txBody>
       </p:sp>
@@ -2736,8 +2760,8 @@
         </p:nvSpPr>
         <p:spPr>
           <a:xfrm>
-            <a:off x="941832" y="1094740"/>
-            <a:ext cx="365761" cy="279401"/>
+            <a:off x="941832" y="1094739"/>
+            <a:ext cx="365762" cy="279401"/>
           </a:xfrm>
           <a:prstGeom prst="rect">
             <a:avLst/>
@@ -2784,8 +2808,8 @@
         </p:nvSpPr>
         <p:spPr>
           <a:xfrm>
-            <a:off x="1380744" y="1190887"/>
-            <a:ext cx="3081529" cy="233410"/>
+            <a:off x="1380744" y="1127767"/>
+            <a:ext cx="3081529" cy="233411"/>
           </a:xfrm>
           <a:prstGeom prst="rect">
             <a:avLst/>
@@ -2835,10 +2859,10 @@
         </p:nvGrpSpPr>
         <p:grpSpPr>
           <a:xfrm>
-            <a:off x="941832" y="1664207"/>
-            <a:ext cx="3538729" cy="402337"/>
+            <a:off x="941831" y="1664206"/>
+            <a:ext cx="3538732" cy="402339"/>
             <a:chOff x="0" y="0"/>
-            <a:chExt cx="3538728" cy="402336"/>
+            <a:chExt cx="3538730" cy="402338"/>
           </a:xfrm>
         </p:grpSpPr>
         <p:sp>
@@ -2849,8 +2873,8 @@
           </p:nvSpPr>
           <p:spPr>
             <a:xfrm>
-              <a:off x="0" y="0"/>
-              <a:ext cx="3538729" cy="402337"/>
+              <a:off x="-1" y="-1"/>
+              <a:ext cx="3538732" cy="402340"/>
             </a:xfrm>
             <a:prstGeom prst="roundRect">
               <a:avLst>
@@ -2870,13 +2894,18 @@
             <a:effectLst/>
           </p:spPr>
           <p:txBody>
-            <a:bodyPr wrap="square" lIns="45719" tIns="45719" rIns="45719" bIns="45719" numCol="1" anchor="ctr">
+            <a:bodyPr wrap="square" lIns="45718" tIns="45718" rIns="45718" bIns="45718" numCol="1" anchor="ctr">
               <a:noAutofit/>
             </a:bodyPr>
             <a:lstStyle/>
             <a:p>
               <a:pPr>
-                <a:defRPr sz="1200"/>
+                <a:defRPr sz="1200">
+                  <a:latin typeface="+mj-lt"/>
+                  <a:ea typeface="+mj-ea"/>
+                  <a:cs typeface="+mj-cs"/>
+                  <a:sym typeface="Calibri"/>
+                </a:defRPr>
               </a:pPr>
             </a:p>
           </p:txBody>
@@ -2890,7 +2919,7 @@
           <p:spPr>
             <a:xfrm>
               <a:off x="31724" y="113744"/>
-              <a:ext cx="3475280" cy="174848"/>
+              <a:ext cx="3475281" cy="174845"/>
             </a:xfrm>
             <a:prstGeom prst="rect">
               <a:avLst/>
@@ -2942,7 +2971,7 @@
         <p:spPr>
           <a:xfrm>
             <a:off x="4864608" y="932688"/>
-            <a:ext cx="3867913" cy="1261873"/>
+            <a:ext cx="3867914" cy="1261874"/>
           </a:xfrm>
           <a:prstGeom prst="roundRect">
             <a:avLst>
@@ -2959,10 +2988,17 @@
           </a:ln>
         </p:spPr>
         <p:txBody>
-          <a:bodyPr lIns="45719" rIns="45719"/>
+          <a:bodyPr lIns="45718" tIns="45718" rIns="45718" bIns="45718"/>
           <a:lstStyle/>
           <a:p>
-            <a:pPr/>
+            <a:pPr>
+              <a:defRPr>
+                <a:latin typeface="+mj-lt"/>
+                <a:ea typeface="+mj-ea"/>
+                <a:cs typeface="+mj-cs"/>
+                <a:sym typeface="Calibri"/>
+              </a:defRPr>
+            </a:pPr>
           </a:p>
         </p:txBody>
       </p:sp>
@@ -2974,8 +3010,8 @@
         </p:nvSpPr>
         <p:spPr>
           <a:xfrm>
-            <a:off x="5029199" y="1094740"/>
-            <a:ext cx="365762" cy="279401"/>
+            <a:off x="5029198" y="1094739"/>
+            <a:ext cx="365763" cy="279401"/>
           </a:xfrm>
           <a:prstGeom prst="rect">
             <a:avLst/>
@@ -3022,8 +3058,8 @@
         </p:nvSpPr>
         <p:spPr>
           <a:xfrm>
-            <a:off x="5468111" y="1190887"/>
-            <a:ext cx="3081529" cy="233410"/>
+            <a:off x="5468110" y="1127767"/>
+            <a:ext cx="3081530" cy="233411"/>
           </a:xfrm>
           <a:prstGeom prst="rect">
             <a:avLst/>
@@ -3073,10 +3109,10 @@
         </p:nvGrpSpPr>
         <p:grpSpPr>
           <a:xfrm>
-            <a:off x="5029200" y="1664207"/>
-            <a:ext cx="3538729" cy="402337"/>
+            <a:off x="5029199" y="1664206"/>
+            <a:ext cx="3538732" cy="402339"/>
             <a:chOff x="0" y="0"/>
-            <a:chExt cx="3538728" cy="402336"/>
+            <a:chExt cx="3538730" cy="402338"/>
           </a:xfrm>
         </p:grpSpPr>
         <p:sp>
@@ -3087,8 +3123,8 @@
           </p:nvSpPr>
           <p:spPr>
             <a:xfrm>
-              <a:off x="0" y="0"/>
-              <a:ext cx="3538729" cy="402337"/>
+              <a:off x="-1" y="-1"/>
+              <a:ext cx="3538732" cy="402340"/>
             </a:xfrm>
             <a:prstGeom prst="roundRect">
               <a:avLst>
@@ -3108,13 +3144,18 @@
             <a:effectLst/>
           </p:spPr>
           <p:txBody>
-            <a:bodyPr wrap="square" lIns="45719" tIns="45719" rIns="45719" bIns="45719" numCol="1" anchor="ctr">
+            <a:bodyPr wrap="square" lIns="45718" tIns="45718" rIns="45718" bIns="45718" numCol="1" anchor="ctr">
               <a:noAutofit/>
             </a:bodyPr>
             <a:lstStyle/>
             <a:p>
               <a:pPr>
-                <a:defRPr sz="1200"/>
+                <a:defRPr sz="1200">
+                  <a:latin typeface="+mj-lt"/>
+                  <a:ea typeface="+mj-ea"/>
+                  <a:cs typeface="+mj-cs"/>
+                  <a:sym typeface="Calibri"/>
+                </a:defRPr>
               </a:pPr>
             </a:p>
           </p:txBody>
@@ -3128,7 +3169,7 @@
           <p:spPr>
             <a:xfrm>
               <a:off x="31724" y="113744"/>
-              <a:ext cx="3475280" cy="174848"/>
+              <a:ext cx="3475281" cy="174845"/>
             </a:xfrm>
             <a:prstGeom prst="rect">
               <a:avLst/>
@@ -3180,7 +3221,7 @@
         <p:spPr>
           <a:xfrm>
             <a:off x="777240" y="2313432"/>
-            <a:ext cx="3867912" cy="1261873"/>
+            <a:ext cx="3867912" cy="1261874"/>
           </a:xfrm>
           <a:prstGeom prst="roundRect">
             <a:avLst>
@@ -3197,10 +3238,17 @@
           </a:ln>
         </p:spPr>
         <p:txBody>
-          <a:bodyPr lIns="45719" rIns="45719"/>
+          <a:bodyPr lIns="45718" tIns="45718" rIns="45718" bIns="45718"/>
           <a:lstStyle/>
           <a:p>
-            <a:pPr/>
+            <a:pPr>
+              <a:defRPr>
+                <a:latin typeface="+mj-lt"/>
+                <a:ea typeface="+mj-ea"/>
+                <a:cs typeface="+mj-cs"/>
+                <a:sym typeface="Calibri"/>
+              </a:defRPr>
+            </a:pPr>
           </a:p>
         </p:txBody>
       </p:sp>
@@ -3212,8 +3260,8 @@
         </p:nvSpPr>
         <p:spPr>
           <a:xfrm>
-            <a:off x="941832" y="2475484"/>
-            <a:ext cx="365761" cy="279401"/>
+            <a:off x="941832" y="2475483"/>
+            <a:ext cx="365762" cy="279401"/>
           </a:xfrm>
           <a:prstGeom prst="rect">
             <a:avLst/>
@@ -3260,8 +3308,8 @@
         </p:nvSpPr>
         <p:spPr>
           <a:xfrm>
-            <a:off x="1380744" y="2571631"/>
-            <a:ext cx="3081529" cy="233410"/>
+            <a:off x="1380744" y="2508511"/>
+            <a:ext cx="3081529" cy="233411"/>
           </a:xfrm>
           <a:prstGeom prst="rect">
             <a:avLst/>
@@ -3311,10 +3359,10 @@
         </p:nvGrpSpPr>
         <p:grpSpPr>
           <a:xfrm>
-            <a:off x="941832" y="3044951"/>
-            <a:ext cx="3538729" cy="402337"/>
+            <a:off x="941831" y="3044950"/>
+            <a:ext cx="3538732" cy="402339"/>
             <a:chOff x="0" y="0"/>
-            <a:chExt cx="3538728" cy="402336"/>
+            <a:chExt cx="3538730" cy="402338"/>
           </a:xfrm>
         </p:grpSpPr>
         <p:sp>
@@ -3325,8 +3373,8 @@
           </p:nvSpPr>
           <p:spPr>
             <a:xfrm>
-              <a:off x="0" y="0"/>
-              <a:ext cx="3538729" cy="402337"/>
+              <a:off x="-1" y="-1"/>
+              <a:ext cx="3538732" cy="402340"/>
             </a:xfrm>
             <a:prstGeom prst="roundRect">
               <a:avLst>
@@ -3346,13 +3394,18 @@
             <a:effectLst/>
           </p:spPr>
           <p:txBody>
-            <a:bodyPr wrap="square" lIns="45719" tIns="45719" rIns="45719" bIns="45719" numCol="1" anchor="ctr">
+            <a:bodyPr wrap="square" lIns="45718" tIns="45718" rIns="45718" bIns="45718" numCol="1" anchor="ctr">
               <a:noAutofit/>
             </a:bodyPr>
             <a:lstStyle/>
             <a:p>
               <a:pPr>
-                <a:defRPr sz="1200"/>
+                <a:defRPr sz="1200">
+                  <a:latin typeface="+mj-lt"/>
+                  <a:ea typeface="+mj-ea"/>
+                  <a:cs typeface="+mj-cs"/>
+                  <a:sym typeface="Calibri"/>
+                </a:defRPr>
               </a:pPr>
             </a:p>
           </p:txBody>
@@ -3366,7 +3419,7 @@
           <p:spPr>
             <a:xfrm>
               <a:off x="31724" y="113744"/>
-              <a:ext cx="3475280" cy="174848"/>
+              <a:ext cx="3475281" cy="174845"/>
             </a:xfrm>
             <a:prstGeom prst="rect">
               <a:avLst/>
@@ -3418,7 +3471,7 @@
         <p:spPr>
           <a:xfrm>
             <a:off x="4864608" y="2313432"/>
-            <a:ext cx="3867913" cy="1261873"/>
+            <a:ext cx="3867914" cy="1261874"/>
           </a:xfrm>
           <a:prstGeom prst="roundRect">
             <a:avLst>
@@ -3435,10 +3488,17 @@
           </a:ln>
         </p:spPr>
         <p:txBody>
-          <a:bodyPr lIns="45719" rIns="45719"/>
+          <a:bodyPr lIns="45718" tIns="45718" rIns="45718" bIns="45718"/>
           <a:lstStyle/>
           <a:p>
-            <a:pPr/>
+            <a:pPr>
+              <a:defRPr>
+                <a:latin typeface="+mj-lt"/>
+                <a:ea typeface="+mj-ea"/>
+                <a:cs typeface="+mj-cs"/>
+                <a:sym typeface="Calibri"/>
+              </a:defRPr>
+            </a:pPr>
           </a:p>
         </p:txBody>
       </p:sp>
@@ -3450,8 +3510,8 @@
         </p:nvSpPr>
         <p:spPr>
           <a:xfrm>
-            <a:off x="5029199" y="2475484"/>
-            <a:ext cx="365762" cy="279401"/>
+            <a:off x="5029198" y="2475483"/>
+            <a:ext cx="365763" cy="279401"/>
           </a:xfrm>
           <a:prstGeom prst="rect">
             <a:avLst/>
@@ -3498,8 +3558,8 @@
         </p:nvSpPr>
         <p:spPr>
           <a:xfrm>
-            <a:off x="5468111" y="2571631"/>
-            <a:ext cx="3081529" cy="233410"/>
+            <a:off x="5468110" y="2508511"/>
+            <a:ext cx="3081530" cy="233411"/>
           </a:xfrm>
           <a:prstGeom prst="rect">
             <a:avLst/>
@@ -3549,10 +3609,10 @@
         </p:nvGrpSpPr>
         <p:grpSpPr>
           <a:xfrm>
-            <a:off x="5029200" y="3044951"/>
-            <a:ext cx="3538729" cy="402337"/>
+            <a:off x="5029199" y="3044950"/>
+            <a:ext cx="3538732" cy="402339"/>
             <a:chOff x="0" y="0"/>
-            <a:chExt cx="3538728" cy="402336"/>
+            <a:chExt cx="3538730" cy="402338"/>
           </a:xfrm>
         </p:grpSpPr>
         <p:sp>
@@ -3563,8 +3623,8 @@
           </p:nvSpPr>
           <p:spPr>
             <a:xfrm>
-              <a:off x="0" y="0"/>
-              <a:ext cx="3538729" cy="402337"/>
+              <a:off x="-1" y="-1"/>
+              <a:ext cx="3538732" cy="402340"/>
             </a:xfrm>
             <a:prstGeom prst="roundRect">
               <a:avLst>
@@ -3584,13 +3644,18 @@
             <a:effectLst/>
           </p:spPr>
           <p:txBody>
-            <a:bodyPr wrap="square" lIns="45719" tIns="45719" rIns="45719" bIns="45719" numCol="1" anchor="ctr">
+            <a:bodyPr wrap="square" lIns="45718" tIns="45718" rIns="45718" bIns="45718" numCol="1" anchor="ctr">
               <a:noAutofit/>
             </a:bodyPr>
             <a:lstStyle/>
             <a:p>
               <a:pPr>
-                <a:defRPr sz="1200"/>
+                <a:defRPr sz="1200">
+                  <a:latin typeface="+mj-lt"/>
+                  <a:ea typeface="+mj-ea"/>
+                  <a:cs typeface="+mj-cs"/>
+                  <a:sym typeface="Calibri"/>
+                </a:defRPr>
               </a:pPr>
             </a:p>
           </p:txBody>
@@ -3604,7 +3669,7 @@
           <p:spPr>
             <a:xfrm>
               <a:off x="31724" y="113744"/>
-              <a:ext cx="3475280" cy="174848"/>
+              <a:ext cx="3475281" cy="174845"/>
             </a:xfrm>
             <a:prstGeom prst="rect">
               <a:avLst/>
@@ -3656,7 +3721,7 @@
         <p:spPr>
           <a:xfrm>
             <a:off x="777240" y="3694176"/>
-            <a:ext cx="3867912" cy="1261873"/>
+            <a:ext cx="3867912" cy="1261874"/>
           </a:xfrm>
           <a:prstGeom prst="roundRect">
             <a:avLst>
@@ -3673,10 +3738,17 @@
           </a:ln>
         </p:spPr>
         <p:txBody>
-          <a:bodyPr lIns="45719" rIns="45719"/>
+          <a:bodyPr lIns="45718" tIns="45718" rIns="45718" bIns="45718"/>
           <a:lstStyle/>
           <a:p>
-            <a:pPr/>
+            <a:pPr>
+              <a:defRPr>
+                <a:latin typeface="+mj-lt"/>
+                <a:ea typeface="+mj-ea"/>
+                <a:cs typeface="+mj-cs"/>
+                <a:sym typeface="Calibri"/>
+              </a:defRPr>
+            </a:pPr>
           </a:p>
         </p:txBody>
       </p:sp>
@@ -3689,7 +3761,7 @@
         <p:spPr>
           <a:xfrm>
             <a:off x="941832" y="3856227"/>
-            <a:ext cx="365761" cy="279401"/>
+            <a:ext cx="365762" cy="279401"/>
           </a:xfrm>
           <a:prstGeom prst="rect">
             <a:avLst/>
@@ -3736,8 +3808,8 @@
         </p:nvSpPr>
         <p:spPr>
           <a:xfrm>
-            <a:off x="1380744" y="3952375"/>
-            <a:ext cx="3081529" cy="233410"/>
+            <a:off x="1380744" y="3889255"/>
+            <a:ext cx="3081529" cy="233411"/>
           </a:xfrm>
           <a:prstGeom prst="rect">
             <a:avLst/>
@@ -3787,10 +3859,10 @@
         </p:nvGrpSpPr>
         <p:grpSpPr>
           <a:xfrm>
-            <a:off x="941832" y="4425696"/>
-            <a:ext cx="3538729" cy="402337"/>
+            <a:off x="941831" y="4425696"/>
+            <a:ext cx="3538732" cy="402339"/>
             <a:chOff x="0" y="0"/>
-            <a:chExt cx="3538728" cy="402336"/>
+            <a:chExt cx="3538730" cy="402338"/>
           </a:xfrm>
         </p:grpSpPr>
         <p:sp>
@@ -3801,8 +3873,8 @@
           </p:nvSpPr>
           <p:spPr>
             <a:xfrm>
-              <a:off x="0" y="0"/>
-              <a:ext cx="3538729" cy="402337"/>
+              <a:off x="-1" y="-1"/>
+              <a:ext cx="3538732" cy="402340"/>
             </a:xfrm>
             <a:prstGeom prst="roundRect">
               <a:avLst>
@@ -3822,13 +3894,18 @@
             <a:effectLst/>
           </p:spPr>
           <p:txBody>
-            <a:bodyPr wrap="square" lIns="45719" tIns="45719" rIns="45719" bIns="45719" numCol="1" anchor="ctr">
+            <a:bodyPr wrap="square" lIns="45718" tIns="45718" rIns="45718" bIns="45718" numCol="1" anchor="ctr">
               <a:noAutofit/>
             </a:bodyPr>
             <a:lstStyle/>
             <a:p>
               <a:pPr>
-                <a:defRPr sz="1200"/>
+                <a:defRPr sz="1200">
+                  <a:latin typeface="+mj-lt"/>
+                  <a:ea typeface="+mj-ea"/>
+                  <a:cs typeface="+mj-cs"/>
+                  <a:sym typeface="Calibri"/>
+                </a:defRPr>
               </a:pPr>
             </a:p>
           </p:txBody>
@@ -3842,7 +3919,7 @@
           <p:spPr>
             <a:xfrm>
               <a:off x="31724" y="113744"/>
-              <a:ext cx="3475280" cy="174848"/>
+              <a:ext cx="3475281" cy="174845"/>
             </a:xfrm>
             <a:prstGeom prst="rect">
               <a:avLst/>
@@ -3894,7 +3971,7 @@
         <p:spPr>
           <a:xfrm>
             <a:off x="4864608" y="3694176"/>
-            <a:ext cx="3867913" cy="1261873"/>
+            <a:ext cx="3867914" cy="1261874"/>
           </a:xfrm>
           <a:prstGeom prst="roundRect">
             <a:avLst>
@@ -3911,10 +3988,17 @@
           </a:ln>
         </p:spPr>
         <p:txBody>
-          <a:bodyPr lIns="45719" rIns="45719"/>
+          <a:bodyPr lIns="45718" tIns="45718" rIns="45718" bIns="45718"/>
           <a:lstStyle/>
           <a:p>
-            <a:pPr/>
+            <a:pPr>
+              <a:defRPr>
+                <a:latin typeface="+mj-lt"/>
+                <a:ea typeface="+mj-ea"/>
+                <a:cs typeface="+mj-cs"/>
+                <a:sym typeface="Calibri"/>
+              </a:defRPr>
+            </a:pPr>
           </a:p>
         </p:txBody>
       </p:sp>
@@ -3926,8 +4010,8 @@
         </p:nvSpPr>
         <p:spPr>
           <a:xfrm>
-            <a:off x="5029199" y="3856227"/>
-            <a:ext cx="365762" cy="279401"/>
+            <a:off x="5029198" y="3856227"/>
+            <a:ext cx="365763" cy="279401"/>
           </a:xfrm>
           <a:prstGeom prst="rect">
             <a:avLst/>
@@ -3974,8 +4058,8 @@
         </p:nvSpPr>
         <p:spPr>
           <a:xfrm>
-            <a:off x="5468111" y="3952375"/>
-            <a:ext cx="3081529" cy="233410"/>
+            <a:off x="5468110" y="3889255"/>
+            <a:ext cx="3081530" cy="233411"/>
           </a:xfrm>
           <a:prstGeom prst="rect">
             <a:avLst/>
@@ -4025,10 +4109,10 @@
         </p:nvGrpSpPr>
         <p:grpSpPr>
           <a:xfrm>
-            <a:off x="5029200" y="4425696"/>
-            <a:ext cx="3538729" cy="402337"/>
+            <a:off x="5029199" y="4425696"/>
+            <a:ext cx="3538732" cy="402339"/>
             <a:chOff x="0" y="0"/>
-            <a:chExt cx="3538728" cy="402336"/>
+            <a:chExt cx="3538730" cy="402338"/>
           </a:xfrm>
         </p:grpSpPr>
         <p:sp>
@@ -4039,8 +4123,8 @@
           </p:nvSpPr>
           <p:spPr>
             <a:xfrm>
-              <a:off x="0" y="0"/>
-              <a:ext cx="3538729" cy="402337"/>
+              <a:off x="-1" y="-1"/>
+              <a:ext cx="3538732" cy="402340"/>
             </a:xfrm>
             <a:prstGeom prst="roundRect">
               <a:avLst>
@@ -4060,13 +4144,18 @@
             <a:effectLst/>
           </p:spPr>
           <p:txBody>
-            <a:bodyPr wrap="square" lIns="45719" tIns="45719" rIns="45719" bIns="45719" numCol="1" anchor="ctr">
+            <a:bodyPr wrap="square" lIns="45718" tIns="45718" rIns="45718" bIns="45718" numCol="1" anchor="ctr">
               <a:noAutofit/>
             </a:bodyPr>
             <a:lstStyle/>
             <a:p>
               <a:pPr>
-                <a:defRPr sz="1200"/>
+                <a:defRPr sz="1200">
+                  <a:latin typeface="+mj-lt"/>
+                  <a:ea typeface="+mj-ea"/>
+                  <a:cs typeface="+mj-cs"/>
+                  <a:sym typeface="Calibri"/>
+                </a:defRPr>
               </a:pPr>
             </a:p>
           </p:txBody>
@@ -4080,7 +4169,7 @@
           <p:spPr>
             <a:xfrm>
               <a:off x="31724" y="113744"/>
-              <a:ext cx="3475280" cy="174848"/>
+              <a:ext cx="3475281" cy="174845"/>
             </a:xfrm>
             <a:prstGeom prst="rect">
               <a:avLst/>
@@ -4487,6 +4576,41 @@
                       </p:childTnLst>
                     </p:cTn>
                   </p:par>
+                  <p:par>
+                    <p:cTn id="37" fill="hold">
+                      <p:stCondLst>
+                        <p:cond delay="indefinite"/>
+                      </p:stCondLst>
+                      <p:childTnLst>
+                        <p:par>
+                          <p:cTn id="38" fill="hold">
+                            <p:stCondLst>
+                              <p:cond delay="0"/>
+                            </p:stCondLst>
+                            <p:childTnLst>
+                              <p:par>
+                                <p:cTn id="39" presetClass="mediacall" nodeType="clickEffect" presetSubtype="0" presetID="3" grpId="1" fill="hold">
+                                  <p:stCondLst>
+                                    <p:cond delay="0"/>
+                                  </p:stCondLst>
+                                  <p:childTnLst>
+                                    <p:cmd type="call" cmd="stop">
+                                      <p:cBhvr>
+                                        <p:cTn id="40" dur="1000" fill="hold"/>
+                                        <p:tgtEl>
+                                          <p:spTgt spid="20"/>
+                                        </p:tgtEl>
+                                      </p:cBhvr>
+                                    </p:cmd>
+                                  </p:childTnLst>
+                                </p:cTn>
+                              </p:par>
+                            </p:childTnLst>
+                          </p:cTn>
+                        </p:par>
+                      </p:childTnLst>
+                    </p:cTn>
+                  </p:par>
                 </p:childTnLst>
               </p:cTn>
               <p:prevCondLst>
@@ -4506,7 +4630,7 @@
             </p:seq>
             <p:video fullScrn="0">
               <p:cMediaNode mute="0" showWhenStopped="1" numSld="1" vol="0">
-                <p:cTn id="37" fill="hold" display="0">
+                <p:cTn id="41" fill="hold" display="0">
                   <p:stCondLst>
                     <p:cond delay="indefinite"/>
                   </p:stCondLst>
@@ -4517,7 +4641,7 @@
               </p:cMediaNode>
             </p:video>
             <p:seq concurrent="1" prevAc="none" nextAc="seek">
-              <p:cTn id="38" evtFilter="cancelBubble" nodeType="interactiveSeq" restart="whenNotActive" fill="hold">
+              <p:cTn id="42" evtFilter="cancelBubble" nodeType="interactiveSeq" restart="whenNotActive" fill="hold">
                 <p:stCondLst>
                   <p:cond delay="0" evt="onClick">
                     <p:tgtEl>
@@ -4530,26 +4654,26 @@
                 </p:endSync>
                 <p:childTnLst>
                   <p:par>
-                    <p:cTn id="39" fill="hold">
+                    <p:cTn id="43" fill="hold">
                       <p:stCondLst>
                         <p:cond delay="0"/>
                       </p:stCondLst>
                       <p:childTnLst>
                         <p:par>
-                          <p:cTn id="40" fill="hold">
+                          <p:cTn id="44" fill="hold">
                             <p:stCondLst>
                               <p:cond delay="0"/>
                             </p:stCondLst>
                             <p:childTnLst>
                               <p:par>
-                                <p:cTn id="41" presetClass="mediacall" nodeType="clickEffect" presetSubtype="0" presetID="2" fill="hold">
+                                <p:cTn id="45" presetClass="mediacall" nodeType="clickEffect" presetSubtype="0" presetID="2" fill="hold">
                                   <p:stCondLst>
                                     <p:cond delay="0"/>
                                   </p:stCondLst>
                                   <p:childTnLst>
                                     <p:cmd type="call" cmd="togglePause">
                                       <p:cBhvr>
-                                        <p:cTn id="42" dur="1" fill="hold"/>
+                                        <p:cTn id="46" dur="1" fill="hold"/>
                                         <p:tgtEl>
                                           <p:spTgt spid="20"/>
                                         </p:tgtEl>
@@ -4579,12 +4703,12 @@
       </p:par>
     </p:tnLst>
     <p:bldLst>
+      <p:bldP build="whole" bldLvl="1" animBg="1" rev="0" advAuto="0" spid="56" grpId="6"/>
+      <p:bldP build="whole" bldLvl="1" animBg="1" rev="0" advAuto="0" spid="62" grpId="7"/>
+      <p:bldP build="whole" bldLvl="1" animBg="1" rev="0" advAuto="0" spid="44" grpId="4"/>
+      <p:bldP build="whole" bldLvl="1" animBg="1" rev="0" advAuto="0" spid="32" grpId="2"/>
       <p:bldP build="whole" bldLvl="1" animBg="1" rev="0" advAuto="0" spid="38" grpId="3"/>
       <p:bldP build="whole" bldLvl="1" animBg="1" rev="0" advAuto="0" spid="50" grpId="5"/>
-      <p:bldP build="whole" bldLvl="1" animBg="1" rev="0" advAuto="0" spid="62" grpId="7"/>
-      <p:bldP build="whole" bldLvl="1" animBg="1" rev="0" advAuto="0" spid="56" grpId="6"/>
-      <p:bldP build="whole" bldLvl="1" animBg="1" rev="0" advAuto="0" spid="32" grpId="2"/>
-      <p:bldP build="whole" bldLvl="1" animBg="1" rev="0" advAuto="0" spid="44" grpId="4"/>
     </p:bldLst>
   </p:timing>
 </p:sld>
@@ -4633,7 +4757,7 @@
         <p:spPr>
           <a:xfrm>
             <a:off x="182879" y="182879"/>
-            <a:ext cx="310897" cy="4777742"/>
+            <a:ext cx="310898" cy="4777743"/>
           </a:xfrm>
           <a:prstGeom prst="rect">
             <a:avLst/>
@@ -4651,10 +4775,10 @@
         </p:nvGrpSpPr>
         <p:grpSpPr>
           <a:xfrm>
-            <a:off x="777240" y="274320"/>
-            <a:ext cx="1512418" cy="292609"/>
+            <a:off x="777239" y="274320"/>
+            <a:ext cx="1512420" cy="292611"/>
             <a:chOff x="0" y="0"/>
-            <a:chExt cx="1512417" cy="292608"/>
+            <a:chExt cx="1512419" cy="292609"/>
           </a:xfrm>
         </p:grpSpPr>
         <p:sp>
@@ -4665,8 +4789,8 @@
           </p:nvSpPr>
           <p:spPr>
             <a:xfrm>
-              <a:off x="0" y="0"/>
-              <a:ext cx="1512418" cy="292609"/>
+              <a:off x="-1" y="0"/>
+              <a:ext cx="1512420" cy="292611"/>
             </a:xfrm>
             <a:prstGeom prst="roundRect">
               <a:avLst>
@@ -4683,13 +4807,18 @@
             <a:effectLst/>
           </p:spPr>
           <p:txBody>
-            <a:bodyPr wrap="square" lIns="45719" tIns="45719" rIns="45719" bIns="45719" numCol="1" anchor="ctr">
+            <a:bodyPr wrap="square" lIns="45718" tIns="45718" rIns="45718" bIns="45718" numCol="1" anchor="ctr">
               <a:noAutofit/>
             </a:bodyPr>
             <a:lstStyle/>
             <a:p>
               <a:pPr algn="ctr">
-                <a:defRPr sz="900"/>
+                <a:defRPr sz="900">
+                  <a:latin typeface="+mj-lt"/>
+                  <a:ea typeface="+mj-ea"/>
+                  <a:cs typeface="+mj-cs"/>
+                  <a:sym typeface="Calibri"/>
+                </a:defRPr>
               </a:pPr>
             </a:p>
           </p:txBody>
@@ -4702,8 +4831,8 @@
           </p:nvSpPr>
           <p:spPr>
             <a:xfrm>
-              <a:off x="37494" y="82803"/>
-              <a:ext cx="1437430" cy="127001"/>
+              <a:off x="37493" y="82803"/>
+              <a:ext cx="1437433" cy="127001"/>
             </a:xfrm>
             <a:prstGeom prst="rect">
               <a:avLst/>
@@ -4802,10 +4931,10 @@
         </p:nvGrpSpPr>
         <p:grpSpPr>
           <a:xfrm>
-            <a:off x="777240" y="1591055"/>
-            <a:ext cx="2505456" cy="1463041"/>
+            <a:off x="777240" y="1591054"/>
+            <a:ext cx="2505457" cy="1463044"/>
             <a:chOff x="0" y="0"/>
-            <a:chExt cx="2505455" cy="1463040"/>
+            <a:chExt cx="2505456" cy="1463042"/>
           </a:xfrm>
         </p:grpSpPr>
         <p:sp>
@@ -4817,7 +4946,7 @@
           <p:spPr>
             <a:xfrm>
               <a:off x="0" y="-1"/>
-              <a:ext cx="2505456" cy="1463042"/>
+              <a:ext cx="2505457" cy="1463043"/>
             </a:xfrm>
             <a:prstGeom prst="roundRect">
               <a:avLst>
@@ -4837,12 +4966,19 @@
             <a:effectLst/>
           </p:spPr>
           <p:txBody>
-            <a:bodyPr wrap="square" lIns="45719" tIns="45719" rIns="45719" bIns="45719" numCol="1" anchor="t">
+            <a:bodyPr wrap="square" lIns="45718" tIns="45718" rIns="45718" bIns="45718" numCol="1" anchor="t">
               <a:noAutofit/>
             </a:bodyPr>
             <a:lstStyle/>
             <a:p>
-              <a:pPr/>
+              <a:pPr>
+                <a:defRPr>
+                  <a:latin typeface="+mj-lt"/>
+                  <a:ea typeface="+mj-ea"/>
+                  <a:cs typeface="+mj-cs"/>
+                  <a:sym typeface="Calibri"/>
+                </a:defRPr>
+              </a:pPr>
             </a:p>
           </p:txBody>
         </p:sp>
@@ -4855,7 +4991,7 @@
           <p:spPr>
             <a:xfrm>
               <a:off x="164591" y="164591"/>
-              <a:ext cx="347473" cy="347473"/>
+              <a:ext cx="347475" cy="347475"/>
             </a:xfrm>
             <a:prstGeom prst="ellipse">
               <a:avLst/>
@@ -4873,12 +5009,19 @@
             <a:effectLst/>
           </p:spPr>
           <p:txBody>
-            <a:bodyPr wrap="square" lIns="45719" tIns="45719" rIns="45719" bIns="45719" numCol="1" anchor="t">
+            <a:bodyPr wrap="square" lIns="45718" tIns="45718" rIns="45718" bIns="45718" numCol="1" anchor="t">
               <a:noAutofit/>
             </a:bodyPr>
             <a:lstStyle/>
             <a:p>
-              <a:pPr/>
+              <a:pPr>
+                <a:defRPr>
+                  <a:latin typeface="+mj-lt"/>
+                  <a:ea typeface="+mj-ea"/>
+                  <a:cs typeface="+mj-cs"/>
+                  <a:sym typeface="Calibri"/>
+                </a:defRPr>
+              </a:pPr>
             </a:p>
           </p:txBody>
         </p:sp>
@@ -4891,7 +5034,7 @@
           <p:spPr>
             <a:xfrm>
               <a:off x="164591" y="270555"/>
-              <a:ext cx="347473" cy="135546"/>
+              <a:ext cx="347474" cy="135546"/>
             </a:xfrm>
             <a:prstGeom prst="rect">
               <a:avLst/>
@@ -4942,7 +5085,7 @@
           <p:spPr>
             <a:xfrm>
               <a:off x="164591" y="640079"/>
-              <a:ext cx="2176273" cy="398057"/>
+              <a:ext cx="2176274" cy="398057"/>
             </a:xfrm>
             <a:prstGeom prst="rect">
               <a:avLst/>
@@ -4996,10 +5139,10 @@
         </p:nvGrpSpPr>
         <p:grpSpPr>
           <a:xfrm>
-            <a:off x="3502152" y="1591055"/>
-            <a:ext cx="2505457" cy="1463041"/>
+            <a:off x="3502152" y="1591054"/>
+            <a:ext cx="2505459" cy="1463044"/>
             <a:chOff x="0" y="0"/>
-            <a:chExt cx="2505455" cy="1463040"/>
+            <a:chExt cx="2505457" cy="1463042"/>
           </a:xfrm>
         </p:grpSpPr>
         <p:sp>
@@ -5011,7 +5154,7 @@
           <p:spPr>
             <a:xfrm>
               <a:off x="0" y="-1"/>
-              <a:ext cx="2505456" cy="1463042"/>
+              <a:ext cx="2505458" cy="1463043"/>
             </a:xfrm>
             <a:prstGeom prst="roundRect">
               <a:avLst>
@@ -5031,12 +5174,19 @@
             <a:effectLst/>
           </p:spPr>
           <p:txBody>
-            <a:bodyPr wrap="square" lIns="45719" tIns="45719" rIns="45719" bIns="45719" numCol="1" anchor="t">
+            <a:bodyPr wrap="square" lIns="45718" tIns="45718" rIns="45718" bIns="45718" numCol="1" anchor="t">
               <a:noAutofit/>
             </a:bodyPr>
             <a:lstStyle/>
             <a:p>
-              <a:pPr/>
+              <a:pPr>
+                <a:defRPr>
+                  <a:latin typeface="+mj-lt"/>
+                  <a:ea typeface="+mj-ea"/>
+                  <a:cs typeface="+mj-cs"/>
+                  <a:sym typeface="Calibri"/>
+                </a:defRPr>
+              </a:pPr>
             </a:p>
           </p:txBody>
         </p:sp>
@@ -5049,7 +5199,7 @@
           <p:spPr>
             <a:xfrm>
               <a:off x="164591" y="164591"/>
-              <a:ext cx="347473" cy="347473"/>
+              <a:ext cx="347475" cy="347475"/>
             </a:xfrm>
             <a:prstGeom prst="ellipse">
               <a:avLst/>
@@ -5067,12 +5217,19 @@
             <a:effectLst/>
           </p:spPr>
           <p:txBody>
-            <a:bodyPr wrap="square" lIns="45719" tIns="45719" rIns="45719" bIns="45719" numCol="1" anchor="t">
+            <a:bodyPr wrap="square" lIns="45718" tIns="45718" rIns="45718" bIns="45718" numCol="1" anchor="t">
               <a:noAutofit/>
             </a:bodyPr>
             <a:lstStyle/>
             <a:p>
-              <a:pPr/>
+              <a:pPr>
+                <a:defRPr>
+                  <a:latin typeface="+mj-lt"/>
+                  <a:ea typeface="+mj-ea"/>
+                  <a:cs typeface="+mj-cs"/>
+                  <a:sym typeface="Calibri"/>
+                </a:defRPr>
+              </a:pPr>
             </a:p>
           </p:txBody>
         </p:sp>
@@ -5085,7 +5242,7 @@
           <p:spPr>
             <a:xfrm>
               <a:off x="164591" y="270555"/>
-              <a:ext cx="347473" cy="135546"/>
+              <a:ext cx="347474" cy="135546"/>
             </a:xfrm>
             <a:prstGeom prst="rect">
               <a:avLst/>
@@ -5136,7 +5293,7 @@
           <p:spPr>
             <a:xfrm>
               <a:off x="164591" y="640079"/>
-              <a:ext cx="2176273" cy="601257"/>
+              <a:ext cx="2176275" cy="601257"/>
             </a:xfrm>
             <a:prstGeom prst="rect">
               <a:avLst/>
@@ -5190,10 +5347,10 @@
         </p:nvGrpSpPr>
         <p:grpSpPr>
           <a:xfrm>
-            <a:off x="6227064" y="1591055"/>
-            <a:ext cx="2505457" cy="1463041"/>
+            <a:off x="6227064" y="1591054"/>
+            <a:ext cx="2505459" cy="1463044"/>
             <a:chOff x="0" y="0"/>
-            <a:chExt cx="2505455" cy="1463040"/>
+            <a:chExt cx="2505457" cy="1463042"/>
           </a:xfrm>
         </p:grpSpPr>
         <p:sp>
@@ -5205,7 +5362,7 @@
           <p:spPr>
             <a:xfrm>
               <a:off x="0" y="-1"/>
-              <a:ext cx="2505456" cy="1463042"/>
+              <a:ext cx="2505458" cy="1463043"/>
             </a:xfrm>
             <a:prstGeom prst="roundRect">
               <a:avLst>
@@ -5225,12 +5382,19 @@
             <a:effectLst/>
           </p:spPr>
           <p:txBody>
-            <a:bodyPr wrap="square" lIns="45719" tIns="45719" rIns="45719" bIns="45719" numCol="1" anchor="t">
+            <a:bodyPr wrap="square" lIns="45718" tIns="45718" rIns="45718" bIns="45718" numCol="1" anchor="t">
               <a:noAutofit/>
             </a:bodyPr>
             <a:lstStyle/>
             <a:p>
-              <a:pPr/>
+              <a:pPr>
+                <a:defRPr>
+                  <a:latin typeface="+mj-lt"/>
+                  <a:ea typeface="+mj-ea"/>
+                  <a:cs typeface="+mj-cs"/>
+                  <a:sym typeface="Calibri"/>
+                </a:defRPr>
+              </a:pPr>
             </a:p>
           </p:txBody>
         </p:sp>
@@ -5243,7 +5407,7 @@
           <p:spPr>
             <a:xfrm>
               <a:off x="164591" y="164591"/>
-              <a:ext cx="347473" cy="347473"/>
+              <a:ext cx="347475" cy="347475"/>
             </a:xfrm>
             <a:prstGeom prst="ellipse">
               <a:avLst/>
@@ -5261,12 +5425,19 @@
             <a:effectLst/>
           </p:spPr>
           <p:txBody>
-            <a:bodyPr wrap="square" lIns="45719" tIns="45719" rIns="45719" bIns="45719" numCol="1" anchor="t">
+            <a:bodyPr wrap="square" lIns="45718" tIns="45718" rIns="45718" bIns="45718" numCol="1" anchor="t">
               <a:noAutofit/>
             </a:bodyPr>
             <a:lstStyle/>
             <a:p>
-              <a:pPr/>
+              <a:pPr>
+                <a:defRPr>
+                  <a:latin typeface="+mj-lt"/>
+                  <a:ea typeface="+mj-ea"/>
+                  <a:cs typeface="+mj-cs"/>
+                  <a:sym typeface="Calibri"/>
+                </a:defRPr>
+              </a:pPr>
             </a:p>
           </p:txBody>
         </p:sp>
@@ -5279,7 +5450,7 @@
           <p:spPr>
             <a:xfrm>
               <a:off x="164591" y="270555"/>
-              <a:ext cx="347473" cy="135546"/>
+              <a:ext cx="347474" cy="135546"/>
             </a:xfrm>
             <a:prstGeom prst="rect">
               <a:avLst/>
@@ -5330,7 +5501,7 @@
           <p:spPr>
             <a:xfrm>
               <a:off x="164591" y="640079"/>
-              <a:ext cx="2176273" cy="398057"/>
+              <a:ext cx="2176275" cy="398057"/>
             </a:xfrm>
             <a:prstGeom prst="rect">
               <a:avLst/>
@@ -5385,9 +5556,9 @@
         <p:grpSpPr>
           <a:xfrm>
             <a:off x="777240" y="3364991"/>
-            <a:ext cx="7955281" cy="512065"/>
+            <a:ext cx="7955282" cy="512067"/>
             <a:chOff x="0" y="0"/>
-            <a:chExt cx="7955280" cy="512063"/>
+            <a:chExt cx="7955281" cy="512065"/>
           </a:xfrm>
         </p:grpSpPr>
         <p:sp>
@@ -5399,7 +5570,7 @@
           <p:spPr>
             <a:xfrm>
               <a:off x="0" y="0"/>
-              <a:ext cx="7955281" cy="512064"/>
+              <a:ext cx="7955282" cy="512066"/>
             </a:xfrm>
             <a:prstGeom prst="roundRect">
               <a:avLst>
@@ -5419,13 +5590,18 @@
             <a:effectLst/>
           </p:spPr>
           <p:txBody>
-            <a:bodyPr wrap="square" lIns="45719" tIns="45719" rIns="45719" bIns="45719" numCol="1" anchor="ctr">
+            <a:bodyPr wrap="square" lIns="45718" tIns="45718" rIns="45718" bIns="45718" numCol="1" anchor="ctr">
               <a:noAutofit/>
             </a:bodyPr>
             <a:lstStyle/>
             <a:p>
               <a:pPr algn="ctr">
-                <a:defRPr sz="1300"/>
+                <a:defRPr sz="1300">
+                  <a:latin typeface="+mj-lt"/>
+                  <a:ea typeface="+mj-ea"/>
+                  <a:cs typeface="+mj-cs"/>
+                  <a:sym typeface="Calibri"/>
+                </a:defRPr>
               </a:pPr>
             </a:p>
           </p:txBody>
@@ -5438,8 +5614,8 @@
           </p:nvSpPr>
           <p:spPr>
             <a:xfrm>
-              <a:off x="26188" y="162466"/>
-              <a:ext cx="7902904" cy="187132"/>
+              <a:off x="26187" y="162466"/>
+              <a:ext cx="7902907" cy="187130"/>
             </a:xfrm>
             <a:prstGeom prst="rect">
               <a:avLst/>
@@ -5791,6 +5967,41 @@
                       </p:childTnLst>
                     </p:cTn>
                   </p:par>
+                  <p:par>
+                    <p:cTn id="28" fill="hold">
+                      <p:stCondLst>
+                        <p:cond delay="indefinite"/>
+                      </p:stCondLst>
+                      <p:childTnLst>
+                        <p:par>
+                          <p:cTn id="29" fill="hold">
+                            <p:stCondLst>
+                              <p:cond delay="0"/>
+                            </p:stCondLst>
+                            <p:childTnLst>
+                              <p:par>
+                                <p:cTn id="30" presetClass="mediacall" nodeType="clickEffect" presetSubtype="0" presetID="3" grpId="1" fill="hold">
+                                  <p:stCondLst>
+                                    <p:cond delay="0"/>
+                                  </p:stCondLst>
+                                  <p:childTnLst>
+                                    <p:cmd type="call" cmd="stop">
+                                      <p:cBhvr>
+                                        <p:cTn id="31" dur="1000" fill="hold"/>
+                                        <p:tgtEl>
+                                          <p:spTgt spid="66"/>
+                                        </p:tgtEl>
+                                      </p:cBhvr>
+                                    </p:cmd>
+                                  </p:childTnLst>
+                                </p:cTn>
+                              </p:par>
+                            </p:childTnLst>
+                          </p:cTn>
+                        </p:par>
+                      </p:childTnLst>
+                    </p:cTn>
+                  </p:par>
                 </p:childTnLst>
               </p:cTn>
               <p:prevCondLst>
@@ -5810,7 +6021,7 @@
             </p:seq>
             <p:video fullScrn="0">
               <p:cMediaNode mute="0" showWhenStopped="1" numSld="1" vol="0">
-                <p:cTn id="28" fill="hold" display="0">
+                <p:cTn id="32" fill="hold" display="0">
                   <p:stCondLst>
                     <p:cond delay="indefinite"/>
                   </p:stCondLst>
@@ -5821,7 +6032,7 @@
               </p:cMediaNode>
             </p:video>
             <p:seq concurrent="1" prevAc="none" nextAc="seek">
-              <p:cTn id="29" evtFilter="cancelBubble" nodeType="interactiveSeq" restart="whenNotActive" fill="hold">
+              <p:cTn id="33" evtFilter="cancelBubble" nodeType="interactiveSeq" restart="whenNotActive" fill="hold">
                 <p:stCondLst>
                   <p:cond delay="0" evt="onClick">
                     <p:tgtEl>
@@ -5834,26 +6045,26 @@
                 </p:endSync>
                 <p:childTnLst>
                   <p:par>
-                    <p:cTn id="30" fill="hold">
+                    <p:cTn id="34" fill="hold">
                       <p:stCondLst>
                         <p:cond delay="0"/>
                       </p:stCondLst>
                       <p:childTnLst>
                         <p:par>
-                          <p:cTn id="31" fill="hold">
+                          <p:cTn id="35" fill="hold">
                             <p:stCondLst>
                               <p:cond delay="0"/>
                             </p:stCondLst>
                             <p:childTnLst>
                               <p:par>
-                                <p:cTn id="32" presetClass="mediacall" nodeType="clickEffect" presetSubtype="0" presetID="2" fill="hold">
+                                <p:cTn id="36" presetClass="mediacall" nodeType="clickEffect" presetSubtype="0" presetID="2" fill="hold">
                                   <p:stCondLst>
                                     <p:cond delay="0"/>
                                   </p:stCondLst>
                                   <p:childTnLst>
                                     <p:cmd type="call" cmd="togglePause">
                                       <p:cBhvr>
-                                        <p:cTn id="33" dur="1" fill="hold"/>
+                                        <p:cTn id="37" dur="1" fill="hold"/>
                                         <p:tgtEl>
                                           <p:spTgt spid="66"/>
                                         </p:tgtEl>
@@ -5883,10 +6094,10 @@
       </p:par>
     </p:tnLst>
     <p:bldLst>
+      <p:bldP build="whole" bldLvl="1" animBg="1" rev="0" advAuto="0" spid="88" grpId="5"/>
+      <p:bldP build="whole" bldLvl="1" animBg="1" rev="0" advAuto="0" spid="75" grpId="2"/>
       <p:bldP build="whole" bldLvl="1" animBg="1" rev="0" advAuto="0" spid="80" grpId="3"/>
-      <p:bldP build="whole" bldLvl="1" animBg="1" rev="0" advAuto="0" spid="75" grpId="2"/>
       <p:bldP build="whole" bldLvl="1" animBg="1" rev="0" advAuto="0" spid="85" grpId="4"/>
-      <p:bldP build="whole" bldLvl="1" animBg="1" rev="0" advAuto="0" spid="88" grpId="5"/>
     </p:bldLst>
   </p:timing>
 </p:sld>
@@ -5935,7 +6146,7 @@
         <p:spPr>
           <a:xfrm>
             <a:off x="182879" y="182879"/>
-            <a:ext cx="310897" cy="4777742"/>
+            <a:ext cx="310898" cy="4777743"/>
           </a:xfrm>
           <a:prstGeom prst="rect">
             <a:avLst/>
@@ -5954,9 +6165,9 @@
         <p:grpSpPr>
           <a:xfrm>
             <a:off x="777240" y="274320"/>
-            <a:ext cx="1422806" cy="292609"/>
+            <a:ext cx="1422807" cy="292611"/>
             <a:chOff x="0" y="0"/>
-            <a:chExt cx="1422805" cy="292608"/>
+            <a:chExt cx="1422806" cy="292609"/>
           </a:xfrm>
         </p:grpSpPr>
         <p:sp>
@@ -5968,7 +6179,7 @@
           <p:spPr>
             <a:xfrm>
               <a:off x="0" y="0"/>
-              <a:ext cx="1422806" cy="292609"/>
+              <a:ext cx="1422807" cy="292611"/>
             </a:xfrm>
             <a:prstGeom prst="roundRect">
               <a:avLst>
@@ -5985,13 +6196,18 @@
             <a:effectLst/>
           </p:spPr>
           <p:txBody>
-            <a:bodyPr wrap="square" lIns="45719" tIns="45719" rIns="45719" bIns="45719" numCol="1" anchor="ctr">
+            <a:bodyPr wrap="square" lIns="45718" tIns="45718" rIns="45718" bIns="45718" numCol="1" anchor="ctr">
               <a:noAutofit/>
             </a:bodyPr>
             <a:lstStyle/>
             <a:p>
               <a:pPr algn="ctr">
-                <a:defRPr sz="900"/>
+                <a:defRPr sz="900">
+                  <a:latin typeface="+mj-lt"/>
+                  <a:ea typeface="+mj-ea"/>
+                  <a:cs typeface="+mj-cs"/>
+                  <a:sym typeface="Calibri"/>
+                </a:defRPr>
               </a:pPr>
             </a:p>
           </p:txBody>
@@ -6005,7 +6221,7 @@
           <p:spPr>
             <a:xfrm>
               <a:off x="37495" y="82803"/>
-              <a:ext cx="1347816" cy="127001"/>
+              <a:ext cx="1347817" cy="127001"/>
             </a:xfrm>
             <a:prstGeom prst="rect">
               <a:avLst/>
@@ -6104,7 +6320,7 @@
         </p:nvSpPr>
         <p:spPr>
           <a:xfrm>
-            <a:off x="777239" y="1386296"/>
+            <a:off x="777239" y="1386295"/>
             <a:ext cx="7955282" cy="647264"/>
           </a:xfrm>
           <a:prstGeom prst="rect">
@@ -6155,10 +6371,10 @@
         </p:nvGrpSpPr>
         <p:grpSpPr>
           <a:xfrm>
-            <a:off x="777240" y="2359151"/>
-            <a:ext cx="2505456" cy="1042417"/>
+            <a:off x="777240" y="2359150"/>
+            <a:ext cx="2505457" cy="1042419"/>
             <a:chOff x="0" y="0"/>
-            <a:chExt cx="2505455" cy="1042416"/>
+            <a:chExt cx="2505456" cy="1042417"/>
           </a:xfrm>
         </p:grpSpPr>
         <p:sp>
@@ -6170,7 +6386,7 @@
           <p:spPr>
             <a:xfrm>
               <a:off x="0" y="0"/>
-              <a:ext cx="2505456" cy="1042417"/>
+              <a:ext cx="2505457" cy="1042418"/>
             </a:xfrm>
             <a:prstGeom prst="roundRect">
               <a:avLst>
@@ -6190,12 +6406,19 @@
             <a:effectLst/>
           </p:spPr>
           <p:txBody>
-            <a:bodyPr wrap="square" lIns="45719" tIns="45719" rIns="45719" bIns="45719" numCol="1" anchor="t">
+            <a:bodyPr wrap="square" lIns="45718" tIns="45718" rIns="45718" bIns="45718" numCol="1" anchor="t">
               <a:noAutofit/>
             </a:bodyPr>
             <a:lstStyle/>
             <a:p>
-              <a:pPr/>
+              <a:pPr>
+                <a:defRPr>
+                  <a:latin typeface="+mj-lt"/>
+                  <a:ea typeface="+mj-ea"/>
+                  <a:cs typeface="+mj-cs"/>
+                  <a:sym typeface="Calibri"/>
+                </a:defRPr>
+              </a:pPr>
             </a:p>
           </p:txBody>
         </p:sp>
@@ -6208,7 +6431,7 @@
           <p:spPr>
             <a:xfrm>
               <a:off x="182879" y="159258"/>
-              <a:ext cx="365761" cy="266701"/>
+              <a:ext cx="365762" cy="266701"/>
             </a:xfrm>
             <a:prstGeom prst="rect">
               <a:avLst/>
@@ -6259,7 +6482,7 @@
           <p:spPr>
             <a:xfrm>
               <a:off x="182880" y="523494"/>
-              <a:ext cx="2139696" cy="342901"/>
+              <a:ext cx="2139697" cy="342901"/>
             </a:xfrm>
             <a:prstGeom prst="rect">
               <a:avLst/>
@@ -6310,10 +6533,10 @@
         </p:nvGrpSpPr>
         <p:grpSpPr>
           <a:xfrm>
-            <a:off x="3502152" y="2359151"/>
-            <a:ext cx="2505457" cy="1042417"/>
+            <a:off x="3502152" y="2359150"/>
+            <a:ext cx="2505459" cy="1042419"/>
             <a:chOff x="0" y="0"/>
-            <a:chExt cx="2505455" cy="1042416"/>
+            <a:chExt cx="2505457" cy="1042417"/>
           </a:xfrm>
         </p:grpSpPr>
         <p:sp>
@@ -6325,7 +6548,7 @@
           <p:spPr>
             <a:xfrm>
               <a:off x="0" y="0"/>
-              <a:ext cx="2505456" cy="1042417"/>
+              <a:ext cx="2505458" cy="1042418"/>
             </a:xfrm>
             <a:prstGeom prst="roundRect">
               <a:avLst>
@@ -6345,12 +6568,19 @@
             <a:effectLst/>
           </p:spPr>
           <p:txBody>
-            <a:bodyPr wrap="square" lIns="45719" tIns="45719" rIns="45719" bIns="45719" numCol="1" anchor="t">
+            <a:bodyPr wrap="square" lIns="45718" tIns="45718" rIns="45718" bIns="45718" numCol="1" anchor="t">
               <a:noAutofit/>
             </a:bodyPr>
             <a:lstStyle/>
             <a:p>
-              <a:pPr/>
+              <a:pPr>
+                <a:defRPr>
+                  <a:latin typeface="+mj-lt"/>
+                  <a:ea typeface="+mj-ea"/>
+                  <a:cs typeface="+mj-cs"/>
+                  <a:sym typeface="Calibri"/>
+                </a:defRPr>
+              </a:pPr>
             </a:p>
           </p:txBody>
         </p:sp>
@@ -6363,7 +6593,7 @@
           <p:spPr>
             <a:xfrm>
               <a:off x="182879" y="159258"/>
-              <a:ext cx="365761" cy="266701"/>
+              <a:ext cx="365762" cy="266701"/>
             </a:xfrm>
             <a:prstGeom prst="rect">
               <a:avLst/>
@@ -6414,7 +6644,7 @@
           <p:spPr>
             <a:xfrm>
               <a:off x="182880" y="523494"/>
-              <a:ext cx="2139696" cy="342901"/>
+              <a:ext cx="2139698" cy="342901"/>
             </a:xfrm>
             <a:prstGeom prst="rect">
               <a:avLst/>
@@ -6465,10 +6695,10 @@
         </p:nvGrpSpPr>
         <p:grpSpPr>
           <a:xfrm>
-            <a:off x="6227064" y="2359151"/>
-            <a:ext cx="2505457" cy="1042417"/>
+            <a:off x="6227064" y="2359150"/>
+            <a:ext cx="2505459" cy="1042419"/>
             <a:chOff x="0" y="0"/>
-            <a:chExt cx="2505455" cy="1042416"/>
+            <a:chExt cx="2505457" cy="1042417"/>
           </a:xfrm>
         </p:grpSpPr>
         <p:sp>
@@ -6480,7 +6710,7 @@
           <p:spPr>
             <a:xfrm>
               <a:off x="0" y="0"/>
-              <a:ext cx="2505456" cy="1042417"/>
+              <a:ext cx="2505458" cy="1042418"/>
             </a:xfrm>
             <a:prstGeom prst="roundRect">
               <a:avLst>
@@ -6500,12 +6730,19 @@
             <a:effectLst/>
           </p:spPr>
           <p:txBody>
-            <a:bodyPr wrap="square" lIns="45719" tIns="45719" rIns="45719" bIns="45719" numCol="1" anchor="t">
+            <a:bodyPr wrap="square" lIns="45718" tIns="45718" rIns="45718" bIns="45718" numCol="1" anchor="t">
               <a:noAutofit/>
             </a:bodyPr>
             <a:lstStyle/>
             <a:p>
-              <a:pPr/>
+              <a:pPr>
+                <a:defRPr>
+                  <a:latin typeface="+mj-lt"/>
+                  <a:ea typeface="+mj-ea"/>
+                  <a:cs typeface="+mj-cs"/>
+                  <a:sym typeface="Calibri"/>
+                </a:defRPr>
+              </a:pPr>
             </a:p>
           </p:txBody>
         </p:sp>
@@ -6518,7 +6755,7 @@
           <p:spPr>
             <a:xfrm>
               <a:off x="182879" y="159258"/>
-              <a:ext cx="365761" cy="266701"/>
+              <a:ext cx="365762" cy="266701"/>
             </a:xfrm>
             <a:prstGeom prst="rect">
               <a:avLst/>
@@ -6569,7 +6806,7 @@
           <p:spPr>
             <a:xfrm>
               <a:off x="182880" y="523494"/>
-              <a:ext cx="2139696" cy="342901"/>
+              <a:ext cx="2139698" cy="342901"/>
             </a:xfrm>
             <a:prstGeom prst="rect">
               <a:avLst/>
@@ -6865,6 +7102,41 @@
                       </p:childTnLst>
                     </p:cTn>
                   </p:par>
+                  <p:par>
+                    <p:cTn id="25" fill="hold">
+                      <p:stCondLst>
+                        <p:cond delay="indefinite"/>
+                      </p:stCondLst>
+                      <p:childTnLst>
+                        <p:par>
+                          <p:cTn id="26" fill="hold">
+                            <p:stCondLst>
+                              <p:cond delay="0"/>
+                            </p:stCondLst>
+                            <p:childTnLst>
+                              <p:par>
+                                <p:cTn id="27" presetClass="mediacall" nodeType="clickEffect" presetSubtype="0" presetID="3" grpId="1" fill="hold">
+                                  <p:stCondLst>
+                                    <p:cond delay="0"/>
+                                  </p:stCondLst>
+                                  <p:childTnLst>
+                                    <p:cmd type="call" cmd="stop">
+                                      <p:cBhvr>
+                                        <p:cTn id="28" dur="1000" fill="hold"/>
+                                        <p:tgtEl>
+                                          <p:spTgt spid="92"/>
+                                        </p:tgtEl>
+                                      </p:cBhvr>
+                                    </p:cmd>
+                                  </p:childTnLst>
+                                </p:cTn>
+                              </p:par>
+                            </p:childTnLst>
+                          </p:cTn>
+                        </p:par>
+                      </p:childTnLst>
+                    </p:cTn>
+                  </p:par>
                 </p:childTnLst>
               </p:cTn>
               <p:prevCondLst>
@@ -6884,7 +7156,7 @@
             </p:seq>
             <p:video fullScrn="0">
               <p:cMediaNode mute="0" showWhenStopped="1" numSld="1" vol="0">
-                <p:cTn id="25" fill="hold" display="0">
+                <p:cTn id="29" fill="hold" display="0">
                   <p:stCondLst>
                     <p:cond delay="indefinite"/>
                   </p:stCondLst>
@@ -6895,7 +7167,7 @@
               </p:cMediaNode>
             </p:video>
             <p:seq concurrent="1" prevAc="none" nextAc="seek">
-              <p:cTn id="26" evtFilter="cancelBubble" nodeType="interactiveSeq" restart="whenNotActive" fill="hold">
+              <p:cTn id="30" evtFilter="cancelBubble" nodeType="interactiveSeq" restart="whenNotActive" fill="hold">
                 <p:stCondLst>
                   <p:cond delay="0" evt="onClick">
                     <p:tgtEl>
@@ -6908,26 +7180,26 @@
                 </p:endSync>
                 <p:childTnLst>
                   <p:par>
-                    <p:cTn id="27" fill="hold">
+                    <p:cTn id="31" fill="hold">
                       <p:stCondLst>
                         <p:cond delay="0"/>
                       </p:stCondLst>
                       <p:childTnLst>
                         <p:par>
-                          <p:cTn id="28" fill="hold">
+                          <p:cTn id="32" fill="hold">
                             <p:stCondLst>
                               <p:cond delay="0"/>
                             </p:stCondLst>
                             <p:childTnLst>
                               <p:par>
-                                <p:cTn id="29" presetClass="mediacall" nodeType="clickEffect" presetSubtype="0" presetID="2" fill="hold">
+                                <p:cTn id="33" presetClass="mediacall" nodeType="clickEffect" presetSubtype="0" presetID="2" fill="hold">
                                   <p:stCondLst>
                                     <p:cond delay="0"/>
                                   </p:stCondLst>
                                   <p:childTnLst>
                                     <p:cmd type="call" cmd="togglePause">
                                       <p:cBhvr>
-                                        <p:cTn id="30" dur="1" fill="hold"/>
+                                        <p:cTn id="34" dur="1" fill="hold"/>
                                         <p:tgtEl>
                                           <p:spTgt spid="92"/>
                                         </p:tgtEl>
@@ -6957,10 +7229,10 @@
       </p:par>
     </p:tnLst>
     <p:bldLst>
+      <p:bldP build="whole" bldLvl="1" animBg="1" rev="0" advAuto="0" spid="109" grpId="5"/>
+      <p:bldP build="whole" bldLvl="1" animBg="1" rev="0" advAuto="0" spid="97" grpId="2"/>
       <p:bldP build="whole" bldLvl="1" animBg="1" rev="0" advAuto="0" spid="101" grpId="3"/>
       <p:bldP build="whole" bldLvl="1" animBg="1" rev="0" advAuto="0" spid="105" grpId="4"/>
-      <p:bldP build="whole" bldLvl="1" animBg="1" rev="0" advAuto="0" spid="109" grpId="5"/>
-      <p:bldP build="whole" bldLvl="1" animBg="1" rev="0" advAuto="0" spid="97" grpId="2"/>
     </p:bldLst>
   </p:timing>
 </p:sld>
@@ -7009,7 +7281,7 @@
         <p:spPr>
           <a:xfrm>
             <a:off x="182879" y="182879"/>
-            <a:ext cx="310897" cy="4777742"/>
+            <a:ext cx="310898" cy="4777743"/>
           </a:xfrm>
           <a:prstGeom prst="rect">
             <a:avLst/>
@@ -7028,9 +7300,9 @@
         <p:grpSpPr>
           <a:xfrm>
             <a:off x="777240" y="274320"/>
-            <a:ext cx="1422806" cy="292609"/>
+            <a:ext cx="1422807" cy="292611"/>
             <a:chOff x="0" y="0"/>
-            <a:chExt cx="1422805" cy="292608"/>
+            <a:chExt cx="1422806" cy="292609"/>
           </a:xfrm>
         </p:grpSpPr>
         <p:sp>
@@ -7042,7 +7314,7 @@
           <p:spPr>
             <a:xfrm>
               <a:off x="0" y="0"/>
-              <a:ext cx="1422806" cy="292609"/>
+              <a:ext cx="1422807" cy="292611"/>
             </a:xfrm>
             <a:prstGeom prst="roundRect">
               <a:avLst>
@@ -7059,13 +7331,18 @@
             <a:effectLst/>
           </p:spPr>
           <p:txBody>
-            <a:bodyPr wrap="square" lIns="45719" tIns="45719" rIns="45719" bIns="45719" numCol="1" anchor="ctr">
+            <a:bodyPr wrap="square" lIns="45718" tIns="45718" rIns="45718" bIns="45718" numCol="1" anchor="ctr">
               <a:noAutofit/>
             </a:bodyPr>
             <a:lstStyle/>
             <a:p>
               <a:pPr algn="ctr">
-                <a:defRPr sz="900"/>
+                <a:defRPr sz="900">
+                  <a:latin typeface="+mj-lt"/>
+                  <a:ea typeface="+mj-ea"/>
+                  <a:cs typeface="+mj-cs"/>
+                  <a:sym typeface="Calibri"/>
+                </a:defRPr>
               </a:pPr>
             </a:p>
           </p:txBody>
@@ -7079,7 +7356,7 @@
           <p:spPr>
             <a:xfrm>
               <a:off x="37495" y="82803"/>
-              <a:ext cx="1347816" cy="127001"/>
+              <a:ext cx="1347817" cy="127001"/>
             </a:xfrm>
             <a:prstGeom prst="rect">
               <a:avLst/>
@@ -7178,7 +7455,7 @@
         </p:nvSpPr>
         <p:spPr>
           <a:xfrm>
-            <a:off x="777239" y="1288540"/>
+            <a:off x="777239" y="1288539"/>
             <a:ext cx="7955282" cy="147831"/>
           </a:xfrm>
           <a:prstGeom prst="rect">
@@ -7227,7 +7504,7 @@
         <p:spPr>
           <a:xfrm>
             <a:off x="777240" y="1591055"/>
-            <a:ext cx="4572001" cy="1408177"/>
+            <a:ext cx="4572002" cy="1408178"/>
           </a:xfrm>
           <a:prstGeom prst="roundRect">
             <a:avLst>
@@ -7244,10 +7521,17 @@
           </a:ln>
         </p:spPr>
         <p:txBody>
-          <a:bodyPr lIns="45719" rIns="45719"/>
+          <a:bodyPr lIns="45718" tIns="45718" rIns="45718" bIns="45718"/>
           <a:lstStyle/>
           <a:p>
-            <a:pPr/>
+            <a:pPr>
+              <a:defRPr>
+                <a:latin typeface="+mj-lt"/>
+                <a:ea typeface="+mj-ea"/>
+                <a:cs typeface="+mj-cs"/>
+                <a:sym typeface="Calibri"/>
+              </a:defRPr>
+            </a:pPr>
           </a:p>
         </p:txBody>
       </p:sp>
@@ -7259,8 +7543,8 @@
         </p:nvSpPr>
         <p:spPr>
           <a:xfrm>
-            <a:off x="960119" y="1724104"/>
-            <a:ext cx="4206242" cy="172816"/>
+            <a:off x="960118" y="1724104"/>
+            <a:ext cx="4206244" cy="172815"/>
           </a:xfrm>
           <a:prstGeom prst="rect">
             <a:avLst/>
@@ -7307,8 +7591,8 @@
         </p:nvSpPr>
         <p:spPr>
           <a:xfrm>
-            <a:off x="1014983" y="2019229"/>
-            <a:ext cx="4114801" cy="259222"/>
+            <a:off x="1014982" y="2019229"/>
+            <a:ext cx="4114803" cy="259222"/>
           </a:xfrm>
           <a:prstGeom prst="rect">
             <a:avLst/>
@@ -7372,8 +7656,8 @@
         </p:nvSpPr>
         <p:spPr>
           <a:xfrm>
-            <a:off x="1014983" y="2348413"/>
-            <a:ext cx="4114801" cy="259222"/>
+            <a:off x="1014982" y="2348413"/>
+            <a:ext cx="4114803" cy="259222"/>
           </a:xfrm>
           <a:prstGeom prst="rect">
             <a:avLst/>
@@ -7426,8 +7710,8 @@
         </p:nvSpPr>
         <p:spPr>
           <a:xfrm>
-            <a:off x="1014983" y="2677597"/>
-            <a:ext cx="4114801" cy="259222"/>
+            <a:off x="1014982" y="2677597"/>
+            <a:ext cx="4114803" cy="259222"/>
           </a:xfrm>
           <a:prstGeom prst="rect">
             <a:avLst/>
@@ -7475,7 +7759,7 @@
         <p:spPr>
           <a:xfrm>
             <a:off x="777240" y="3108960"/>
-            <a:ext cx="4572001" cy="1810513"/>
+            <a:ext cx="4572002" cy="1810513"/>
           </a:xfrm>
           <a:prstGeom prst="roundRect">
             <a:avLst>
@@ -7492,10 +7776,17 @@
           </a:ln>
         </p:spPr>
         <p:txBody>
-          <a:bodyPr lIns="45719" rIns="45719"/>
+          <a:bodyPr lIns="45718" tIns="45718" rIns="45718" bIns="45718"/>
           <a:lstStyle/>
           <a:p>
-            <a:pPr/>
+            <a:pPr>
+              <a:defRPr>
+                <a:latin typeface="+mj-lt"/>
+                <a:ea typeface="+mj-ea"/>
+                <a:cs typeface="+mj-cs"/>
+                <a:sym typeface="Calibri"/>
+              </a:defRPr>
+            </a:pPr>
           </a:p>
         </p:txBody>
       </p:sp>
@@ -7507,8 +7798,8 @@
         </p:nvSpPr>
         <p:spPr>
           <a:xfrm>
-            <a:off x="960119" y="3242008"/>
-            <a:ext cx="4206242" cy="172816"/>
+            <a:off x="960118" y="3242007"/>
+            <a:ext cx="4206244" cy="172816"/>
           </a:xfrm>
           <a:prstGeom prst="rect">
             <a:avLst/>
@@ -7555,8 +7846,8 @@
         </p:nvSpPr>
         <p:spPr>
           <a:xfrm>
-            <a:off x="1014983" y="3537133"/>
-            <a:ext cx="4114801" cy="259222"/>
+            <a:off x="1014982" y="3537132"/>
+            <a:ext cx="4114803" cy="259223"/>
           </a:xfrm>
           <a:prstGeom prst="rect">
             <a:avLst/>
@@ -7623,8 +7914,8 @@
         </p:nvSpPr>
         <p:spPr>
           <a:xfrm>
-            <a:off x="1014983" y="3866317"/>
-            <a:ext cx="4114801" cy="259222"/>
+            <a:off x="1014982" y="3866317"/>
+            <a:ext cx="4114803" cy="259222"/>
           </a:xfrm>
           <a:prstGeom prst="rect">
             <a:avLst/>
@@ -7680,8 +7971,8 @@
         </p:nvSpPr>
         <p:spPr>
           <a:xfrm>
-            <a:off x="1014983" y="4195501"/>
-            <a:ext cx="4114801" cy="259222"/>
+            <a:off x="1014982" y="4195500"/>
+            <a:ext cx="4114803" cy="259223"/>
           </a:xfrm>
           <a:prstGeom prst="rect">
             <a:avLst/>
@@ -7734,8 +8025,8 @@
         </p:nvSpPr>
         <p:spPr>
           <a:xfrm>
-            <a:off x="1014983" y="4524685"/>
-            <a:ext cx="4114801" cy="259222"/>
+            <a:off x="1014982" y="4524685"/>
+            <a:ext cx="4114803" cy="259222"/>
           </a:xfrm>
           <a:prstGeom prst="rect">
             <a:avLst/>
@@ -7800,7 +8091,7 @@
         <p:spPr>
           <a:xfrm>
             <a:off x="5486400" y="1591055"/>
-            <a:ext cx="3246121" cy="1825944"/>
+            <a:ext cx="3246122" cy="1825944"/>
           </a:xfrm>
           <a:prstGeom prst="rect">
             <a:avLst/>
@@ -7818,10 +8109,10 @@
         </p:nvGrpSpPr>
         <p:grpSpPr>
           <a:xfrm>
-            <a:off x="5486400" y="3526726"/>
-            <a:ext cx="3246121" cy="566929"/>
+            <a:off x="5486400" y="3526725"/>
+            <a:ext cx="3246123" cy="566931"/>
             <a:chOff x="0" y="0"/>
-            <a:chExt cx="3246120" cy="566927"/>
+            <a:chExt cx="3246122" cy="566929"/>
           </a:xfrm>
         </p:grpSpPr>
         <p:sp>
@@ -7833,7 +8124,7 @@
           <p:spPr>
             <a:xfrm>
               <a:off x="0" y="0"/>
-              <a:ext cx="3246121" cy="566928"/>
+              <a:ext cx="3246123" cy="566930"/>
             </a:xfrm>
             <a:prstGeom prst="roundRect">
               <a:avLst>
@@ -7853,7 +8144,7 @@
             <a:effectLst/>
           </p:spPr>
           <p:txBody>
-            <a:bodyPr wrap="square" lIns="45719" tIns="45719" rIns="45719" bIns="45719" numCol="1" anchor="ctr">
+            <a:bodyPr wrap="square" lIns="45718" tIns="45718" rIns="45718" bIns="45718" numCol="1" anchor="ctr">
               <a:noAutofit/>
             </a:bodyPr>
             <a:lstStyle/>
@@ -7862,7 +8153,12 @@
                 <a:lnSpc>
                   <a:spcPts val="1600"/>
                 </a:lnSpc>
-                <a:defRPr sz="1200"/>
+                <a:defRPr sz="1200">
+                  <a:latin typeface="+mj-lt"/>
+                  <a:ea typeface="+mj-ea"/>
+                  <a:cs typeface="+mj-cs"/>
+                  <a:sym typeface="Calibri"/>
+                </a:defRPr>
               </a:pPr>
             </a:p>
           </p:txBody>
@@ -7876,7 +8172,7 @@
           <p:spPr>
             <a:xfrm>
               <a:off x="24322" y="185020"/>
-              <a:ext cx="3197476" cy="196888"/>
+              <a:ext cx="3197478" cy="196887"/>
             </a:xfrm>
             <a:prstGeom prst="rect">
               <a:avLst/>
@@ -7931,9 +8227,9 @@
         <p:grpSpPr>
           <a:xfrm>
             <a:off x="5486400" y="4203382"/>
-            <a:ext cx="3246121" cy="512065"/>
+            <a:ext cx="3246123" cy="512067"/>
             <a:chOff x="0" y="0"/>
-            <a:chExt cx="3246120" cy="512063"/>
+            <a:chExt cx="3246122" cy="512065"/>
           </a:xfrm>
         </p:grpSpPr>
         <p:sp>
@@ -7945,7 +8241,7 @@
           <p:spPr>
             <a:xfrm>
               <a:off x="0" y="0"/>
-              <a:ext cx="3246121" cy="512064"/>
+              <a:ext cx="3246123" cy="512066"/>
             </a:xfrm>
             <a:prstGeom prst="roundRect">
               <a:avLst>
@@ -7965,7 +8261,7 @@
             <a:effectLst/>
           </p:spPr>
           <p:txBody>
-            <a:bodyPr wrap="square" lIns="45719" tIns="45719" rIns="45719" bIns="45719" numCol="1" anchor="ctr">
+            <a:bodyPr wrap="square" lIns="45718" tIns="45718" rIns="45718" bIns="45718" numCol="1" anchor="ctr">
               <a:noAutofit/>
             </a:bodyPr>
             <a:lstStyle/>
@@ -7974,7 +8270,12 @@
                 <a:lnSpc>
                   <a:spcPts val="1600"/>
                 </a:lnSpc>
-                <a:defRPr sz="1200"/>
+                <a:defRPr sz="1200">
+                  <a:latin typeface="+mj-lt"/>
+                  <a:ea typeface="+mj-ea"/>
+                  <a:cs typeface="+mj-cs"/>
+                  <a:sym typeface="Calibri"/>
+                </a:defRPr>
               </a:pPr>
             </a:p>
           </p:txBody>
@@ -7988,7 +8289,7 @@
           <p:spPr>
             <a:xfrm>
               <a:off x="24323" y="157588"/>
-              <a:ext cx="3197474" cy="196888"/>
+              <a:ext cx="3197476" cy="196887"/>
             </a:xfrm>
             <a:prstGeom prst="rect">
               <a:avLst/>
@@ -8676,6 +8977,76 @@
                       </p:childTnLst>
                     </p:cTn>
                   </p:par>
+                  <p:par>
+                    <p:cTn id="58" fill="hold">
+                      <p:stCondLst>
+                        <p:cond delay="indefinite"/>
+                      </p:stCondLst>
+                      <p:childTnLst>
+                        <p:par>
+                          <p:cTn id="59" fill="hold">
+                            <p:stCondLst>
+                              <p:cond delay="0"/>
+                            </p:stCondLst>
+                            <p:childTnLst>
+                              <p:par>
+                                <p:cTn id="60" presetClass="mediacall" nodeType="clickEffect" presetSubtype="0" presetID="3" grpId="1" fill="hold">
+                                  <p:stCondLst>
+                                    <p:cond delay="0"/>
+                                  </p:stCondLst>
+                                  <p:childTnLst>
+                                    <p:cmd type="call" cmd="stop">
+                                      <p:cBhvr>
+                                        <p:cTn id="61" dur="1000" fill="hold"/>
+                                        <p:tgtEl>
+                                          <p:spTgt spid="113"/>
+                                        </p:tgtEl>
+                                      </p:cBhvr>
+                                    </p:cmd>
+                                  </p:childTnLst>
+                                </p:cTn>
+                              </p:par>
+                            </p:childTnLst>
+                          </p:cTn>
+                        </p:par>
+                      </p:childTnLst>
+                    </p:cTn>
+                  </p:par>
+                  <p:par>
+                    <p:cTn id="62" fill="hold">
+                      <p:stCondLst>
+                        <p:cond delay="indefinite"/>
+                      </p:stCondLst>
+                      <p:childTnLst>
+                        <p:par>
+                          <p:cTn id="63" fill="hold">
+                            <p:stCondLst>
+                              <p:cond delay="0"/>
+                            </p:stCondLst>
+                            <p:childTnLst>
+                              <p:par>
+                                <p:cTn id="64" presetClass="mediacall" nodeType="clickEffect" presetSubtype="0" presetID="3" grpId="9" fill="hold">
+                                  <p:stCondLst>
+                                    <p:cond delay="0"/>
+                                  </p:stCondLst>
+                                  <p:childTnLst>
+                                    <p:cmd type="call" cmd="stop">
+                                      <p:cBhvr>
+                                        <p:cTn id="65" dur="1000" fill="hold"/>
+                                        <p:tgtEl>
+                                          <p:spTgt spid="130"/>
+                                        </p:tgtEl>
+                                      </p:cBhvr>
+                                    </p:cmd>
+                                  </p:childTnLst>
+                                </p:cTn>
+                              </p:par>
+                            </p:childTnLst>
+                          </p:cTn>
+                        </p:par>
+                      </p:childTnLst>
+                    </p:cTn>
+                  </p:par>
                 </p:childTnLst>
               </p:cTn>
               <p:prevCondLst>
@@ -8695,7 +9066,7 @@
             </p:seq>
             <p:video fullScrn="0">
               <p:cMediaNode mute="0" showWhenStopped="1" numSld="1" vol="0">
-                <p:cTn id="58" fill="hold" display="0">
+                <p:cTn id="66" fill="hold" display="0">
                   <p:stCondLst>
                     <p:cond delay="indefinite"/>
                   </p:stCondLst>
@@ -8706,7 +9077,7 @@
               </p:cMediaNode>
             </p:video>
             <p:seq concurrent="1" prevAc="none" nextAc="seek">
-              <p:cTn id="59" evtFilter="cancelBubble" nodeType="interactiveSeq" restart="whenNotActive" fill="hold">
+              <p:cTn id="67" evtFilter="cancelBubble" nodeType="interactiveSeq" restart="whenNotActive" fill="hold">
                 <p:stCondLst>
                   <p:cond delay="0" evt="onClick">
                     <p:tgtEl>
@@ -8719,26 +9090,26 @@
                 </p:endSync>
                 <p:childTnLst>
                   <p:par>
-                    <p:cTn id="60" fill="hold">
+                    <p:cTn id="68" fill="hold">
                       <p:stCondLst>
                         <p:cond delay="0"/>
                       </p:stCondLst>
                       <p:childTnLst>
                         <p:par>
-                          <p:cTn id="61" fill="hold">
+                          <p:cTn id="69" fill="hold">
                             <p:stCondLst>
                               <p:cond delay="0"/>
                             </p:stCondLst>
                             <p:childTnLst>
                               <p:par>
-                                <p:cTn id="62" presetClass="mediacall" nodeType="clickEffect" presetSubtype="0" presetID="2" fill="hold">
+                                <p:cTn id="70" presetClass="mediacall" nodeType="clickEffect" presetSubtype="0" presetID="2" fill="hold">
                                   <p:stCondLst>
                                     <p:cond delay="0"/>
                                   </p:stCondLst>
                                   <p:childTnLst>
                                     <p:cmd type="call" cmd="togglePause">
                                       <p:cBhvr>
-                                        <p:cTn id="63" dur="1" fill="hold"/>
+                                        <p:cTn id="71" dur="1" fill="hold"/>
                                         <p:tgtEl>
                                           <p:spTgt spid="113"/>
                                         </p:tgtEl>
@@ -8765,7 +9136,7 @@
             </p:seq>
             <p:video fullScrn="0">
               <p:cMediaNode mute="0" showWhenStopped="1" numSld="1" vol="100000">
-                <p:cTn id="64" fill="hold" display="0">
+                <p:cTn id="72" fill="hold" display="0">
                   <p:stCondLst>
                     <p:cond delay="indefinite"/>
                   </p:stCondLst>
@@ -8776,7 +9147,7 @@
               </p:cMediaNode>
             </p:video>
             <p:seq concurrent="1" prevAc="none" nextAc="seek">
-              <p:cTn id="65" evtFilter="cancelBubble" nodeType="interactiveSeq" restart="whenNotActive" fill="hold">
+              <p:cTn id="73" evtFilter="cancelBubble" nodeType="interactiveSeq" restart="whenNotActive" fill="hold">
                 <p:stCondLst>
                   <p:cond delay="0" evt="onClick">
                     <p:tgtEl>
@@ -8789,26 +9160,26 @@
                 </p:endSync>
                 <p:childTnLst>
                   <p:par>
-                    <p:cTn id="66" fill="hold">
+                    <p:cTn id="74" fill="hold">
                       <p:stCondLst>
                         <p:cond delay="0"/>
                       </p:stCondLst>
                       <p:childTnLst>
                         <p:par>
-                          <p:cTn id="67" fill="hold">
+                          <p:cTn id="75" fill="hold">
                             <p:stCondLst>
                               <p:cond delay="0"/>
                             </p:stCondLst>
                             <p:childTnLst>
                               <p:par>
-                                <p:cTn id="68" presetClass="mediacall" nodeType="clickEffect" presetSubtype="0" presetID="2" fill="hold">
+                                <p:cTn id="76" presetClass="mediacall" nodeType="clickEffect" presetSubtype="0" presetID="2" fill="hold">
                                   <p:stCondLst>
                                     <p:cond delay="0"/>
                                   </p:stCondLst>
                                   <p:childTnLst>
                                     <p:cmd type="call" cmd="togglePause">
                                       <p:cBhvr>
-                                        <p:cTn id="69" dur="1" fill="hold"/>
+                                        <p:cTn id="77" dur="1" fill="hold"/>
                                         <p:tgtEl>
                                           <p:spTgt spid="130"/>
                                         </p:tgtEl>
@@ -8838,15 +9209,15 @@
       </p:par>
     </p:tnLst>
     <p:bldLst>
-      <p:bldP build="whole" bldLvl="1" animBg="1" rev="0" advAuto="0" spid="129" grpId="8"/>
-      <p:bldP build="whole" bldLvl="1" animBg="1" rev="0" advAuto="0" spid="121" grpId="2"/>
+      <p:bldP build="whole" bldLvl="1" animBg="1" rev="0" advAuto="0" spid="128" grpId="7"/>
+      <p:bldP build="whole" bldLvl="1" animBg="1" rev="0" advAuto="0" spid="122" grpId="3"/>
       <p:bldP build="whole" bldLvl="1" animBg="1" rev="0" advAuto="0" spid="133" grpId="10"/>
       <p:bldP build="whole" bldLvl="1" animBg="1" rev="0" advAuto="0" spid="136" grpId="11"/>
+      <p:bldP build="whole" bldLvl="1" animBg="1" rev="0" advAuto="0" spid="121" grpId="2"/>
+      <p:bldP build="whole" bldLvl="1" animBg="1" rev="0" advAuto="0" spid="123" grpId="4"/>
+      <p:bldP build="whole" bldLvl="1" animBg="1" rev="0" advAuto="0" spid="127" grpId="6"/>
+      <p:bldP build="whole" bldLvl="1" animBg="1" rev="0" advAuto="0" spid="129" grpId="8"/>
       <p:bldP build="whole" bldLvl="1" animBg="1" rev="0" advAuto="0" spid="126" grpId="5"/>
-      <p:bldP build="whole" bldLvl="1" animBg="1" rev="0" advAuto="0" spid="123" grpId="4"/>
-      <p:bldP build="whole" bldLvl="1" animBg="1" rev="0" advAuto="0" spid="128" grpId="7"/>
-      <p:bldP build="whole" bldLvl="1" animBg="1" rev="0" advAuto="0" spid="127" grpId="6"/>
-      <p:bldP build="whole" bldLvl="1" animBg="1" rev="0" advAuto="0" spid="122" grpId="3"/>
     </p:bldLst>
   </p:timing>
 </p:sld>
@@ -8895,7 +9266,7 @@
         <p:spPr>
           <a:xfrm>
             <a:off x="182879" y="182879"/>
-            <a:ext cx="310897" cy="4777742"/>
+            <a:ext cx="310898" cy="4777743"/>
           </a:xfrm>
           <a:prstGeom prst="rect">
             <a:avLst/>
@@ -8914,9 +9285,9 @@
         <p:grpSpPr>
           <a:xfrm>
             <a:off x="777240" y="274320"/>
-            <a:ext cx="1422806" cy="292609"/>
+            <a:ext cx="1422807" cy="292611"/>
             <a:chOff x="0" y="0"/>
-            <a:chExt cx="1422805" cy="292608"/>
+            <a:chExt cx="1422806" cy="292609"/>
           </a:xfrm>
         </p:grpSpPr>
         <p:sp>
@@ -8928,7 +9299,7 @@
           <p:spPr>
             <a:xfrm>
               <a:off x="0" y="0"/>
-              <a:ext cx="1422806" cy="292609"/>
+              <a:ext cx="1422807" cy="292611"/>
             </a:xfrm>
             <a:prstGeom prst="roundRect">
               <a:avLst>
@@ -8945,13 +9316,18 @@
             <a:effectLst/>
           </p:spPr>
           <p:txBody>
-            <a:bodyPr wrap="square" lIns="45719" tIns="45719" rIns="45719" bIns="45719" numCol="1" anchor="ctr">
+            <a:bodyPr wrap="square" lIns="45718" tIns="45718" rIns="45718" bIns="45718" numCol="1" anchor="ctr">
               <a:noAutofit/>
             </a:bodyPr>
             <a:lstStyle/>
             <a:p>
               <a:pPr algn="ctr">
-                <a:defRPr sz="900"/>
+                <a:defRPr sz="900">
+                  <a:latin typeface="+mj-lt"/>
+                  <a:ea typeface="+mj-ea"/>
+                  <a:cs typeface="+mj-cs"/>
+                  <a:sym typeface="Calibri"/>
+                </a:defRPr>
               </a:pPr>
             </a:p>
           </p:txBody>
@@ -8965,7 +9341,7 @@
           <p:spPr>
             <a:xfrm>
               <a:off x="37495" y="82803"/>
-              <a:ext cx="1347816" cy="127001"/>
+              <a:ext cx="1347817" cy="127001"/>
             </a:xfrm>
             <a:prstGeom prst="rect">
               <a:avLst/>
@@ -9064,7 +9440,7 @@
         </p:nvSpPr>
         <p:spPr>
           <a:xfrm>
-            <a:off x="777239" y="1288540"/>
+            <a:off x="777239" y="1288539"/>
             <a:ext cx="7955282" cy="147831"/>
           </a:xfrm>
           <a:prstGeom prst="rect">
@@ -9130,10 +9506,17 @@
           </a:ln>
         </p:spPr>
         <p:txBody>
-          <a:bodyPr lIns="45719" rIns="45719"/>
+          <a:bodyPr lIns="45718" tIns="45718" rIns="45718" bIns="45718"/>
           <a:lstStyle/>
           <a:p>
-            <a:pPr/>
+            <a:pPr>
+              <a:defRPr>
+                <a:latin typeface="+mj-lt"/>
+                <a:ea typeface="+mj-ea"/>
+                <a:cs typeface="+mj-cs"/>
+                <a:sym typeface="Calibri"/>
+              </a:defRPr>
+            </a:pPr>
           </a:p>
         </p:txBody>
       </p:sp>
@@ -9145,8 +9528,8 @@
         </p:nvSpPr>
         <p:spPr>
           <a:xfrm>
-            <a:off x="960119" y="1724104"/>
-            <a:ext cx="3502154" cy="172816"/>
+            <a:off x="960118" y="1724104"/>
+            <a:ext cx="3502156" cy="172815"/>
           </a:xfrm>
           <a:prstGeom prst="rect">
             <a:avLst/>
@@ -9194,7 +9577,7 @@
         <p:spPr>
           <a:xfrm>
             <a:off x="1014983" y="2037863"/>
-            <a:ext cx="3410713" cy="221954"/>
+            <a:ext cx="3410713" cy="221953"/>
           </a:xfrm>
           <a:prstGeom prst="rect">
             <a:avLst/>
@@ -9261,7 +9644,7 @@
         </p:nvSpPr>
         <p:spPr>
           <a:xfrm>
-            <a:off x="1014983" y="2367047"/>
+            <a:off x="1014983" y="2367046"/>
             <a:ext cx="3410713" cy="221954"/>
           </a:xfrm>
           <a:prstGeom prst="rect">
@@ -9318,7 +9701,7 @@
         </p:nvSpPr>
         <p:spPr>
           <a:xfrm>
-            <a:off x="1014983" y="2696231"/>
+            <a:off x="1014983" y="2696230"/>
             <a:ext cx="3410713" cy="221954"/>
           </a:xfrm>
           <a:prstGeom prst="rect">
@@ -9372,7 +9755,7 @@
         </p:nvSpPr>
         <p:spPr>
           <a:xfrm>
-            <a:off x="1014983" y="3025415"/>
+            <a:off x="1014983" y="3025414"/>
             <a:ext cx="3410713" cy="221954"/>
           </a:xfrm>
           <a:prstGeom prst="rect">
@@ -9421,7 +9804,7 @@
         <p:spPr>
           <a:xfrm>
             <a:off x="4864608" y="1591055"/>
-            <a:ext cx="3867913" cy="1810513"/>
+            <a:ext cx="3867914" cy="1810513"/>
           </a:xfrm>
           <a:prstGeom prst="roundRect">
             <a:avLst>
@@ -9438,10 +9821,17 @@
           </a:ln>
         </p:spPr>
         <p:txBody>
-          <a:bodyPr lIns="45719" rIns="45719"/>
+          <a:bodyPr lIns="45718" tIns="45718" rIns="45718" bIns="45718"/>
           <a:lstStyle/>
           <a:p>
-            <a:pPr/>
+            <a:pPr>
+              <a:defRPr>
+                <a:latin typeface="+mj-lt"/>
+                <a:ea typeface="+mj-ea"/>
+                <a:cs typeface="+mj-cs"/>
+                <a:sym typeface="Calibri"/>
+              </a:defRPr>
+            </a:pPr>
           </a:p>
         </p:txBody>
       </p:sp>
@@ -9453,8 +9843,8 @@
         </p:nvSpPr>
         <p:spPr>
           <a:xfrm>
-            <a:off x="5047487" y="1724104"/>
-            <a:ext cx="3502154" cy="172816"/>
+            <a:off x="5047486" y="1724104"/>
+            <a:ext cx="3502155" cy="172815"/>
           </a:xfrm>
           <a:prstGeom prst="rect">
             <a:avLst/>
@@ -9502,7 +9892,7 @@
         <p:spPr>
           <a:xfrm>
             <a:off x="5102352" y="2037863"/>
-            <a:ext cx="3410713" cy="221954"/>
+            <a:ext cx="3410713" cy="221953"/>
           </a:xfrm>
           <a:prstGeom prst="rect">
             <a:avLst/>
@@ -9588,7 +9978,7 @@
         </p:nvSpPr>
         <p:spPr>
           <a:xfrm>
-            <a:off x="5102352" y="2367047"/>
+            <a:off x="5102352" y="2367046"/>
             <a:ext cx="3410713" cy="221954"/>
           </a:xfrm>
           <a:prstGeom prst="rect">
@@ -9653,7 +10043,7 @@
         </p:nvSpPr>
         <p:spPr>
           <a:xfrm>
-            <a:off x="5102352" y="2696231"/>
+            <a:off x="5102352" y="2696230"/>
             <a:ext cx="3410713" cy="221954"/>
           </a:xfrm>
           <a:prstGeom prst="rect">
@@ -9701,7 +10091,7 @@
         </p:nvSpPr>
         <p:spPr>
           <a:xfrm>
-            <a:off x="5102352" y="3025415"/>
+            <a:off x="5102352" y="3025414"/>
             <a:ext cx="3410713" cy="221954"/>
           </a:xfrm>
           <a:prstGeom prst="rect">
@@ -9749,10 +10139,10 @@
         </p:nvGrpSpPr>
         <p:grpSpPr>
           <a:xfrm>
-            <a:off x="777240" y="3511296"/>
-            <a:ext cx="3867912" cy="640081"/>
+            <a:off x="777239" y="3511296"/>
+            <a:ext cx="3867915" cy="640083"/>
             <a:chOff x="0" y="0"/>
-            <a:chExt cx="3867911" cy="640080"/>
+            <a:chExt cx="3867913" cy="640082"/>
           </a:xfrm>
         </p:grpSpPr>
         <p:sp>
@@ -9763,8 +10153,8 @@
           </p:nvSpPr>
           <p:spPr>
             <a:xfrm>
-              <a:off x="0" y="0"/>
-              <a:ext cx="3867912" cy="640081"/>
+              <a:off x="-1" y="-1"/>
+              <a:ext cx="3867915" cy="640083"/>
             </a:xfrm>
             <a:prstGeom prst="roundRect">
               <a:avLst>
@@ -9784,12 +10174,19 @@
             <a:effectLst/>
           </p:spPr>
           <p:txBody>
-            <a:bodyPr wrap="square" lIns="45719" tIns="45719" rIns="45719" bIns="45719" numCol="1" anchor="t">
+            <a:bodyPr wrap="square" lIns="45718" tIns="45718" rIns="45718" bIns="45718" numCol="1" anchor="t">
               <a:noAutofit/>
             </a:bodyPr>
             <a:lstStyle/>
             <a:p>
-              <a:pPr/>
+              <a:pPr>
+                <a:defRPr>
+                  <a:latin typeface="+mj-lt"/>
+                  <a:ea typeface="+mj-ea"/>
+                  <a:cs typeface="+mj-cs"/>
+                  <a:sym typeface="Calibri"/>
+                </a:defRPr>
+              </a:pPr>
             </a:p>
           </p:txBody>
         </p:sp>
@@ -9801,8 +10198,8 @@
           </p:nvSpPr>
           <p:spPr>
             <a:xfrm>
-              <a:off x="164591" y="133787"/>
-              <a:ext cx="3538729" cy="372506"/>
+              <a:off x="164590" y="133787"/>
+              <a:ext cx="3538731" cy="372505"/>
             </a:xfrm>
             <a:prstGeom prst="rect">
               <a:avLst/>
@@ -9856,10 +10253,10 @@
         </p:nvGrpSpPr>
         <p:grpSpPr>
           <a:xfrm>
-            <a:off x="777240" y="4261103"/>
-            <a:ext cx="3867912" cy="658369"/>
+            <a:off x="777239" y="4261103"/>
+            <a:ext cx="3867915" cy="658371"/>
             <a:chOff x="0" y="0"/>
-            <a:chExt cx="3867911" cy="658368"/>
+            <a:chExt cx="3867913" cy="658370"/>
           </a:xfrm>
         </p:grpSpPr>
         <p:sp>
@@ -9870,8 +10267,8 @@
           </p:nvSpPr>
           <p:spPr>
             <a:xfrm>
-              <a:off x="0" y="0"/>
-              <a:ext cx="3867912" cy="658369"/>
+              <a:off x="-1" y="-1"/>
+              <a:ext cx="3867915" cy="658372"/>
             </a:xfrm>
             <a:prstGeom prst="roundRect">
               <a:avLst>
@@ -9891,7 +10288,7 @@
             <a:effectLst/>
           </p:spPr>
           <p:txBody>
-            <a:bodyPr wrap="square" lIns="45719" tIns="45719" rIns="45719" bIns="45719" numCol="1" anchor="ctr">
+            <a:bodyPr wrap="square" lIns="45718" tIns="45718" rIns="45718" bIns="45718" numCol="1" anchor="ctr">
               <a:noAutofit/>
             </a:bodyPr>
             <a:lstStyle/>
@@ -9900,7 +10297,12 @@
                 <a:lnSpc>
                   <a:spcPts val="1500"/>
                 </a:lnSpc>
-                <a:defRPr sz="1100"/>
+                <a:defRPr sz="1100">
+                  <a:latin typeface="+mj-lt"/>
+                  <a:ea typeface="+mj-ea"/>
+                  <a:cs typeface="+mj-cs"/>
+                  <a:sym typeface="Calibri"/>
+                </a:defRPr>
               </a:pPr>
             </a:p>
           </p:txBody>
@@ -9913,8 +10315,8 @@
           </p:nvSpPr>
           <p:spPr>
             <a:xfrm>
-              <a:off x="24323" y="237165"/>
-              <a:ext cx="3819266" cy="184038"/>
+              <a:off x="24322" y="237165"/>
+              <a:ext cx="3819268" cy="184035"/>
             </a:xfrm>
             <a:prstGeom prst="rect">
               <a:avLst/>
@@ -9969,9 +10371,9 @@
         <p:grpSpPr>
           <a:xfrm>
             <a:off x="4864608" y="3511296"/>
-            <a:ext cx="3867913" cy="640081"/>
+            <a:ext cx="3867915" cy="640083"/>
             <a:chOff x="0" y="0"/>
-            <a:chExt cx="3867911" cy="640080"/>
+            <a:chExt cx="3867914" cy="640082"/>
           </a:xfrm>
         </p:grpSpPr>
         <p:sp>
@@ -9982,8 +10384,8 @@
           </p:nvSpPr>
           <p:spPr>
             <a:xfrm>
-              <a:off x="0" y="0"/>
-              <a:ext cx="3867912" cy="640081"/>
+              <a:off x="-1" y="-1"/>
+              <a:ext cx="3867916" cy="640083"/>
             </a:xfrm>
             <a:prstGeom prst="roundRect">
               <a:avLst>
@@ -10003,7 +10405,7 @@
             <a:effectLst/>
           </p:spPr>
           <p:txBody>
-            <a:bodyPr wrap="square" lIns="45719" tIns="45719" rIns="45719" bIns="45719" numCol="1" anchor="ctr">
+            <a:bodyPr wrap="square" lIns="45718" tIns="45718" rIns="45718" bIns="45718" numCol="1" anchor="ctr">
               <a:noAutofit/>
             </a:bodyPr>
             <a:lstStyle/>
@@ -10012,7 +10414,12 @@
                 <a:lnSpc>
                   <a:spcPts val="1500"/>
                 </a:lnSpc>
-                <a:defRPr sz="1100"/>
+                <a:defRPr sz="1100">
+                  <a:latin typeface="+mj-lt"/>
+                  <a:ea typeface="+mj-ea"/>
+                  <a:cs typeface="+mj-cs"/>
+                  <a:sym typeface="Calibri"/>
+                </a:defRPr>
               </a:pPr>
             </a:p>
           </p:txBody>
@@ -10026,7 +10433,7 @@
           <p:spPr>
             <a:xfrm>
               <a:off x="24323" y="228021"/>
-              <a:ext cx="3819266" cy="184038"/>
+              <a:ext cx="3819269" cy="184035"/>
             </a:xfrm>
             <a:prstGeom prst="rect">
               <a:avLst/>
@@ -10081,9 +10488,9 @@
         <p:grpSpPr>
           <a:xfrm>
             <a:off x="4864608" y="4261103"/>
-            <a:ext cx="3867913" cy="658369"/>
+            <a:ext cx="3867915" cy="658371"/>
             <a:chOff x="0" y="0"/>
-            <a:chExt cx="3867911" cy="658368"/>
+            <a:chExt cx="3867914" cy="658370"/>
           </a:xfrm>
         </p:grpSpPr>
         <p:sp>
@@ -10094,8 +10501,8 @@
           </p:nvSpPr>
           <p:spPr>
             <a:xfrm>
-              <a:off x="0" y="0"/>
-              <a:ext cx="3867912" cy="658369"/>
+              <a:off x="-1" y="-1"/>
+              <a:ext cx="3867916" cy="658372"/>
             </a:xfrm>
             <a:prstGeom prst="roundRect">
               <a:avLst>
@@ -10115,7 +10522,7 @@
             <a:effectLst/>
           </p:spPr>
           <p:txBody>
-            <a:bodyPr wrap="square" lIns="45719" tIns="45719" rIns="45719" bIns="45719" numCol="1" anchor="ctr">
+            <a:bodyPr wrap="square" lIns="45718" tIns="45718" rIns="45718" bIns="45718" numCol="1" anchor="ctr">
               <a:noAutofit/>
             </a:bodyPr>
             <a:lstStyle/>
@@ -10124,7 +10531,12 @@
                 <a:lnSpc>
                   <a:spcPts val="1500"/>
                 </a:lnSpc>
-                <a:defRPr sz="1100"/>
+                <a:defRPr sz="1100">
+                  <a:latin typeface="+mj-lt"/>
+                  <a:ea typeface="+mj-ea"/>
+                  <a:cs typeface="+mj-cs"/>
+                  <a:sym typeface="Calibri"/>
+                </a:defRPr>
               </a:pPr>
             </a:p>
           </p:txBody>
@@ -10138,7 +10550,7 @@
           <p:spPr>
             <a:xfrm>
               <a:off x="24323" y="237165"/>
-              <a:ext cx="3819266" cy="184038"/>
+              <a:ext cx="3819269" cy="184035"/>
             </a:xfrm>
             <a:prstGeom prst="rect">
               <a:avLst/>
@@ -10985,6 +11397,41 @@
                       </p:childTnLst>
                     </p:cTn>
                   </p:par>
+                  <p:par>
+                    <p:cTn id="70" fill="hold">
+                      <p:stCondLst>
+                        <p:cond delay="indefinite"/>
+                      </p:stCondLst>
+                      <p:childTnLst>
+                        <p:par>
+                          <p:cTn id="71" fill="hold">
+                            <p:stCondLst>
+                              <p:cond delay="0"/>
+                            </p:stCondLst>
+                            <p:childTnLst>
+                              <p:par>
+                                <p:cTn id="72" presetClass="mediacall" nodeType="clickEffect" presetSubtype="0" presetID="3" grpId="1" fill="hold">
+                                  <p:stCondLst>
+                                    <p:cond delay="0"/>
+                                  </p:stCondLst>
+                                  <p:childTnLst>
+                                    <p:cmd type="call" cmd="stop">
+                                      <p:cBhvr>
+                                        <p:cTn id="73" dur="1000" fill="hold"/>
+                                        <p:tgtEl>
+                                          <p:spTgt spid="140"/>
+                                        </p:tgtEl>
+                                      </p:cBhvr>
+                                    </p:cmd>
+                                  </p:childTnLst>
+                                </p:cTn>
+                              </p:par>
+                            </p:childTnLst>
+                          </p:cTn>
+                        </p:par>
+                      </p:childTnLst>
+                    </p:cTn>
+                  </p:par>
                 </p:childTnLst>
               </p:cTn>
               <p:prevCondLst>
@@ -11004,7 +11451,7 @@
             </p:seq>
             <p:video fullScrn="0">
               <p:cMediaNode mute="0" showWhenStopped="1" numSld="1" vol="0">
-                <p:cTn id="70" fill="hold" display="0">
+                <p:cTn id="74" fill="hold" display="0">
                   <p:stCondLst>
                     <p:cond delay="indefinite"/>
                   </p:stCondLst>
@@ -11015,7 +11462,7 @@
               </p:cMediaNode>
             </p:video>
             <p:seq concurrent="1" prevAc="none" nextAc="seek">
-              <p:cTn id="71" evtFilter="cancelBubble" nodeType="interactiveSeq" restart="whenNotActive" fill="hold">
+              <p:cTn id="75" evtFilter="cancelBubble" nodeType="interactiveSeq" restart="whenNotActive" fill="hold">
                 <p:stCondLst>
                   <p:cond delay="0" evt="onClick">
                     <p:tgtEl>
@@ -11028,26 +11475,26 @@
                 </p:endSync>
                 <p:childTnLst>
                   <p:par>
-                    <p:cTn id="72" fill="hold">
+                    <p:cTn id="76" fill="hold">
                       <p:stCondLst>
                         <p:cond delay="0"/>
                       </p:stCondLst>
                       <p:childTnLst>
                         <p:par>
-                          <p:cTn id="73" fill="hold">
+                          <p:cTn id="77" fill="hold">
                             <p:stCondLst>
                               <p:cond delay="0"/>
                             </p:stCondLst>
                             <p:childTnLst>
                               <p:par>
-                                <p:cTn id="74" presetClass="mediacall" nodeType="clickEffect" presetSubtype="0" presetID="2" fill="hold">
+                                <p:cTn id="78" presetClass="mediacall" nodeType="clickEffect" presetSubtype="0" presetID="2" fill="hold">
                                   <p:stCondLst>
                                     <p:cond delay="0"/>
                                   </p:stCondLst>
                                   <p:childTnLst>
                                     <p:cmd type="call" cmd="togglePause">
                                       <p:cBhvr>
-                                        <p:cTn id="75" dur="1" fill="hold"/>
+                                        <p:cTn id="79" dur="1" fill="hold"/>
                                         <p:tgtEl>
                                           <p:spTgt spid="140"/>
                                         </p:tgtEl>
@@ -11077,17 +11524,17 @@
       </p:par>
     </p:tnLst>
     <p:bldLst>
+      <p:bldP build="whole" bldLvl="1" animBg="1" rev="0" advAuto="0" spid="163" grpId="11"/>
       <p:bldP build="whole" bldLvl="1" animBg="1" rev="0" advAuto="0" spid="166" grpId="12"/>
-      <p:bldP build="whole" bldLvl="1" animBg="1" rev="0" advAuto="0" spid="148" grpId="2"/>
-      <p:bldP build="whole" bldLvl="1" animBg="1" rev="0" advAuto="0" spid="149" grpId="3"/>
-      <p:bldP build="whole" bldLvl="1" animBg="1" rev="0" advAuto="0" spid="156" grpId="8"/>
       <p:bldP build="whole" bldLvl="1" animBg="1" rev="0" advAuto="0" spid="160" grpId="10"/>
       <p:bldP build="whole" bldLvl="1" animBg="1" rev="0" advAuto="0" spid="155" grpId="7"/>
-      <p:bldP build="whole" bldLvl="1" animBg="1" rev="0" advAuto="0" spid="150" grpId="4"/>
-      <p:bldP build="whole" bldLvl="1" animBg="1" rev="0" advAuto="0" spid="163" grpId="11"/>
+      <p:bldP build="whole" bldLvl="1" animBg="1" rev="0" advAuto="0" spid="157" grpId="9"/>
+      <p:bldP build="whole" bldLvl="1" animBg="1" rev="0" advAuto="0" spid="156" grpId="8"/>
+      <p:bldP build="whole" bldLvl="1" animBg="1" rev="0" advAuto="0" spid="149" grpId="3"/>
       <p:bldP build="whole" bldLvl="1" animBg="1" rev="0" advAuto="0" spid="154" grpId="6"/>
       <p:bldP build="whole" bldLvl="1" animBg="1" rev="0" advAuto="0" spid="169" grpId="13"/>
-      <p:bldP build="whole" bldLvl="1" animBg="1" rev="0" advAuto="0" spid="157" grpId="9"/>
+      <p:bldP build="whole" bldLvl="1" animBg="1" rev="0" advAuto="0" spid="150" grpId="4"/>
+      <p:bldP build="whole" bldLvl="1" animBg="1" rev="0" advAuto="0" spid="148" grpId="2"/>
       <p:bldP build="whole" bldLvl="1" animBg="1" rev="0" advAuto="0" spid="151" grpId="5"/>
     </p:bldLst>
   </p:timing>
@@ -11137,7 +11584,7 @@
         <p:spPr>
           <a:xfrm>
             <a:off x="182879" y="182879"/>
-            <a:ext cx="310897" cy="4777742"/>
+            <a:ext cx="310898" cy="4777743"/>
           </a:xfrm>
           <a:prstGeom prst="rect">
             <a:avLst/>
@@ -11155,10 +11602,10 @@
         </p:nvGrpSpPr>
         <p:grpSpPr>
           <a:xfrm>
-            <a:off x="777240" y="274320"/>
-            <a:ext cx="1512418" cy="292609"/>
+            <a:off x="777239" y="274320"/>
+            <a:ext cx="1512420" cy="292611"/>
             <a:chOff x="0" y="0"/>
-            <a:chExt cx="1512417" cy="292608"/>
+            <a:chExt cx="1512419" cy="292609"/>
           </a:xfrm>
         </p:grpSpPr>
         <p:sp>
@@ -11169,8 +11616,8 @@
           </p:nvSpPr>
           <p:spPr>
             <a:xfrm>
-              <a:off x="0" y="0"/>
-              <a:ext cx="1512418" cy="292609"/>
+              <a:off x="-1" y="0"/>
+              <a:ext cx="1512420" cy="292611"/>
             </a:xfrm>
             <a:prstGeom prst="roundRect">
               <a:avLst>
@@ -11187,13 +11634,18 @@
             <a:effectLst/>
           </p:spPr>
           <p:txBody>
-            <a:bodyPr wrap="square" lIns="45719" tIns="45719" rIns="45719" bIns="45719" numCol="1" anchor="ctr">
+            <a:bodyPr wrap="square" lIns="45718" tIns="45718" rIns="45718" bIns="45718" numCol="1" anchor="ctr">
               <a:noAutofit/>
             </a:bodyPr>
             <a:lstStyle/>
             <a:p>
               <a:pPr algn="ctr">
-                <a:defRPr sz="900"/>
+                <a:defRPr sz="900">
+                  <a:latin typeface="+mj-lt"/>
+                  <a:ea typeface="+mj-ea"/>
+                  <a:cs typeface="+mj-cs"/>
+                  <a:sym typeface="Calibri"/>
+                </a:defRPr>
               </a:pPr>
             </a:p>
           </p:txBody>
@@ -11206,8 +11658,8 @@
           </p:nvSpPr>
           <p:spPr>
             <a:xfrm>
-              <a:off x="37494" y="82803"/>
-              <a:ext cx="1437430" cy="127001"/>
+              <a:off x="37493" y="82803"/>
+              <a:ext cx="1437433" cy="127001"/>
             </a:xfrm>
             <a:prstGeom prst="rect">
               <a:avLst/>
@@ -11306,7 +11758,7 @@
         </p:nvSpPr>
         <p:spPr>
           <a:xfrm>
-            <a:off x="777239" y="1288540"/>
+            <a:off x="777239" y="1288539"/>
             <a:ext cx="7955282" cy="147831"/>
           </a:xfrm>
           <a:prstGeom prst="rect">
@@ -11355,7 +11807,7 @@
         <p:spPr>
           <a:xfrm>
             <a:off x="777240" y="1591055"/>
-            <a:ext cx="7955281" cy="731521"/>
+            <a:ext cx="7955282" cy="731522"/>
           </a:xfrm>
           <a:prstGeom prst="roundRect">
             <a:avLst>
@@ -11372,10 +11824,17 @@
           </a:ln>
         </p:spPr>
         <p:txBody>
-          <a:bodyPr lIns="45719" rIns="45719"/>
+          <a:bodyPr lIns="45718" tIns="45718" rIns="45718" bIns="45718"/>
           <a:lstStyle/>
           <a:p>
-            <a:pPr/>
+            <a:pPr>
+              <a:defRPr>
+                <a:latin typeface="+mj-lt"/>
+                <a:ea typeface="+mj-ea"/>
+                <a:cs typeface="+mj-cs"/>
+                <a:sym typeface="Calibri"/>
+              </a:defRPr>
+            </a:pPr>
           </a:p>
         </p:txBody>
       </p:sp>
@@ -11387,8 +11846,8 @@
         </p:nvSpPr>
         <p:spPr>
           <a:xfrm>
-            <a:off x="960119" y="1852962"/>
-            <a:ext cx="3749042" cy="207708"/>
+            <a:off x="960118" y="1852962"/>
+            <a:ext cx="3749044" cy="207708"/>
           </a:xfrm>
           <a:prstGeom prst="rect">
             <a:avLst/>
@@ -11438,10 +11897,10 @@
         </p:nvGrpSpPr>
         <p:grpSpPr>
           <a:xfrm>
-            <a:off x="4846320" y="1673351"/>
-            <a:ext cx="3794760" cy="566929"/>
+            <a:off x="4846320" y="1673350"/>
+            <a:ext cx="3794761" cy="566931"/>
             <a:chOff x="0" y="0"/>
-            <a:chExt cx="3794759" cy="566927"/>
+            <a:chExt cx="3794760" cy="566929"/>
           </a:xfrm>
         </p:grpSpPr>
         <p:sp>
@@ -11453,7 +11912,7 @@
           <p:spPr>
             <a:xfrm>
               <a:off x="0" y="0"/>
-              <a:ext cx="3794760" cy="566928"/>
+              <a:ext cx="3794761" cy="566930"/>
             </a:xfrm>
             <a:prstGeom prst="roundRect">
               <a:avLst>
@@ -11473,7 +11932,7 @@
             <a:effectLst/>
           </p:spPr>
           <p:txBody>
-            <a:bodyPr wrap="square" lIns="45719" tIns="45719" rIns="45719" bIns="45719" numCol="1" anchor="ctr">
+            <a:bodyPr wrap="square" lIns="45718" tIns="45718" rIns="45718" bIns="45718" numCol="1" anchor="ctr">
               <a:noAutofit/>
             </a:bodyPr>
             <a:lstStyle/>
@@ -11482,7 +11941,12 @@
                 <a:lnSpc>
                   <a:spcPts val="1500"/>
                 </a:lnSpc>
-                <a:defRPr sz="1100"/>
+                <a:defRPr sz="1100">
+                  <a:latin typeface="+mj-lt"/>
+                  <a:ea typeface="+mj-ea"/>
+                  <a:cs typeface="+mj-cs"/>
+                  <a:sym typeface="Calibri"/>
+                </a:defRPr>
               </a:pPr>
             </a:p>
           </p:txBody>
@@ -11496,7 +11960,7 @@
           <p:spPr>
             <a:xfrm>
               <a:off x="29680" y="191699"/>
-              <a:ext cx="3735399" cy="183530"/>
+              <a:ext cx="3735400" cy="183528"/>
             </a:xfrm>
             <a:prstGeom prst="rect">
               <a:avLst/>
@@ -11551,7 +12015,7 @@
         <p:spPr>
           <a:xfrm>
             <a:off x="777240" y="2414016"/>
-            <a:ext cx="7955281" cy="731521"/>
+            <a:ext cx="7955282" cy="731522"/>
           </a:xfrm>
           <a:prstGeom prst="roundRect">
             <a:avLst>
@@ -11568,10 +12032,17 @@
           </a:ln>
         </p:spPr>
         <p:txBody>
-          <a:bodyPr lIns="45719" rIns="45719"/>
+          <a:bodyPr lIns="45718" tIns="45718" rIns="45718" bIns="45718"/>
           <a:lstStyle/>
           <a:p>
-            <a:pPr/>
+            <a:pPr>
+              <a:defRPr>
+                <a:latin typeface="+mj-lt"/>
+                <a:ea typeface="+mj-ea"/>
+                <a:cs typeface="+mj-cs"/>
+                <a:sym typeface="Calibri"/>
+              </a:defRPr>
+            </a:pPr>
           </a:p>
         </p:txBody>
       </p:sp>
@@ -11583,8 +12054,8 @@
         </p:nvSpPr>
         <p:spPr>
           <a:xfrm>
-            <a:off x="960119" y="2675922"/>
-            <a:ext cx="3749042" cy="207708"/>
+            <a:off x="960118" y="2675921"/>
+            <a:ext cx="3749044" cy="207708"/>
           </a:xfrm>
           <a:prstGeom prst="rect">
             <a:avLst/>
@@ -11635,9 +12106,9 @@
         <p:grpSpPr>
           <a:xfrm>
             <a:off x="4846320" y="2496311"/>
-            <a:ext cx="3794760" cy="566929"/>
+            <a:ext cx="3794761" cy="566930"/>
             <a:chOff x="0" y="0"/>
-            <a:chExt cx="3794759" cy="566927"/>
+            <a:chExt cx="3794760" cy="566929"/>
           </a:xfrm>
         </p:grpSpPr>
         <p:sp>
@@ -11649,7 +12120,7 @@
           <p:spPr>
             <a:xfrm>
               <a:off x="0" y="0"/>
-              <a:ext cx="3794760" cy="566928"/>
+              <a:ext cx="3794761" cy="566930"/>
             </a:xfrm>
             <a:prstGeom prst="roundRect">
               <a:avLst>
@@ -11669,7 +12140,7 @@
             <a:effectLst/>
           </p:spPr>
           <p:txBody>
-            <a:bodyPr wrap="square" lIns="45719" tIns="45719" rIns="45719" bIns="45719" numCol="1" anchor="ctr">
+            <a:bodyPr wrap="square" lIns="45718" tIns="45718" rIns="45718" bIns="45718" numCol="1" anchor="ctr">
               <a:noAutofit/>
             </a:bodyPr>
             <a:lstStyle/>
@@ -11678,7 +12149,12 @@
                 <a:lnSpc>
                   <a:spcPts val="1500"/>
                 </a:lnSpc>
-                <a:defRPr sz="1100"/>
+                <a:defRPr sz="1100">
+                  <a:latin typeface="+mj-lt"/>
+                  <a:ea typeface="+mj-ea"/>
+                  <a:cs typeface="+mj-cs"/>
+                  <a:sym typeface="Calibri"/>
+                </a:defRPr>
               </a:pPr>
             </a:p>
           </p:txBody>
@@ -11692,7 +12168,7 @@
           <p:spPr>
             <a:xfrm>
               <a:off x="29680" y="191699"/>
-              <a:ext cx="3735399" cy="183530"/>
+              <a:ext cx="3735400" cy="183528"/>
             </a:xfrm>
             <a:prstGeom prst="rect">
               <a:avLst/>
@@ -11747,7 +12223,7 @@
         <p:spPr>
           <a:xfrm>
             <a:off x="777240" y="3236976"/>
-            <a:ext cx="7955281" cy="731521"/>
+            <a:ext cx="7955282" cy="731522"/>
           </a:xfrm>
           <a:prstGeom prst="roundRect">
             <a:avLst>
@@ -11764,10 +12240,17 @@
           </a:ln>
         </p:spPr>
         <p:txBody>
-          <a:bodyPr lIns="45719" rIns="45719"/>
+          <a:bodyPr lIns="45718" tIns="45718" rIns="45718" bIns="45718"/>
           <a:lstStyle/>
           <a:p>
-            <a:pPr/>
+            <a:pPr>
+              <a:defRPr>
+                <a:latin typeface="+mj-lt"/>
+                <a:ea typeface="+mj-ea"/>
+                <a:cs typeface="+mj-cs"/>
+                <a:sym typeface="Calibri"/>
+              </a:defRPr>
+            </a:pPr>
           </a:p>
         </p:txBody>
       </p:sp>
@@ -11779,8 +12262,8 @@
         </p:nvSpPr>
         <p:spPr>
           <a:xfrm>
-            <a:off x="960119" y="3498882"/>
-            <a:ext cx="3749042" cy="207708"/>
+            <a:off x="960118" y="3498882"/>
+            <a:ext cx="3749044" cy="207708"/>
           </a:xfrm>
           <a:prstGeom prst="rect">
             <a:avLst/>
@@ -11831,9 +12314,9 @@
         <p:grpSpPr>
           <a:xfrm>
             <a:off x="4846320" y="3319271"/>
-            <a:ext cx="3794760" cy="566929"/>
+            <a:ext cx="3794761" cy="566931"/>
             <a:chOff x="0" y="0"/>
-            <a:chExt cx="3794759" cy="566927"/>
+            <a:chExt cx="3794760" cy="566929"/>
           </a:xfrm>
         </p:grpSpPr>
         <p:sp>
@@ -11845,7 +12328,7 @@
           <p:spPr>
             <a:xfrm>
               <a:off x="0" y="0"/>
-              <a:ext cx="3794760" cy="566928"/>
+              <a:ext cx="3794761" cy="566930"/>
             </a:xfrm>
             <a:prstGeom prst="roundRect">
               <a:avLst>
@@ -11865,7 +12348,7 @@
             <a:effectLst/>
           </p:spPr>
           <p:txBody>
-            <a:bodyPr wrap="square" lIns="45719" tIns="45719" rIns="45719" bIns="45719" numCol="1" anchor="ctr">
+            <a:bodyPr wrap="square" lIns="45718" tIns="45718" rIns="45718" bIns="45718" numCol="1" anchor="ctr">
               <a:noAutofit/>
             </a:bodyPr>
             <a:lstStyle/>
@@ -11874,7 +12357,12 @@
                 <a:lnSpc>
                   <a:spcPts val="1500"/>
                 </a:lnSpc>
-                <a:defRPr sz="1100"/>
+                <a:defRPr sz="1100">
+                  <a:latin typeface="+mj-lt"/>
+                  <a:ea typeface="+mj-ea"/>
+                  <a:cs typeface="+mj-cs"/>
+                  <a:sym typeface="Calibri"/>
+                </a:defRPr>
               </a:pPr>
             </a:p>
           </p:txBody>
@@ -11888,7 +12376,7 @@
           <p:spPr>
             <a:xfrm>
               <a:off x="29680" y="96449"/>
-              <a:ext cx="3735399" cy="374030"/>
+              <a:ext cx="3735400" cy="374027"/>
             </a:xfrm>
             <a:prstGeom prst="rect">
               <a:avLst/>
@@ -11943,7 +12431,7 @@
         <p:spPr>
           <a:xfrm>
             <a:off x="777240" y="4059935"/>
-            <a:ext cx="7955281" cy="731521"/>
+            <a:ext cx="7955282" cy="731522"/>
           </a:xfrm>
           <a:prstGeom prst="roundRect">
             <a:avLst>
@@ -11960,10 +12448,17 @@
           </a:ln>
         </p:spPr>
         <p:txBody>
-          <a:bodyPr lIns="45719" rIns="45719"/>
+          <a:bodyPr lIns="45718" tIns="45718" rIns="45718" bIns="45718"/>
           <a:lstStyle/>
           <a:p>
-            <a:pPr/>
+            <a:pPr>
+              <a:defRPr>
+                <a:latin typeface="+mj-lt"/>
+                <a:ea typeface="+mj-ea"/>
+                <a:cs typeface="+mj-cs"/>
+                <a:sym typeface="Calibri"/>
+              </a:defRPr>
+            </a:pPr>
           </a:p>
         </p:txBody>
       </p:sp>
@@ -11975,8 +12470,8 @@
         </p:nvSpPr>
         <p:spPr>
           <a:xfrm>
-            <a:off x="960119" y="4321842"/>
-            <a:ext cx="3749042" cy="207708"/>
+            <a:off x="960118" y="4321842"/>
+            <a:ext cx="3749044" cy="207708"/>
           </a:xfrm>
           <a:prstGeom prst="rect">
             <a:avLst/>
@@ -12027,9 +12522,9 @@
         <p:grpSpPr>
           <a:xfrm>
             <a:off x="4846320" y="4142232"/>
-            <a:ext cx="3794760" cy="566929"/>
+            <a:ext cx="3794761" cy="566931"/>
             <a:chOff x="0" y="0"/>
-            <a:chExt cx="3794759" cy="566927"/>
+            <a:chExt cx="3794760" cy="566929"/>
           </a:xfrm>
         </p:grpSpPr>
         <p:sp>
@@ -12041,7 +12536,7 @@
           <p:spPr>
             <a:xfrm>
               <a:off x="0" y="0"/>
-              <a:ext cx="3794760" cy="566928"/>
+              <a:ext cx="3794761" cy="566930"/>
             </a:xfrm>
             <a:prstGeom prst="roundRect">
               <a:avLst>
@@ -12061,7 +12556,7 @@
             <a:effectLst/>
           </p:spPr>
           <p:txBody>
-            <a:bodyPr wrap="square" lIns="45719" tIns="45719" rIns="45719" bIns="45719" numCol="1" anchor="ctr">
+            <a:bodyPr wrap="square" lIns="45718" tIns="45718" rIns="45718" bIns="45718" numCol="1" anchor="ctr">
               <a:noAutofit/>
             </a:bodyPr>
             <a:lstStyle/>
@@ -12070,7 +12565,12 @@
                 <a:lnSpc>
                   <a:spcPts val="1500"/>
                 </a:lnSpc>
-                <a:defRPr sz="1100"/>
+                <a:defRPr sz="1100">
+                  <a:latin typeface="+mj-lt"/>
+                  <a:ea typeface="+mj-ea"/>
+                  <a:cs typeface="+mj-cs"/>
+                  <a:sym typeface="Calibri"/>
+                </a:defRPr>
               </a:pPr>
             </a:p>
           </p:txBody>
@@ -12084,7 +12584,7 @@
           <p:spPr>
             <a:xfrm>
               <a:off x="29680" y="96449"/>
-              <a:ext cx="3735399" cy="374030"/>
+              <a:ext cx="3735400" cy="374027"/>
             </a:xfrm>
             <a:prstGeom prst="rect">
               <a:avLst/>
@@ -12553,6 +13053,41 @@
                       </p:childTnLst>
                     </p:cTn>
                   </p:par>
+                  <p:par>
+                    <p:cTn id="31" fill="hold">
+                      <p:stCondLst>
+                        <p:cond delay="indefinite"/>
+                      </p:stCondLst>
+                      <p:childTnLst>
+                        <p:par>
+                          <p:cTn id="32" fill="hold">
+                            <p:stCondLst>
+                              <p:cond delay="0"/>
+                            </p:stCondLst>
+                            <p:childTnLst>
+                              <p:par>
+                                <p:cTn id="33" presetClass="mediacall" nodeType="clickEffect" presetSubtype="0" presetID="3" grpId="1" fill="hold">
+                                  <p:stCondLst>
+                                    <p:cond delay="0"/>
+                                  </p:stCondLst>
+                                  <p:childTnLst>
+                                    <p:cmd type="call" cmd="stop">
+                                      <p:cBhvr>
+                                        <p:cTn id="34" dur="1000" fill="hold"/>
+                                        <p:tgtEl>
+                                          <p:spTgt spid="173"/>
+                                        </p:tgtEl>
+                                      </p:cBhvr>
+                                    </p:cmd>
+                                  </p:childTnLst>
+                                </p:cTn>
+                              </p:par>
+                            </p:childTnLst>
+                          </p:cTn>
+                        </p:par>
+                      </p:childTnLst>
+                    </p:cTn>
+                  </p:par>
                 </p:childTnLst>
               </p:cTn>
               <p:prevCondLst>
@@ -12572,7 +13107,7 @@
             </p:seq>
             <p:video fullScrn="0">
               <p:cMediaNode mute="0" showWhenStopped="1" numSld="1" vol="0">
-                <p:cTn id="31" fill="hold" display="0">
+                <p:cTn id="35" fill="hold" display="0">
                   <p:stCondLst>
                     <p:cond delay="indefinite"/>
                   </p:stCondLst>
@@ -12583,7 +13118,7 @@
               </p:cMediaNode>
             </p:video>
             <p:seq concurrent="1" prevAc="none" nextAc="seek">
-              <p:cTn id="32" evtFilter="cancelBubble" nodeType="interactiveSeq" restart="whenNotActive" fill="hold">
+              <p:cTn id="36" evtFilter="cancelBubble" nodeType="interactiveSeq" restart="whenNotActive" fill="hold">
                 <p:stCondLst>
                   <p:cond delay="0" evt="onClick">
                     <p:tgtEl>
@@ -12596,26 +13131,26 @@
                 </p:endSync>
                 <p:childTnLst>
                   <p:par>
-                    <p:cTn id="33" fill="hold">
+                    <p:cTn id="37" fill="hold">
                       <p:stCondLst>
                         <p:cond delay="0"/>
                       </p:stCondLst>
                       <p:childTnLst>
                         <p:par>
-                          <p:cTn id="34" fill="hold">
+                          <p:cTn id="38" fill="hold">
                             <p:stCondLst>
                               <p:cond delay="0"/>
                             </p:stCondLst>
                             <p:childTnLst>
                               <p:par>
-                                <p:cTn id="35" presetClass="mediacall" nodeType="clickEffect" presetSubtype="0" presetID="2" fill="hold">
+                                <p:cTn id="39" presetClass="mediacall" nodeType="clickEffect" presetSubtype="0" presetID="2" fill="hold">
                                   <p:stCondLst>
                                     <p:cond delay="0"/>
                                   </p:stCondLst>
                                   <p:childTnLst>
                                     <p:cmd type="call" cmd="togglePause">
                                       <p:cBhvr>
-                                        <p:cTn id="36" dur="1" fill="hold"/>
+                                        <p:cTn id="40" dur="1" fill="hold"/>
                                         <p:tgtEl>
                                           <p:spTgt spid="173"/>
                                         </p:tgtEl>
@@ -12645,10 +13180,10 @@
       </p:par>
     </p:tnLst>
     <p:bldLst>
-      <p:bldP build="whole" bldLvl="1" animBg="1" rev="0" advAuto="0" spid="188" grpId="3"/>
-      <p:bldP build="whole" bldLvl="1" animBg="1" rev="0" advAuto="0" spid="198" grpId="5"/>
       <p:bldP build="whole" bldLvl="1" animBg="1" rev="0" advAuto="0" spid="183" grpId="2"/>
       <p:bldP build="whole" bldLvl="1" animBg="1" rev="0" advAuto="0" spid="193" grpId="4"/>
+      <p:bldP build="whole" bldLvl="1" animBg="1" rev="0" advAuto="0" spid="198" grpId="5"/>
+      <p:bldP build="whole" bldLvl="1" animBg="1" rev="0" advAuto="0" spid="188" grpId="3"/>
     </p:bldLst>
   </p:timing>
 </p:sld>
@@ -12697,7 +13232,7 @@
         <p:spPr>
           <a:xfrm>
             <a:off x="182879" y="182879"/>
-            <a:ext cx="310897" cy="4777742"/>
+            <a:ext cx="310898" cy="4777743"/>
           </a:xfrm>
           <a:prstGeom prst="rect">
             <a:avLst/>
@@ -12716,9 +13251,9 @@
         <p:grpSpPr>
           <a:xfrm>
             <a:off x="777240" y="274320"/>
-            <a:ext cx="1870862" cy="292609"/>
+            <a:ext cx="1870863" cy="292611"/>
             <a:chOff x="0" y="0"/>
-            <a:chExt cx="1870861" cy="292608"/>
+            <a:chExt cx="1870862" cy="292609"/>
           </a:xfrm>
         </p:grpSpPr>
         <p:sp>
@@ -12730,7 +13265,7 @@
           <p:spPr>
             <a:xfrm>
               <a:off x="0" y="0"/>
-              <a:ext cx="1870862" cy="292609"/>
+              <a:ext cx="1870863" cy="292611"/>
             </a:xfrm>
             <a:prstGeom prst="roundRect">
               <a:avLst>
@@ -12747,13 +13282,18 @@
             <a:effectLst/>
           </p:spPr>
           <p:txBody>
-            <a:bodyPr wrap="square" lIns="45719" tIns="45719" rIns="45719" bIns="45719" numCol="1" anchor="ctr">
+            <a:bodyPr wrap="square" lIns="45718" tIns="45718" rIns="45718" bIns="45718" numCol="1" anchor="ctr">
               <a:noAutofit/>
             </a:bodyPr>
             <a:lstStyle/>
             <a:p>
               <a:pPr algn="ctr">
-                <a:defRPr sz="900"/>
+                <a:defRPr sz="900">
+                  <a:latin typeface="+mj-lt"/>
+                  <a:ea typeface="+mj-ea"/>
+                  <a:cs typeface="+mj-cs"/>
+                  <a:sym typeface="Calibri"/>
+                </a:defRPr>
               </a:pPr>
             </a:p>
           </p:txBody>
@@ -12767,7 +13307,7 @@
           <p:spPr>
             <a:xfrm>
               <a:off x="37495" y="82803"/>
-              <a:ext cx="1795872" cy="127001"/>
+              <a:ext cx="1795873" cy="127001"/>
             </a:xfrm>
             <a:prstGeom prst="rect">
               <a:avLst/>
@@ -12836,10 +13376,17 @@
           </a:ln>
         </p:spPr>
         <p:txBody>
-          <a:bodyPr lIns="45719" rIns="45719"/>
+          <a:bodyPr lIns="45718" tIns="45718" rIns="45718" bIns="45718"/>
           <a:lstStyle/>
           <a:p>
-            <a:pPr/>
+            <a:pPr>
+              <a:defRPr>
+                <a:latin typeface="+mj-lt"/>
+                <a:ea typeface="+mj-ea"/>
+                <a:cs typeface="+mj-cs"/>
+                <a:sym typeface="Calibri"/>
+              </a:defRPr>
+            </a:pPr>
           </a:p>
         </p:txBody>
       </p:sp>
@@ -12851,8 +13398,8 @@
         </p:nvSpPr>
         <p:spPr>
           <a:xfrm>
-            <a:off x="941832" y="930148"/>
-            <a:ext cx="365761" cy="279401"/>
+            <a:off x="941832" y="930147"/>
+            <a:ext cx="365762" cy="279401"/>
           </a:xfrm>
           <a:prstGeom prst="rect">
             <a:avLst/>
@@ -12899,8 +13446,8 @@
         </p:nvSpPr>
         <p:spPr>
           <a:xfrm>
-            <a:off x="1380744" y="1008007"/>
-            <a:ext cx="3081529" cy="233410"/>
+            <a:off x="1380744" y="1008006"/>
+            <a:ext cx="3081529" cy="233411"/>
           </a:xfrm>
           <a:prstGeom prst="rect">
             <a:avLst/>
@@ -12950,10 +13497,10 @@
         </p:nvGrpSpPr>
         <p:grpSpPr>
           <a:xfrm>
-            <a:off x="941832" y="1463039"/>
-            <a:ext cx="3538729" cy="365761"/>
+            <a:off x="941831" y="1463038"/>
+            <a:ext cx="3538732" cy="365763"/>
             <a:chOff x="0" y="0"/>
-            <a:chExt cx="3538728" cy="365759"/>
+            <a:chExt cx="3538730" cy="365762"/>
           </a:xfrm>
         </p:grpSpPr>
         <p:sp>
@@ -12964,8 +13511,8 @@
           </p:nvSpPr>
           <p:spPr>
             <a:xfrm>
-              <a:off x="0" y="0"/>
-              <a:ext cx="3538729" cy="365760"/>
+              <a:off x="-1" y="0"/>
+              <a:ext cx="3538732" cy="365763"/>
             </a:xfrm>
             <a:prstGeom prst="roundRect">
               <a:avLst>
@@ -12985,13 +13532,18 @@
             <a:effectLst/>
           </p:spPr>
           <p:txBody>
-            <a:bodyPr wrap="square" lIns="45719" tIns="45719" rIns="45719" bIns="45719" numCol="1" anchor="ctr">
+            <a:bodyPr wrap="square" lIns="45718" tIns="45718" rIns="45718" bIns="45718" numCol="1" anchor="ctr">
               <a:noAutofit/>
             </a:bodyPr>
             <a:lstStyle/>
             <a:p>
               <a:pPr>
-                <a:defRPr sz="1200"/>
+                <a:defRPr sz="1200">
+                  <a:latin typeface="+mj-lt"/>
+                  <a:ea typeface="+mj-ea"/>
+                  <a:cs typeface="+mj-cs"/>
+                  <a:sym typeface="Calibri"/>
+                </a:defRPr>
               </a:pPr>
             </a:p>
           </p:txBody>
@@ -13005,7 +13557,7 @@
           <p:spPr>
             <a:xfrm>
               <a:off x="31724" y="95456"/>
-              <a:ext cx="3475280" cy="174848"/>
+              <a:ext cx="3475281" cy="174845"/>
             </a:xfrm>
             <a:prstGeom prst="rect">
               <a:avLst/>
@@ -13057,7 +13609,7 @@
         <p:spPr>
           <a:xfrm>
             <a:off x="4864608" y="786383"/>
-            <a:ext cx="3867913" cy="1170434"/>
+            <a:ext cx="3867914" cy="1170434"/>
           </a:xfrm>
           <a:prstGeom prst="roundRect">
             <a:avLst>
@@ -13074,10 +13626,17 @@
           </a:ln>
         </p:spPr>
         <p:txBody>
-          <a:bodyPr lIns="45719" rIns="45719"/>
+          <a:bodyPr lIns="45718" tIns="45718" rIns="45718" bIns="45718"/>
           <a:lstStyle/>
           <a:p>
-            <a:pPr/>
+            <a:pPr>
+              <a:defRPr>
+                <a:latin typeface="+mj-lt"/>
+                <a:ea typeface="+mj-ea"/>
+                <a:cs typeface="+mj-cs"/>
+                <a:sym typeface="Calibri"/>
+              </a:defRPr>
+            </a:pPr>
           </a:p>
         </p:txBody>
       </p:sp>
@@ -13089,8 +13648,8 @@
         </p:nvSpPr>
         <p:spPr>
           <a:xfrm>
-            <a:off x="5029199" y="930148"/>
-            <a:ext cx="365762" cy="279401"/>
+            <a:off x="5029198" y="930147"/>
+            <a:ext cx="365763" cy="279401"/>
           </a:xfrm>
           <a:prstGeom prst="rect">
             <a:avLst/>
@@ -13137,8 +13696,8 @@
         </p:nvSpPr>
         <p:spPr>
           <a:xfrm>
-            <a:off x="5468111" y="1008007"/>
-            <a:ext cx="3081529" cy="233410"/>
+            <a:off x="5468110" y="1008006"/>
+            <a:ext cx="3081530" cy="233411"/>
           </a:xfrm>
           <a:prstGeom prst="rect">
             <a:avLst/>
@@ -13188,10 +13747,10 @@
         </p:nvGrpSpPr>
         <p:grpSpPr>
           <a:xfrm>
-            <a:off x="5029200" y="1463039"/>
-            <a:ext cx="3538729" cy="365761"/>
+            <a:off x="5029199" y="1463038"/>
+            <a:ext cx="3538732" cy="365763"/>
             <a:chOff x="0" y="0"/>
-            <a:chExt cx="3538728" cy="365759"/>
+            <a:chExt cx="3538730" cy="365762"/>
           </a:xfrm>
         </p:grpSpPr>
         <p:sp>
@@ -13202,8 +13761,8 @@
           </p:nvSpPr>
           <p:spPr>
             <a:xfrm>
-              <a:off x="0" y="0"/>
-              <a:ext cx="3538729" cy="365760"/>
+              <a:off x="-1" y="0"/>
+              <a:ext cx="3538732" cy="365763"/>
             </a:xfrm>
             <a:prstGeom prst="roundRect">
               <a:avLst>
@@ -13223,13 +13782,18 @@
             <a:effectLst/>
           </p:spPr>
           <p:txBody>
-            <a:bodyPr wrap="square" lIns="45719" tIns="45719" rIns="45719" bIns="45719" numCol="1" anchor="ctr">
+            <a:bodyPr wrap="square" lIns="45718" tIns="45718" rIns="45718" bIns="45718" numCol="1" anchor="ctr">
               <a:noAutofit/>
             </a:bodyPr>
             <a:lstStyle/>
             <a:p>
               <a:pPr>
-                <a:defRPr sz="1200"/>
+                <a:defRPr sz="1200">
+                  <a:latin typeface="+mj-lt"/>
+                  <a:ea typeface="+mj-ea"/>
+                  <a:cs typeface="+mj-cs"/>
+                  <a:sym typeface="Calibri"/>
+                </a:defRPr>
               </a:pPr>
             </a:p>
           </p:txBody>
@@ -13243,7 +13807,7 @@
           <p:spPr>
             <a:xfrm>
               <a:off x="31724" y="95456"/>
-              <a:ext cx="3475280" cy="174848"/>
+              <a:ext cx="3475281" cy="174845"/>
             </a:xfrm>
             <a:prstGeom prst="rect">
               <a:avLst/>
@@ -13295,7 +13859,7 @@
         <p:spPr>
           <a:xfrm>
             <a:off x="777240" y="2075688"/>
-            <a:ext cx="3867912" cy="1170433"/>
+            <a:ext cx="3867912" cy="1170434"/>
           </a:xfrm>
           <a:prstGeom prst="roundRect">
             <a:avLst>
@@ -13312,10 +13876,17 @@
           </a:ln>
         </p:spPr>
         <p:txBody>
-          <a:bodyPr lIns="45719" rIns="45719"/>
+          <a:bodyPr lIns="45718" tIns="45718" rIns="45718" bIns="45718"/>
           <a:lstStyle/>
           <a:p>
-            <a:pPr/>
+            <a:pPr>
+              <a:defRPr>
+                <a:latin typeface="+mj-lt"/>
+                <a:ea typeface="+mj-ea"/>
+                <a:cs typeface="+mj-cs"/>
+                <a:sym typeface="Calibri"/>
+              </a:defRPr>
+            </a:pPr>
           </a:p>
         </p:txBody>
       </p:sp>
@@ -13327,8 +13898,8 @@
         </p:nvSpPr>
         <p:spPr>
           <a:xfrm>
-            <a:off x="941832" y="2219451"/>
-            <a:ext cx="365761" cy="279401"/>
+            <a:off x="941832" y="2219450"/>
+            <a:ext cx="365762" cy="279401"/>
           </a:xfrm>
           <a:prstGeom prst="rect">
             <a:avLst/>
@@ -13375,8 +13946,8 @@
         </p:nvSpPr>
         <p:spPr>
           <a:xfrm>
-            <a:off x="1380744" y="2297311"/>
-            <a:ext cx="3081529" cy="233410"/>
+            <a:off x="1380744" y="2297310"/>
+            <a:ext cx="3081529" cy="233411"/>
           </a:xfrm>
           <a:prstGeom prst="rect">
             <a:avLst/>
@@ -13426,10 +13997,10 @@
         </p:nvGrpSpPr>
         <p:grpSpPr>
           <a:xfrm>
-            <a:off x="941832" y="2752344"/>
-            <a:ext cx="3538729" cy="365761"/>
+            <a:off x="941831" y="2752344"/>
+            <a:ext cx="3538732" cy="365763"/>
             <a:chOff x="0" y="0"/>
-            <a:chExt cx="3538728" cy="365759"/>
+            <a:chExt cx="3538730" cy="365762"/>
           </a:xfrm>
         </p:grpSpPr>
         <p:sp>
@@ -13440,8 +14011,8 @@
           </p:nvSpPr>
           <p:spPr>
             <a:xfrm>
-              <a:off x="0" y="0"/>
-              <a:ext cx="3538729" cy="365760"/>
+              <a:off x="-1" y="0"/>
+              <a:ext cx="3538732" cy="365763"/>
             </a:xfrm>
             <a:prstGeom prst="roundRect">
               <a:avLst>
@@ -13461,13 +14032,18 @@
             <a:effectLst/>
           </p:spPr>
           <p:txBody>
-            <a:bodyPr wrap="square" lIns="45719" tIns="45719" rIns="45719" bIns="45719" numCol="1" anchor="ctr">
+            <a:bodyPr wrap="square" lIns="45718" tIns="45718" rIns="45718" bIns="45718" numCol="1" anchor="ctr">
               <a:noAutofit/>
             </a:bodyPr>
             <a:lstStyle/>
             <a:p>
               <a:pPr>
-                <a:defRPr sz="1200"/>
+                <a:defRPr sz="1200">
+                  <a:latin typeface="+mj-lt"/>
+                  <a:ea typeface="+mj-ea"/>
+                  <a:cs typeface="+mj-cs"/>
+                  <a:sym typeface="Calibri"/>
+                </a:defRPr>
               </a:pPr>
             </a:p>
           </p:txBody>
@@ -13481,7 +14057,7 @@
           <p:spPr>
             <a:xfrm>
               <a:off x="31724" y="95456"/>
-              <a:ext cx="3475280" cy="174848"/>
+              <a:ext cx="3475281" cy="174845"/>
             </a:xfrm>
             <a:prstGeom prst="rect">
               <a:avLst/>
@@ -13533,7 +14109,7 @@
         <p:spPr>
           <a:xfrm>
             <a:off x="4864608" y="2075688"/>
-            <a:ext cx="3867913" cy="1170433"/>
+            <a:ext cx="3867914" cy="1170434"/>
           </a:xfrm>
           <a:prstGeom prst="roundRect">
             <a:avLst>
@@ -13550,10 +14126,17 @@
           </a:ln>
         </p:spPr>
         <p:txBody>
-          <a:bodyPr lIns="45719" rIns="45719"/>
+          <a:bodyPr lIns="45718" tIns="45718" rIns="45718" bIns="45718"/>
           <a:lstStyle/>
           <a:p>
-            <a:pPr/>
+            <a:pPr>
+              <a:defRPr>
+                <a:latin typeface="+mj-lt"/>
+                <a:ea typeface="+mj-ea"/>
+                <a:cs typeface="+mj-cs"/>
+                <a:sym typeface="Calibri"/>
+              </a:defRPr>
+            </a:pPr>
           </a:p>
         </p:txBody>
       </p:sp>
@@ -13565,8 +14148,8 @@
         </p:nvSpPr>
         <p:spPr>
           <a:xfrm>
-            <a:off x="5029199" y="2219451"/>
-            <a:ext cx="365762" cy="279401"/>
+            <a:off x="5029198" y="2219450"/>
+            <a:ext cx="365763" cy="279401"/>
           </a:xfrm>
           <a:prstGeom prst="rect">
             <a:avLst/>
@@ -13613,8 +14196,8 @@
         </p:nvSpPr>
         <p:spPr>
           <a:xfrm>
-            <a:off x="5468111" y="2297311"/>
-            <a:ext cx="3081529" cy="233410"/>
+            <a:off x="5468110" y="2297310"/>
+            <a:ext cx="3081530" cy="233411"/>
           </a:xfrm>
           <a:prstGeom prst="rect">
             <a:avLst/>
@@ -13664,10 +14247,10 @@
         </p:nvGrpSpPr>
         <p:grpSpPr>
           <a:xfrm>
-            <a:off x="5029200" y="2752344"/>
-            <a:ext cx="3538729" cy="365761"/>
+            <a:off x="5029199" y="2752344"/>
+            <a:ext cx="3538732" cy="365763"/>
             <a:chOff x="0" y="0"/>
-            <a:chExt cx="3538728" cy="365759"/>
+            <a:chExt cx="3538730" cy="365762"/>
           </a:xfrm>
         </p:grpSpPr>
         <p:sp>
@@ -13678,8 +14261,8 @@
           </p:nvSpPr>
           <p:spPr>
             <a:xfrm>
-              <a:off x="0" y="0"/>
-              <a:ext cx="3538729" cy="365760"/>
+              <a:off x="-1" y="0"/>
+              <a:ext cx="3538732" cy="365763"/>
             </a:xfrm>
             <a:prstGeom prst="roundRect">
               <a:avLst>
@@ -13699,13 +14282,18 @@
             <a:effectLst/>
           </p:spPr>
           <p:txBody>
-            <a:bodyPr wrap="square" lIns="45719" tIns="45719" rIns="45719" bIns="45719" numCol="1" anchor="ctr">
+            <a:bodyPr wrap="square" lIns="45718" tIns="45718" rIns="45718" bIns="45718" numCol="1" anchor="ctr">
               <a:noAutofit/>
             </a:bodyPr>
             <a:lstStyle/>
             <a:p>
               <a:pPr>
-                <a:defRPr sz="1200"/>
+                <a:defRPr sz="1200">
+                  <a:latin typeface="+mj-lt"/>
+                  <a:ea typeface="+mj-ea"/>
+                  <a:cs typeface="+mj-cs"/>
+                  <a:sym typeface="Calibri"/>
+                </a:defRPr>
               </a:pPr>
             </a:p>
           </p:txBody>
@@ -13719,7 +14307,7 @@
           <p:spPr>
             <a:xfrm>
               <a:off x="31724" y="95456"/>
-              <a:ext cx="3475280" cy="174848"/>
+              <a:ext cx="3475281" cy="174845"/>
             </a:xfrm>
             <a:prstGeom prst="rect">
               <a:avLst/>
@@ -13771,7 +14359,7 @@
         <p:spPr>
           <a:xfrm>
             <a:off x="777240" y="3364991"/>
-            <a:ext cx="3867912" cy="1170433"/>
+            <a:ext cx="3867912" cy="1170434"/>
           </a:xfrm>
           <a:prstGeom prst="roundRect">
             <a:avLst>
@@ -13788,10 +14376,17 @@
           </a:ln>
         </p:spPr>
         <p:txBody>
-          <a:bodyPr lIns="45719" rIns="45719"/>
+          <a:bodyPr lIns="45718" tIns="45718" rIns="45718" bIns="45718"/>
           <a:lstStyle/>
           <a:p>
-            <a:pPr/>
+            <a:pPr>
+              <a:defRPr>
+                <a:latin typeface="+mj-lt"/>
+                <a:ea typeface="+mj-ea"/>
+                <a:cs typeface="+mj-cs"/>
+                <a:sym typeface="Calibri"/>
+              </a:defRPr>
+            </a:pPr>
           </a:p>
         </p:txBody>
       </p:sp>
@@ -13803,8 +14398,8 @@
         </p:nvSpPr>
         <p:spPr>
           <a:xfrm>
-            <a:off x="941832" y="3508756"/>
-            <a:ext cx="365761" cy="279401"/>
+            <a:off x="941832" y="3508755"/>
+            <a:ext cx="365762" cy="279401"/>
           </a:xfrm>
           <a:prstGeom prst="rect">
             <a:avLst/>
@@ -13902,10 +14497,10 @@
         </p:nvGrpSpPr>
         <p:grpSpPr>
           <a:xfrm>
-            <a:off x="941832" y="4041647"/>
-            <a:ext cx="3538729" cy="365761"/>
+            <a:off x="941831" y="4041647"/>
+            <a:ext cx="3538732" cy="365763"/>
             <a:chOff x="0" y="0"/>
-            <a:chExt cx="3538728" cy="365759"/>
+            <a:chExt cx="3538730" cy="365762"/>
           </a:xfrm>
         </p:grpSpPr>
         <p:sp>
@@ -13916,8 +14511,8 @@
           </p:nvSpPr>
           <p:spPr>
             <a:xfrm>
-              <a:off x="0" y="0"/>
-              <a:ext cx="3538729" cy="365760"/>
+              <a:off x="-1" y="0"/>
+              <a:ext cx="3538732" cy="365763"/>
             </a:xfrm>
             <a:prstGeom prst="roundRect">
               <a:avLst>
@@ -13937,13 +14532,18 @@
             <a:effectLst/>
           </p:spPr>
           <p:txBody>
-            <a:bodyPr wrap="square" lIns="45719" tIns="45719" rIns="45719" bIns="45719" numCol="1" anchor="ctr">
+            <a:bodyPr wrap="square" lIns="45718" tIns="45718" rIns="45718" bIns="45718" numCol="1" anchor="ctr">
               <a:noAutofit/>
             </a:bodyPr>
             <a:lstStyle/>
             <a:p>
               <a:pPr>
-                <a:defRPr sz="1200"/>
+                <a:defRPr sz="1200">
+                  <a:latin typeface="+mj-lt"/>
+                  <a:ea typeface="+mj-ea"/>
+                  <a:cs typeface="+mj-cs"/>
+                  <a:sym typeface="Calibri"/>
+                </a:defRPr>
               </a:pPr>
             </a:p>
           </p:txBody>
@@ -13957,7 +14557,7 @@
           <p:spPr>
             <a:xfrm>
               <a:off x="31724" y="95456"/>
-              <a:ext cx="3475280" cy="174848"/>
+              <a:ext cx="3475281" cy="174845"/>
             </a:xfrm>
             <a:prstGeom prst="rect">
               <a:avLst/>
@@ -14009,7 +14609,7 @@
         <p:spPr>
           <a:xfrm>
             <a:off x="4864608" y="3364991"/>
-            <a:ext cx="3867913" cy="1170433"/>
+            <a:ext cx="3867914" cy="1170434"/>
           </a:xfrm>
           <a:prstGeom prst="roundRect">
             <a:avLst>
@@ -14026,10 +14626,17 @@
           </a:ln>
         </p:spPr>
         <p:txBody>
-          <a:bodyPr lIns="45719" rIns="45719"/>
+          <a:bodyPr lIns="45718" tIns="45718" rIns="45718" bIns="45718"/>
           <a:lstStyle/>
           <a:p>
-            <a:pPr/>
+            <a:pPr>
+              <a:defRPr>
+                <a:latin typeface="+mj-lt"/>
+                <a:ea typeface="+mj-ea"/>
+                <a:cs typeface="+mj-cs"/>
+                <a:sym typeface="Calibri"/>
+              </a:defRPr>
+            </a:pPr>
           </a:p>
         </p:txBody>
       </p:sp>
@@ -14041,8 +14648,8 @@
         </p:nvSpPr>
         <p:spPr>
           <a:xfrm>
-            <a:off x="5029199" y="3508756"/>
-            <a:ext cx="365762" cy="279401"/>
+            <a:off x="5029198" y="3508755"/>
+            <a:ext cx="365763" cy="279401"/>
           </a:xfrm>
           <a:prstGeom prst="rect">
             <a:avLst/>
@@ -14089,8 +14696,8 @@
         </p:nvSpPr>
         <p:spPr>
           <a:xfrm>
-            <a:off x="5468111" y="3586615"/>
-            <a:ext cx="3081529" cy="233410"/>
+            <a:off x="5468110" y="3586615"/>
+            <a:ext cx="3081530" cy="233410"/>
           </a:xfrm>
           <a:prstGeom prst="rect">
             <a:avLst/>
@@ -14140,10 +14747,10 @@
         </p:nvGrpSpPr>
         <p:grpSpPr>
           <a:xfrm>
-            <a:off x="5029200" y="4041647"/>
-            <a:ext cx="3538729" cy="365761"/>
+            <a:off x="5029199" y="4041647"/>
+            <a:ext cx="3538732" cy="365763"/>
             <a:chOff x="0" y="0"/>
-            <a:chExt cx="3538728" cy="365759"/>
+            <a:chExt cx="3538730" cy="365762"/>
           </a:xfrm>
         </p:grpSpPr>
         <p:sp>
@@ -14154,8 +14761,8 @@
           </p:nvSpPr>
           <p:spPr>
             <a:xfrm>
-              <a:off x="0" y="0"/>
-              <a:ext cx="3538729" cy="365760"/>
+              <a:off x="-1" y="0"/>
+              <a:ext cx="3538732" cy="365763"/>
             </a:xfrm>
             <a:prstGeom prst="roundRect">
               <a:avLst>
@@ -14175,13 +14782,18 @@
             <a:effectLst/>
           </p:spPr>
           <p:txBody>
-            <a:bodyPr wrap="square" lIns="45719" tIns="45719" rIns="45719" bIns="45719" numCol="1" anchor="ctr">
+            <a:bodyPr wrap="square" lIns="45718" tIns="45718" rIns="45718" bIns="45718" numCol="1" anchor="ctr">
               <a:noAutofit/>
             </a:bodyPr>
             <a:lstStyle/>
             <a:p>
               <a:pPr>
-                <a:defRPr sz="1200"/>
+                <a:defRPr sz="1200">
+                  <a:latin typeface="+mj-lt"/>
+                  <a:ea typeface="+mj-ea"/>
+                  <a:cs typeface="+mj-cs"/>
+                  <a:sym typeface="Calibri"/>
+                </a:defRPr>
               </a:pPr>
             </a:p>
           </p:txBody>
@@ -14195,7 +14807,7 @@
           <p:spPr>
             <a:xfrm>
               <a:off x="31724" y="95456"/>
-              <a:ext cx="3475280" cy="174848"/>
+              <a:ext cx="3475281" cy="174845"/>
             </a:xfrm>
             <a:prstGeom prst="rect">
               <a:avLst/>
@@ -14613,6 +15225,41 @@
                       </p:childTnLst>
                     </p:cTn>
                   </p:par>
+                  <p:par>
+                    <p:cTn id="37" fill="hold">
+                      <p:stCondLst>
+                        <p:cond delay="indefinite"/>
+                      </p:stCondLst>
+                      <p:childTnLst>
+                        <p:par>
+                          <p:cTn id="38" fill="hold">
+                            <p:stCondLst>
+                              <p:cond delay="0"/>
+                            </p:stCondLst>
+                            <p:childTnLst>
+                              <p:par>
+                                <p:cTn id="39" presetClass="mediacall" nodeType="clickEffect" presetSubtype="0" presetID="3" grpId="1" fill="hold">
+                                  <p:stCondLst>
+                                    <p:cond delay="0"/>
+                                  </p:stCondLst>
+                                  <p:childTnLst>
+                                    <p:cmd type="call" cmd="stop">
+                                      <p:cBhvr>
+                                        <p:cTn id="40" dur="1000" fill="hold"/>
+                                        <p:tgtEl>
+                                          <p:spTgt spid="202"/>
+                                        </p:tgtEl>
+                                      </p:cBhvr>
+                                    </p:cmd>
+                                  </p:childTnLst>
+                                </p:cTn>
+                              </p:par>
+                            </p:childTnLst>
+                          </p:cTn>
+                        </p:par>
+                      </p:childTnLst>
+                    </p:cTn>
+                  </p:par>
                 </p:childTnLst>
               </p:cTn>
               <p:prevCondLst>
@@ -14632,7 +15279,7 @@
             </p:seq>
             <p:video fullScrn="0">
               <p:cMediaNode mute="0" showWhenStopped="1" numSld="1" vol="0">
-                <p:cTn id="37" fill="hold" display="0">
+                <p:cTn id="41" fill="hold" display="0">
                   <p:stCondLst>
                     <p:cond delay="indefinite"/>
                   </p:stCondLst>
@@ -14643,7 +15290,7 @@
               </p:cMediaNode>
             </p:video>
             <p:seq concurrent="1" prevAc="none" nextAc="seek">
-              <p:cTn id="38" evtFilter="cancelBubble" nodeType="interactiveSeq" restart="whenNotActive" fill="hold">
+              <p:cTn id="42" evtFilter="cancelBubble" nodeType="interactiveSeq" restart="whenNotActive" fill="hold">
                 <p:stCondLst>
                   <p:cond delay="0" evt="onClick">
                     <p:tgtEl>
@@ -14656,26 +15303,26 @@
                 </p:endSync>
                 <p:childTnLst>
                   <p:par>
-                    <p:cTn id="39" fill="hold">
+                    <p:cTn id="43" fill="hold">
                       <p:stCondLst>
                         <p:cond delay="0"/>
                       </p:stCondLst>
                       <p:childTnLst>
                         <p:par>
-                          <p:cTn id="40" fill="hold">
+                          <p:cTn id="44" fill="hold">
                             <p:stCondLst>
                               <p:cond delay="0"/>
                             </p:stCondLst>
                             <p:childTnLst>
                               <p:par>
-                                <p:cTn id="41" presetClass="mediacall" nodeType="clickEffect" presetSubtype="0" presetID="2" fill="hold">
+                                <p:cTn id="45" presetClass="mediacall" nodeType="clickEffect" presetSubtype="0" presetID="2" fill="hold">
                                   <p:stCondLst>
                                     <p:cond delay="0"/>
                                   </p:stCondLst>
                                   <p:childTnLst>
                                     <p:cmd type="call" cmd="togglePause">
                                       <p:cBhvr>
-                                        <p:cTn id="42" dur="1" fill="hold"/>
+                                        <p:cTn id="46" dur="1" fill="hold"/>
                                         <p:tgtEl>
                                           <p:spTgt spid="202"/>
                                         </p:tgtEl>
@@ -14705,12 +15352,12 @@
       </p:par>
     </p:tnLst>
     <p:bldLst>
+      <p:bldP build="whole" bldLvl="1" animBg="1" rev="0" advAuto="0" spid="241" grpId="7"/>
       <p:bldP build="whole" bldLvl="1" animBg="1" rev="0" advAuto="0" spid="211" grpId="2"/>
       <p:bldP build="whole" bldLvl="1" animBg="1" rev="0" advAuto="0" spid="217" grpId="3"/>
       <p:bldP build="whole" bldLvl="1" animBg="1" rev="0" advAuto="0" spid="223" grpId="4"/>
       <p:bldP build="whole" bldLvl="1" animBg="1" rev="0" advAuto="0" spid="229" grpId="5"/>
       <p:bldP build="whole" bldLvl="1" animBg="1" rev="0" advAuto="0" spid="235" grpId="6"/>
-      <p:bldP build="whole" bldLvl="1" animBg="1" rev="0" advAuto="0" spid="241" grpId="7"/>
     </p:bldLst>
   </p:timing>
 </p:sld>
@@ -14759,7 +15406,7 @@
         <p:spPr>
           <a:xfrm>
             <a:off x="182879" y="182879"/>
-            <a:ext cx="310897" cy="4777742"/>
+            <a:ext cx="310898" cy="4777743"/>
           </a:xfrm>
           <a:prstGeom prst="rect">
             <a:avLst/>
@@ -14778,9 +15425,9 @@
         <p:grpSpPr>
           <a:xfrm>
             <a:off x="777240" y="274320"/>
-            <a:ext cx="1691640" cy="292609"/>
+            <a:ext cx="1691641" cy="292611"/>
             <a:chOff x="0" y="0"/>
-            <a:chExt cx="1691639" cy="292608"/>
+            <a:chExt cx="1691640" cy="292609"/>
           </a:xfrm>
         </p:grpSpPr>
         <p:sp>
@@ -14792,7 +15439,7 @@
           <p:spPr>
             <a:xfrm>
               <a:off x="0" y="0"/>
-              <a:ext cx="1691640" cy="292609"/>
+              <a:ext cx="1691641" cy="292611"/>
             </a:xfrm>
             <a:prstGeom prst="roundRect">
               <a:avLst>
@@ -14809,13 +15456,18 @@
             <a:effectLst/>
           </p:spPr>
           <p:txBody>
-            <a:bodyPr wrap="square" lIns="45719" tIns="45719" rIns="45719" bIns="45719" numCol="1" anchor="ctr">
+            <a:bodyPr wrap="square" lIns="45718" tIns="45718" rIns="45718" bIns="45718" numCol="1" anchor="ctr">
               <a:noAutofit/>
             </a:bodyPr>
             <a:lstStyle/>
             <a:p>
               <a:pPr algn="ctr">
-                <a:defRPr sz="900"/>
+                <a:defRPr sz="900">
+                  <a:latin typeface="+mj-lt"/>
+                  <a:ea typeface="+mj-ea"/>
+                  <a:cs typeface="+mj-cs"/>
+                  <a:sym typeface="Calibri"/>
+                </a:defRPr>
               </a:pPr>
             </a:p>
           </p:txBody>
@@ -14828,8 +15480,8 @@
           </p:nvSpPr>
           <p:spPr>
             <a:xfrm>
-              <a:off x="37494" y="82803"/>
-              <a:ext cx="1616652" cy="127001"/>
+              <a:off x="37493" y="82803"/>
+              <a:ext cx="1616655" cy="127001"/>
             </a:xfrm>
             <a:prstGeom prst="rect">
               <a:avLst/>
@@ -14891,8 +15543,8 @@
         </p:blipFill>
         <p:spPr>
           <a:xfrm>
-            <a:off x="7589519" y="603504"/>
-            <a:ext cx="1143001" cy="987553"/>
+            <a:off x="7589518" y="603504"/>
+            <a:ext cx="1143002" cy="987554"/>
           </a:xfrm>
           <a:prstGeom prst="rect">
             <a:avLst/>
@@ -14958,7 +15610,7 @@
         </p:nvSpPr>
         <p:spPr>
           <a:xfrm>
-            <a:off x="777240" y="1361346"/>
+            <a:off x="777240" y="1361345"/>
             <a:ext cx="6629401" cy="185100"/>
           </a:xfrm>
           <a:prstGeom prst="rect">
@@ -15007,9 +15659,9 @@
         <p:grpSpPr>
           <a:xfrm>
             <a:off x="777240" y="1847088"/>
-            <a:ext cx="2505456" cy="1700785"/>
+            <a:ext cx="2505457" cy="1700786"/>
             <a:chOff x="0" y="0"/>
-            <a:chExt cx="2505455" cy="1700783"/>
+            <a:chExt cx="2505456" cy="1700785"/>
           </a:xfrm>
         </p:grpSpPr>
         <p:sp>
@@ -15021,7 +15673,7 @@
           <p:spPr>
             <a:xfrm>
               <a:off x="0" y="0"/>
-              <a:ext cx="2505456" cy="1700784"/>
+              <a:ext cx="2505457" cy="1700786"/>
             </a:xfrm>
             <a:prstGeom prst="roundRect">
               <a:avLst>
@@ -15041,12 +15693,19 @@
             <a:effectLst/>
           </p:spPr>
           <p:txBody>
-            <a:bodyPr wrap="square" lIns="45719" tIns="45719" rIns="45719" bIns="45719" numCol="1" anchor="t">
+            <a:bodyPr wrap="square" lIns="45718" tIns="45718" rIns="45718" bIns="45718" numCol="1" anchor="t">
               <a:noAutofit/>
             </a:bodyPr>
             <a:lstStyle/>
             <a:p>
-              <a:pPr/>
+              <a:pPr>
+                <a:defRPr>
+                  <a:latin typeface="+mj-lt"/>
+                  <a:ea typeface="+mj-ea"/>
+                  <a:cs typeface="+mj-cs"/>
+                  <a:sym typeface="Calibri"/>
+                </a:defRPr>
+              </a:pPr>
             </a:p>
           </p:txBody>
         </p:sp>
@@ -15059,7 +15718,7 @@
           <p:spPr>
             <a:xfrm>
               <a:off x="182880" y="172973"/>
-              <a:ext cx="2139696" cy="147830"/>
+              <a:ext cx="2139697" cy="147830"/>
             </a:xfrm>
             <a:prstGeom prst="rect">
               <a:avLst/>
@@ -15110,7 +15769,7 @@
           <p:spPr>
             <a:xfrm>
               <a:off x="182880" y="458977"/>
-              <a:ext cx="2139696" cy="215901"/>
+              <a:ext cx="2139697" cy="215901"/>
             </a:xfrm>
             <a:prstGeom prst="rect">
               <a:avLst/>
@@ -15161,7 +15820,7 @@
           <p:spPr>
             <a:xfrm>
               <a:off x="182880" y="786383"/>
-              <a:ext cx="2139696" cy="372506"/>
+              <a:ext cx="2139697" cy="372506"/>
             </a:xfrm>
             <a:prstGeom prst="rect">
               <a:avLst/>
@@ -15216,9 +15875,9 @@
         <p:grpSpPr>
           <a:xfrm>
             <a:off x="3502152" y="1847088"/>
-            <a:ext cx="2505457" cy="1700785"/>
+            <a:ext cx="2505459" cy="1700786"/>
             <a:chOff x="0" y="0"/>
-            <a:chExt cx="2505455" cy="1700783"/>
+            <a:chExt cx="2505457" cy="1700785"/>
           </a:xfrm>
         </p:grpSpPr>
         <p:sp>
@@ -15230,7 +15889,7 @@
           <p:spPr>
             <a:xfrm>
               <a:off x="0" y="0"/>
-              <a:ext cx="2505456" cy="1700784"/>
+              <a:ext cx="2505458" cy="1700786"/>
             </a:xfrm>
             <a:prstGeom prst="roundRect">
               <a:avLst>
@@ -15250,12 +15909,19 @@
             <a:effectLst/>
           </p:spPr>
           <p:txBody>
-            <a:bodyPr wrap="square" lIns="45719" tIns="45719" rIns="45719" bIns="45719" numCol="1" anchor="t">
+            <a:bodyPr wrap="square" lIns="45718" tIns="45718" rIns="45718" bIns="45718" numCol="1" anchor="t">
               <a:noAutofit/>
             </a:bodyPr>
             <a:lstStyle/>
             <a:p>
-              <a:pPr/>
+              <a:pPr>
+                <a:defRPr>
+                  <a:latin typeface="+mj-lt"/>
+                  <a:ea typeface="+mj-ea"/>
+                  <a:cs typeface="+mj-cs"/>
+                  <a:sym typeface="Calibri"/>
+                </a:defRPr>
+              </a:pPr>
             </a:p>
           </p:txBody>
         </p:sp>
@@ -15268,7 +15934,7 @@
           <p:spPr>
             <a:xfrm>
               <a:off x="182880" y="172973"/>
-              <a:ext cx="2139696" cy="147830"/>
+              <a:ext cx="2139698" cy="147830"/>
             </a:xfrm>
             <a:prstGeom prst="rect">
               <a:avLst/>
@@ -15319,7 +15985,7 @@
           <p:spPr>
             <a:xfrm>
               <a:off x="182880" y="351027"/>
-              <a:ext cx="2139696" cy="431801"/>
+              <a:ext cx="2139698" cy="431801"/>
             </a:xfrm>
             <a:prstGeom prst="rect">
               <a:avLst/>
@@ -15370,7 +16036,7 @@
           <p:spPr>
             <a:xfrm>
               <a:off x="182880" y="786383"/>
-              <a:ext cx="2139696" cy="563006"/>
+              <a:ext cx="2139698" cy="563006"/>
             </a:xfrm>
             <a:prstGeom prst="rect">
               <a:avLst/>
@@ -15425,9 +16091,9 @@
         <p:grpSpPr>
           <a:xfrm>
             <a:off x="6227064" y="1847088"/>
-            <a:ext cx="2505457" cy="1700785"/>
+            <a:ext cx="2505459" cy="1700786"/>
             <a:chOff x="0" y="0"/>
-            <a:chExt cx="2505455" cy="1700783"/>
+            <a:chExt cx="2505457" cy="1700785"/>
           </a:xfrm>
         </p:grpSpPr>
         <p:sp>
@@ -15439,7 +16105,7 @@
           <p:spPr>
             <a:xfrm>
               <a:off x="0" y="0"/>
-              <a:ext cx="2505456" cy="1700784"/>
+              <a:ext cx="2505458" cy="1700786"/>
             </a:xfrm>
             <a:prstGeom prst="roundRect">
               <a:avLst>
@@ -15459,12 +16125,19 @@
             <a:effectLst/>
           </p:spPr>
           <p:txBody>
-            <a:bodyPr wrap="square" lIns="45719" tIns="45719" rIns="45719" bIns="45719" numCol="1" anchor="t">
+            <a:bodyPr wrap="square" lIns="45718" tIns="45718" rIns="45718" bIns="45718" numCol="1" anchor="t">
               <a:noAutofit/>
             </a:bodyPr>
             <a:lstStyle/>
             <a:p>
-              <a:pPr/>
+              <a:pPr>
+                <a:defRPr>
+                  <a:latin typeface="+mj-lt"/>
+                  <a:ea typeface="+mj-ea"/>
+                  <a:cs typeface="+mj-cs"/>
+                  <a:sym typeface="Calibri"/>
+                </a:defRPr>
+              </a:pPr>
             </a:p>
           </p:txBody>
         </p:sp>
@@ -15477,7 +16150,7 @@
           <p:spPr>
             <a:xfrm>
               <a:off x="182880" y="172973"/>
-              <a:ext cx="2139696" cy="147830"/>
+              <a:ext cx="2139698" cy="147830"/>
             </a:xfrm>
             <a:prstGeom prst="rect">
               <a:avLst/>
@@ -15528,7 +16201,7 @@
           <p:spPr>
             <a:xfrm>
               <a:off x="182880" y="458977"/>
-              <a:ext cx="2139696" cy="215901"/>
+              <a:ext cx="2139698" cy="215901"/>
             </a:xfrm>
             <a:prstGeom prst="rect">
               <a:avLst/>
@@ -15579,7 +16252,7 @@
           <p:spPr>
             <a:xfrm>
               <a:off x="182880" y="786383"/>
-              <a:ext cx="2139696" cy="182006"/>
+              <a:ext cx="2139698" cy="182006"/>
             </a:xfrm>
             <a:prstGeom prst="rect">
               <a:avLst/>
@@ -15633,8 +16306,8 @@
         </p:nvSpPr>
         <p:spPr>
           <a:xfrm>
-            <a:off x="777239" y="3863801"/>
-            <a:ext cx="7955282" cy="172815"/>
+            <a:off x="777239" y="3863800"/>
+            <a:ext cx="7955282" cy="172816"/>
           </a:xfrm>
           <a:prstGeom prst="rect">
             <a:avLst/>
@@ -15944,6 +16617,41 @@
                       </p:childTnLst>
                     </p:cTn>
                   </p:par>
+                  <p:par>
+                    <p:cTn id="27" fill="hold">
+                      <p:stCondLst>
+                        <p:cond delay="indefinite"/>
+                      </p:stCondLst>
+                      <p:childTnLst>
+                        <p:par>
+                          <p:cTn id="28" fill="hold">
+                            <p:stCondLst>
+                              <p:cond delay="0"/>
+                            </p:stCondLst>
+                            <p:childTnLst>
+                              <p:par>
+                                <p:cTn id="29" presetClass="mediacall" nodeType="clickEffect" presetSubtype="0" presetID="3" grpId="1" fill="hold">
+                                  <p:stCondLst>
+                                    <p:cond delay="0"/>
+                                  </p:stCondLst>
+                                  <p:childTnLst>
+                                    <p:cmd type="call" cmd="stop">
+                                      <p:cBhvr>
+                                        <p:cTn id="30" dur="1000" fill="hold"/>
+                                        <p:tgtEl>
+                                          <p:spTgt spid="245"/>
+                                        </p:tgtEl>
+                                      </p:cBhvr>
+                                    </p:cmd>
+                                  </p:childTnLst>
+                                </p:cTn>
+                              </p:par>
+                            </p:childTnLst>
+                          </p:cTn>
+                        </p:par>
+                      </p:childTnLst>
+                    </p:cTn>
+                  </p:par>
                 </p:childTnLst>
               </p:cTn>
               <p:prevCondLst>
@@ -15963,7 +16671,7 @@
             </p:seq>
             <p:video fullScrn="0">
               <p:cMediaNode mute="0" showWhenStopped="1" numSld="1" vol="0">
-                <p:cTn id="27" fill="hold" display="0">
+                <p:cTn id="31" fill="hold" display="0">
                   <p:stCondLst>
                     <p:cond delay="indefinite"/>
                   </p:stCondLst>
@@ -15974,7 +16682,7 @@
               </p:cMediaNode>
             </p:video>
             <p:seq concurrent="1" prevAc="none" nextAc="seek">
-              <p:cTn id="28" evtFilter="cancelBubble" nodeType="interactiveSeq" restart="whenNotActive" fill="hold">
+              <p:cTn id="32" evtFilter="cancelBubble" nodeType="interactiveSeq" restart="whenNotActive" fill="hold">
                 <p:stCondLst>
                   <p:cond delay="0" evt="onClick">
                     <p:tgtEl>
@@ -15987,26 +16695,26 @@
                 </p:endSync>
                 <p:childTnLst>
                   <p:par>
-                    <p:cTn id="29" fill="hold">
+                    <p:cTn id="33" fill="hold">
                       <p:stCondLst>
                         <p:cond delay="0"/>
                       </p:stCondLst>
                       <p:childTnLst>
                         <p:par>
-                          <p:cTn id="30" fill="hold">
+                          <p:cTn id="34" fill="hold">
                             <p:stCondLst>
                               <p:cond delay="0"/>
                             </p:stCondLst>
                             <p:childTnLst>
                               <p:par>
-                                <p:cTn id="31" presetClass="mediacall" nodeType="clickEffect" presetSubtype="0" presetID="2" fill="hold">
+                                <p:cTn id="35" presetClass="mediacall" nodeType="clickEffect" presetSubtype="0" presetID="2" fill="hold">
                                   <p:stCondLst>
                                     <p:cond delay="0"/>
                                   </p:stCondLst>
                                   <p:childTnLst>
                                     <p:cmd type="call" cmd="togglePause">
                                       <p:cBhvr>
-                                        <p:cTn id="32" dur="1" fill="hold"/>
+                                        <p:cTn id="36" dur="1" fill="hold"/>
                                         <p:tgtEl>
                                           <p:spTgt spid="245"/>
                                         </p:tgtEl>
@@ -16036,10 +16744,10 @@
       </p:par>
     </p:tnLst>
     <p:bldLst>
+      <p:bldP build="whole" bldLvl="1" animBg="1" rev="0" advAuto="0" spid="266" grpId="4"/>
+      <p:bldP build="whole" bldLvl="1" animBg="1" rev="0" advAuto="0" spid="261" grpId="3"/>
       <p:bldP build="whole" bldLvl="1" animBg="1" rev="0" advAuto="0" spid="267" grpId="5"/>
-      <p:bldP build="whole" bldLvl="1" animBg="1" rev="0" advAuto="0" spid="261" grpId="3"/>
       <p:bldP build="whole" bldLvl="1" animBg="1" rev="0" advAuto="0" spid="256" grpId="2"/>
-      <p:bldP build="whole" bldLvl="1" animBg="1" rev="0" advAuto="0" spid="266" grpId="4"/>
     </p:bldLst>
   </p:timing>
 </p:sld>
@@ -16095,7 +16803,7 @@
         <p:spPr>
           <a:xfrm>
             <a:off x="182879" y="182879"/>
-            <a:ext cx="310897" cy="4777742"/>
+            <a:ext cx="310898" cy="4777743"/>
           </a:xfrm>
           <a:prstGeom prst="rect">
             <a:avLst/>
@@ -16114,9 +16822,9 @@
         <p:grpSpPr>
           <a:xfrm>
             <a:off x="777240" y="274320"/>
-            <a:ext cx="1691640" cy="292609"/>
+            <a:ext cx="1691641" cy="292611"/>
             <a:chOff x="0" y="0"/>
-            <a:chExt cx="1691639" cy="292608"/>
+            <a:chExt cx="1691640" cy="292609"/>
           </a:xfrm>
         </p:grpSpPr>
         <p:sp>
@@ -16128,7 +16836,7 @@
           <p:spPr>
             <a:xfrm>
               <a:off x="0" y="0"/>
-              <a:ext cx="1691640" cy="292609"/>
+              <a:ext cx="1691641" cy="292611"/>
             </a:xfrm>
             <a:prstGeom prst="roundRect">
               <a:avLst>
@@ -16145,13 +16853,18 @@
             <a:effectLst/>
           </p:spPr>
           <p:txBody>
-            <a:bodyPr wrap="square" lIns="45719" tIns="45719" rIns="45719" bIns="45719" numCol="1" anchor="ctr">
+            <a:bodyPr wrap="square" lIns="45718" tIns="45718" rIns="45718" bIns="45718" numCol="1" anchor="ctr">
               <a:noAutofit/>
             </a:bodyPr>
             <a:lstStyle/>
             <a:p>
               <a:pPr algn="ctr">
-                <a:defRPr sz="900"/>
+                <a:defRPr sz="900">
+                  <a:latin typeface="+mj-lt"/>
+                  <a:ea typeface="+mj-ea"/>
+                  <a:cs typeface="+mj-cs"/>
+                  <a:sym typeface="Calibri"/>
+                </a:defRPr>
               </a:pPr>
             </a:p>
           </p:txBody>
@@ -16164,8 +16877,8 @@
           </p:nvSpPr>
           <p:spPr>
             <a:xfrm>
-              <a:off x="37494" y="82803"/>
-              <a:ext cx="1616652" cy="127001"/>
+              <a:off x="37493" y="82803"/>
+              <a:ext cx="1616655" cy="127001"/>
             </a:xfrm>
             <a:prstGeom prst="rect">
               <a:avLst/>
@@ -16265,9 +16978,9 @@
         <p:grpSpPr>
           <a:xfrm>
             <a:off x="777240" y="1517903"/>
-            <a:ext cx="6720841" cy="512065"/>
+            <a:ext cx="6720842" cy="512066"/>
             <a:chOff x="0" y="0"/>
-            <a:chExt cx="6720840" cy="512063"/>
+            <a:chExt cx="6720841" cy="512065"/>
           </a:xfrm>
         </p:grpSpPr>
         <p:sp>
@@ -16279,7 +16992,7 @@
           <p:spPr>
             <a:xfrm>
               <a:off x="0" y="0"/>
-              <a:ext cx="6720841" cy="512064"/>
+              <a:ext cx="6720842" cy="512066"/>
             </a:xfrm>
             <a:prstGeom prst="roundRect">
               <a:avLst>
@@ -16299,12 +17012,19 @@
             <a:effectLst/>
           </p:spPr>
           <p:txBody>
-            <a:bodyPr wrap="square" lIns="45719" tIns="45719" rIns="45719" bIns="45719" numCol="1" anchor="t">
+            <a:bodyPr wrap="square" lIns="45718" tIns="45718" rIns="45718" bIns="45718" numCol="1" anchor="t">
               <a:noAutofit/>
             </a:bodyPr>
             <a:lstStyle/>
             <a:p>
-              <a:pPr/>
+              <a:pPr>
+                <a:defRPr>
+                  <a:latin typeface="+mj-lt"/>
+                  <a:ea typeface="+mj-ea"/>
+                  <a:cs typeface="+mj-cs"/>
+                  <a:sym typeface="Calibri"/>
+                </a:defRPr>
+              </a:pPr>
             </a:p>
           </p:txBody>
         </p:sp>
@@ -16317,7 +17037,7 @@
           <p:spPr>
             <a:xfrm>
               <a:off x="182880" y="163482"/>
-              <a:ext cx="6400801" cy="185100"/>
+              <a:ext cx="6400802" cy="185100"/>
             </a:xfrm>
             <a:prstGeom prst="rect">
               <a:avLst/>
@@ -16369,7 +17089,7 @@
         <p:spPr>
           <a:xfrm>
             <a:off x="7635240" y="1675244"/>
-            <a:ext cx="1097281" cy="197384"/>
+            <a:ext cx="1097282" cy="197384"/>
           </a:xfrm>
           <a:prstGeom prst="rect">
             <a:avLst/>
@@ -16417,9 +17137,9 @@
         <p:grpSpPr>
           <a:xfrm>
             <a:off x="777240" y="2148839"/>
-            <a:ext cx="6720841" cy="512065"/>
+            <a:ext cx="6720842" cy="512066"/>
             <a:chOff x="0" y="0"/>
-            <a:chExt cx="6720840" cy="512063"/>
+            <a:chExt cx="6720841" cy="512065"/>
           </a:xfrm>
         </p:grpSpPr>
         <p:sp>
@@ -16431,7 +17151,7 @@
           <p:spPr>
             <a:xfrm>
               <a:off x="0" y="0"/>
-              <a:ext cx="6720841" cy="512064"/>
+              <a:ext cx="6720842" cy="512066"/>
             </a:xfrm>
             <a:prstGeom prst="roundRect">
               <a:avLst>
@@ -16451,12 +17171,19 @@
             <a:effectLst/>
           </p:spPr>
           <p:txBody>
-            <a:bodyPr wrap="square" lIns="45719" tIns="45719" rIns="45719" bIns="45719" numCol="1" anchor="t">
+            <a:bodyPr wrap="square" lIns="45718" tIns="45718" rIns="45718" bIns="45718" numCol="1" anchor="t">
               <a:noAutofit/>
             </a:bodyPr>
             <a:lstStyle/>
             <a:p>
-              <a:pPr/>
+              <a:pPr>
+                <a:defRPr>
+                  <a:latin typeface="+mj-lt"/>
+                  <a:ea typeface="+mj-ea"/>
+                  <a:cs typeface="+mj-cs"/>
+                  <a:sym typeface="Calibri"/>
+                </a:defRPr>
+              </a:pPr>
             </a:p>
           </p:txBody>
         </p:sp>
@@ -16469,7 +17196,7 @@
           <p:spPr>
             <a:xfrm>
               <a:off x="182880" y="163482"/>
-              <a:ext cx="6400801" cy="185100"/>
+              <a:ext cx="6400802" cy="185100"/>
             </a:xfrm>
             <a:prstGeom prst="rect">
               <a:avLst/>
@@ -16520,8 +17247,8 @@
         </p:nvSpPr>
         <p:spPr>
           <a:xfrm>
-            <a:off x="7635240" y="2306180"/>
-            <a:ext cx="1097281" cy="197384"/>
+            <a:off x="7635240" y="2306179"/>
+            <a:ext cx="1097282" cy="197385"/>
           </a:xfrm>
           <a:prstGeom prst="rect">
             <a:avLst/>
@@ -16569,9 +17296,9 @@
         <p:grpSpPr>
           <a:xfrm>
             <a:off x="777240" y="2779776"/>
-            <a:ext cx="6720841" cy="512065"/>
+            <a:ext cx="6720842" cy="512067"/>
             <a:chOff x="0" y="0"/>
-            <a:chExt cx="6720840" cy="512063"/>
+            <a:chExt cx="6720841" cy="512065"/>
           </a:xfrm>
         </p:grpSpPr>
         <p:sp>
@@ -16583,7 +17310,7 @@
           <p:spPr>
             <a:xfrm>
               <a:off x="0" y="0"/>
-              <a:ext cx="6720841" cy="512064"/>
+              <a:ext cx="6720842" cy="512066"/>
             </a:xfrm>
             <a:prstGeom prst="roundRect">
               <a:avLst>
@@ -16603,12 +17330,19 @@
             <a:effectLst/>
           </p:spPr>
           <p:txBody>
-            <a:bodyPr wrap="square" lIns="45719" tIns="45719" rIns="45719" bIns="45719" numCol="1" anchor="t">
+            <a:bodyPr wrap="square" lIns="45718" tIns="45718" rIns="45718" bIns="45718" numCol="1" anchor="t">
               <a:noAutofit/>
             </a:bodyPr>
             <a:lstStyle/>
             <a:p>
-              <a:pPr/>
+              <a:pPr>
+                <a:defRPr>
+                  <a:latin typeface="+mj-lt"/>
+                  <a:ea typeface="+mj-ea"/>
+                  <a:cs typeface="+mj-cs"/>
+                  <a:sym typeface="Calibri"/>
+                </a:defRPr>
+              </a:pPr>
             </a:p>
           </p:txBody>
         </p:sp>
@@ -16621,7 +17355,7 @@
           <p:spPr>
             <a:xfrm>
               <a:off x="182880" y="163482"/>
-              <a:ext cx="6400801" cy="185100"/>
+              <a:ext cx="6400802" cy="185100"/>
             </a:xfrm>
             <a:prstGeom prst="rect">
               <a:avLst/>
@@ -16673,7 +17407,7 @@
         <p:spPr>
           <a:xfrm>
             <a:off x="7635240" y="2937116"/>
-            <a:ext cx="1097281" cy="197384"/>
+            <a:ext cx="1097282" cy="197384"/>
           </a:xfrm>
           <a:prstGeom prst="rect">
             <a:avLst/>
@@ -16720,10 +17454,10 @@
         </p:nvGrpSpPr>
         <p:grpSpPr>
           <a:xfrm>
-            <a:off x="777240" y="3410711"/>
-            <a:ext cx="6720841" cy="512065"/>
+            <a:off x="777240" y="3410710"/>
+            <a:ext cx="6720842" cy="512067"/>
             <a:chOff x="0" y="0"/>
-            <a:chExt cx="6720840" cy="512063"/>
+            <a:chExt cx="6720841" cy="512065"/>
           </a:xfrm>
         </p:grpSpPr>
         <p:sp>
@@ -16735,7 +17469,7 @@
           <p:spPr>
             <a:xfrm>
               <a:off x="0" y="0"/>
-              <a:ext cx="6720841" cy="512064"/>
+              <a:ext cx="6720842" cy="512066"/>
             </a:xfrm>
             <a:prstGeom prst="roundRect">
               <a:avLst>
@@ -16755,12 +17489,19 @@
             <a:effectLst/>
           </p:spPr>
           <p:txBody>
-            <a:bodyPr wrap="square" lIns="45719" tIns="45719" rIns="45719" bIns="45719" numCol="1" anchor="t">
+            <a:bodyPr wrap="square" lIns="45718" tIns="45718" rIns="45718" bIns="45718" numCol="1" anchor="t">
               <a:noAutofit/>
             </a:bodyPr>
             <a:lstStyle/>
             <a:p>
-              <a:pPr/>
+              <a:pPr>
+                <a:defRPr>
+                  <a:latin typeface="+mj-lt"/>
+                  <a:ea typeface="+mj-ea"/>
+                  <a:cs typeface="+mj-cs"/>
+                  <a:sym typeface="Calibri"/>
+                </a:defRPr>
+              </a:pPr>
             </a:p>
           </p:txBody>
         </p:sp>
@@ -16773,7 +17514,7 @@
           <p:spPr>
             <a:xfrm>
               <a:off x="182880" y="163482"/>
-              <a:ext cx="6400801" cy="185100"/>
+              <a:ext cx="6400802" cy="185100"/>
             </a:xfrm>
             <a:prstGeom prst="rect">
               <a:avLst/>
@@ -16824,8 +17565,8 @@
         </p:nvSpPr>
         <p:spPr>
           <a:xfrm>
-            <a:off x="7635240" y="3568052"/>
-            <a:ext cx="1097281" cy="197384"/>
+            <a:off x="7635240" y="3568051"/>
+            <a:ext cx="1097282" cy="197385"/>
           </a:xfrm>
           <a:prstGeom prst="rect">
             <a:avLst/>
@@ -16873,9 +17614,9 @@
         <p:grpSpPr>
           <a:xfrm>
             <a:off x="777240" y="4041647"/>
-            <a:ext cx="6720841" cy="512065"/>
+            <a:ext cx="6720842" cy="512067"/>
             <a:chOff x="0" y="0"/>
-            <a:chExt cx="6720840" cy="512063"/>
+            <a:chExt cx="6720841" cy="512065"/>
           </a:xfrm>
         </p:grpSpPr>
         <p:sp>
@@ -16887,7 +17628,7 @@
           <p:spPr>
             <a:xfrm>
               <a:off x="0" y="0"/>
-              <a:ext cx="6720841" cy="512064"/>
+              <a:ext cx="6720842" cy="512066"/>
             </a:xfrm>
             <a:prstGeom prst="roundRect">
               <a:avLst>
@@ -16907,12 +17648,19 @@
             <a:effectLst/>
           </p:spPr>
           <p:txBody>
-            <a:bodyPr wrap="square" lIns="45719" tIns="45719" rIns="45719" bIns="45719" numCol="1" anchor="t">
+            <a:bodyPr wrap="square" lIns="45718" tIns="45718" rIns="45718" bIns="45718" numCol="1" anchor="t">
               <a:noAutofit/>
             </a:bodyPr>
             <a:lstStyle/>
             <a:p>
-              <a:pPr/>
+              <a:pPr>
+                <a:defRPr>
+                  <a:latin typeface="+mj-lt"/>
+                  <a:ea typeface="+mj-ea"/>
+                  <a:cs typeface="+mj-cs"/>
+                  <a:sym typeface="Calibri"/>
+                </a:defRPr>
+              </a:pPr>
             </a:p>
           </p:txBody>
         </p:sp>
@@ -16925,7 +17673,7 @@
           <p:spPr>
             <a:xfrm>
               <a:off x="182880" y="163482"/>
-              <a:ext cx="6400801" cy="185100"/>
+              <a:ext cx="6400802" cy="185100"/>
             </a:xfrm>
             <a:prstGeom prst="rect">
               <a:avLst/>
@@ -16976,8 +17724,8 @@
         </p:nvSpPr>
         <p:spPr>
           <a:xfrm>
-            <a:off x="7635240" y="4198988"/>
-            <a:ext cx="1097281" cy="197384"/>
+            <a:off x="7635240" y="4198987"/>
+            <a:ext cx="1097282" cy="197385"/>
           </a:xfrm>
           <a:prstGeom prst="rect">
             <a:avLst/>
@@ -17024,8 +17772,8 @@
         </p:nvSpPr>
         <p:spPr>
           <a:xfrm>
-            <a:off x="777239" y="4636469"/>
-            <a:ext cx="7955282" cy="172815"/>
+            <a:off x="777239" y="4636468"/>
+            <a:ext cx="7955282" cy="172816"/>
           </a:xfrm>
           <a:prstGeom prst="rect">
             <a:avLst/>
@@ -17889,6 +18637,41 @@
                       </p:childTnLst>
                     </p:cTn>
                   </p:par>
+                  <p:par>
+                    <p:cTn id="67" fill="hold">
+                      <p:stCondLst>
+                        <p:cond delay="indefinite"/>
+                      </p:stCondLst>
+                      <p:childTnLst>
+                        <p:par>
+                          <p:cTn id="68" fill="hold">
+                            <p:stCondLst>
+                              <p:cond delay="0"/>
+                            </p:stCondLst>
+                            <p:childTnLst>
+                              <p:par>
+                                <p:cTn id="69" presetClass="mediacall" nodeType="clickEffect" presetSubtype="0" presetID="3" grpId="1" fill="hold">
+                                  <p:stCondLst>
+                                    <p:cond delay="0"/>
+                                  </p:stCondLst>
+                                  <p:childTnLst>
+                                    <p:cmd type="call" cmd="stop">
+                                      <p:cBhvr>
+                                        <p:cTn id="70" dur="1000" fill="hold"/>
+                                        <p:tgtEl>
+                                          <p:spTgt spid="271"/>
+                                        </p:tgtEl>
+                                      </p:cBhvr>
+                                    </p:cmd>
+                                  </p:childTnLst>
+                                </p:cTn>
+                              </p:par>
+                            </p:childTnLst>
+                          </p:cTn>
+                        </p:par>
+                      </p:childTnLst>
+                    </p:cTn>
+                  </p:par>
                 </p:childTnLst>
               </p:cTn>
               <p:prevCondLst>
@@ -17908,7 +18691,7 @@
             </p:seq>
             <p:video fullScrn="0">
               <p:cMediaNode mute="0" showWhenStopped="1" numSld="1" vol="0">
-                <p:cTn id="67" fill="hold" display="0">
+                <p:cTn id="71" fill="hold" display="0">
                   <p:stCondLst>
                     <p:cond delay="indefinite"/>
                   </p:stCondLst>
@@ -17919,7 +18702,7 @@
               </p:cMediaNode>
             </p:video>
             <p:seq concurrent="1" prevAc="none" nextAc="seek">
-              <p:cTn id="68" evtFilter="cancelBubble" nodeType="interactiveSeq" restart="whenNotActive" fill="hold">
+              <p:cTn id="72" evtFilter="cancelBubble" nodeType="interactiveSeq" restart="whenNotActive" fill="hold">
                 <p:stCondLst>
                   <p:cond delay="0" evt="onClick">
                     <p:tgtEl>
@@ -17932,26 +18715,26 @@
                 </p:endSync>
                 <p:childTnLst>
                   <p:par>
-                    <p:cTn id="69" fill="hold">
+                    <p:cTn id="73" fill="hold">
                       <p:stCondLst>
                         <p:cond delay="0"/>
                       </p:stCondLst>
                       <p:childTnLst>
                         <p:par>
-                          <p:cTn id="70" fill="hold">
+                          <p:cTn id="74" fill="hold">
                             <p:stCondLst>
                               <p:cond delay="0"/>
                             </p:stCondLst>
                             <p:childTnLst>
                               <p:par>
-                                <p:cTn id="71" presetClass="mediacall" nodeType="clickEffect" presetSubtype="0" presetID="2" fill="hold">
+                                <p:cTn id="75" presetClass="mediacall" nodeType="clickEffect" presetSubtype="0" presetID="2" fill="hold">
                                   <p:stCondLst>
                                     <p:cond delay="0"/>
                                   </p:stCondLst>
                                   <p:childTnLst>
                                     <p:cmd type="call" cmd="togglePause">
                                       <p:cBhvr>
-                                        <p:cTn id="72" dur="1" fill="hold"/>
+                                        <p:cTn id="76" dur="1" fill="hold"/>
                                         <p:tgtEl>
                                           <p:spTgt spid="271"/>
                                         </p:tgtEl>
@@ -17981,17 +18764,17 @@
       </p:par>
     </p:tnLst>
     <p:bldLst>
+      <p:bldP build="whole" bldLvl="1" animBg="1" rev="0" advAuto="0" spid="283" grpId="5"/>
+      <p:bldP build="whole" bldLvl="1" animBg="1" rev="0" advAuto="0" spid="286" grpId="6"/>
+      <p:bldP build="whole" bldLvl="1" animBg="1" rev="0" advAuto="0" spid="287" grpId="7"/>
+      <p:bldP build="whole" bldLvl="1" animBg="1" rev="0" advAuto="0" spid="282" grpId="4"/>
+      <p:bldP build="whole" bldLvl="1" animBg="1" rev="0" advAuto="0" spid="291" grpId="9"/>
       <p:bldP build="whole" bldLvl="1" animBg="1" rev="0" advAuto="0" spid="278" grpId="2"/>
+      <p:bldP build="whole" bldLvl="1" animBg="1" rev="0" advAuto="0" spid="279" grpId="3"/>
+      <p:bldP build="whole" bldLvl="1" animBg="1" rev="0" advAuto="0" spid="295" grpId="11"/>
+      <p:bldP build="whole" bldLvl="1" animBg="1" rev="0" advAuto="0" spid="294" grpId="10"/>
       <p:bldP build="whole" bldLvl="1" animBg="1" rev="0" advAuto="0" spid="296" grpId="12"/>
-      <p:bldP build="whole" bldLvl="1" animBg="1" rev="0" advAuto="0" spid="279" grpId="3"/>
-      <p:bldP build="whole" bldLvl="1" animBg="1" rev="0" advAuto="0" spid="291" grpId="9"/>
-      <p:bldP build="whole" bldLvl="1" animBg="1" rev="0" advAuto="0" spid="294" grpId="10"/>
       <p:bldP build="whole" bldLvl="1" animBg="1" rev="0" advAuto="0" spid="290" grpId="8"/>
-      <p:bldP build="whole" bldLvl="1" animBg="1" rev="0" advAuto="0" spid="295" grpId="11"/>
-      <p:bldP build="whole" bldLvl="1" animBg="1" rev="0" advAuto="0" spid="286" grpId="6"/>
-      <p:bldP build="whole" bldLvl="1" animBg="1" rev="0" advAuto="0" spid="282" grpId="4"/>
-      <p:bldP build="whole" bldLvl="1" animBg="1" rev="0" advAuto="0" spid="287" grpId="7"/>
-      <p:bldP build="whole" bldLvl="1" animBg="1" rev="0" advAuto="0" spid="283" grpId="5"/>
     </p:bldLst>
   </p:timing>
 </p:sld>
@@ -18190,17 +18973,17 @@
         <a:solidFill>
           <a:srgbClr val="FFFFFF"/>
         </a:solidFill>
-        <a:ln w="12700" cap="flat">
+        <a:ln w="25400" cap="flat">
           <a:solidFill>
             <a:schemeClr val="accent1"/>
           </a:solidFill>
           <a:prstDash val="solid"/>
-          <a:miter lim="800000"/>
+          <a:round/>
         </a:ln>
         <a:effectLst/>
         <a:sp3d/>
       </a:spPr>
-      <a:bodyPr rot="0" spcFirstLastPara="1" vertOverflow="overflow" horzOverflow="overflow" vert="horz" wrap="square" lIns="45719" tIns="45719" rIns="45719" bIns="45719" numCol="1" spcCol="38100" rtlCol="0" anchor="ctr" upright="0">
+      <a:bodyPr rot="0" spcFirstLastPara="1" vertOverflow="overflow" horzOverflow="overflow" vert="horz" wrap="square" lIns="45718" tIns="45718" rIns="45718" bIns="45718" numCol="1" spcCol="38100" rtlCol="0" anchor="ctr" upright="0">
         <a:spAutoFit/>
       </a:bodyPr>
       <a:lstStyle>
@@ -18228,10 +19011,10 @@
             </a:solidFill>
             <a:effectLst/>
             <a:uFillTx/>
-            <a:latin typeface="+mj-lt"/>
-            <a:ea typeface="+mj-ea"/>
-            <a:cs typeface="+mj-cs"/>
-            <a:sym typeface="Calibri"/>
+            <a:latin typeface="+mn-lt"/>
+            <a:ea typeface="+mn-ea"/>
+            <a:cs typeface="+mn-cs"/>
+            <a:sym typeface="Helvetica"/>
           </a:defRPr>
         </a:defPPr>
         <a:lvl1pPr marL="0" marR="0" indent="0" algn="l" defTabSz="914400" rtl="0" fontAlgn="auto" latinLnBrk="1" hangingPunct="0">
@@ -18479,12 +19262,12 @@
     <a:lnDef>
       <a:spPr>
         <a:noFill/>
-        <a:ln w="12700" cap="flat">
+        <a:ln w="25400" cap="flat">
           <a:solidFill>
             <a:schemeClr val="accent1"/>
           </a:solidFill>
           <a:prstDash val="solid"/>
-          <a:miter lim="800000"/>
+          <a:round/>
         </a:ln>
         <a:effectLst/>
         <a:sp3d/>
@@ -18771,7 +19554,7 @@
         <a:effectLst/>
         <a:sp3d/>
       </a:spPr>
-      <a:bodyPr rot="0" spcFirstLastPara="1" vertOverflow="overflow" horzOverflow="overflow" vert="horz" wrap="square" lIns="45719" tIns="45719" rIns="45719" bIns="45719" numCol="1" spcCol="38100" rtlCol="0" anchor="t" upright="0">
+      <a:bodyPr rot="0" spcFirstLastPara="1" vertOverflow="overflow" horzOverflow="overflow" vert="horz" wrap="square" lIns="45718" tIns="45718" rIns="45718" bIns="45718" numCol="1" spcCol="38100" rtlCol="0" anchor="t" upright="0">
         <a:spAutoFit/>
       </a:bodyPr>
       <a:lstStyle>
@@ -18799,10 +19582,10 @@
             </a:solidFill>
             <a:effectLst/>
             <a:uFillTx/>
-            <a:latin typeface="+mj-lt"/>
-            <a:ea typeface="+mj-ea"/>
-            <a:cs typeface="+mj-cs"/>
-            <a:sym typeface="Calibri"/>
+            <a:latin typeface="+mn-lt"/>
+            <a:ea typeface="+mn-ea"/>
+            <a:cs typeface="+mn-cs"/>
+            <a:sym typeface="Helvetica"/>
           </a:defRPr>
         </a:defPPr>
         <a:lvl1pPr marL="0" marR="0" indent="0" algn="l" defTabSz="914400" rtl="0" fontAlgn="auto" latinLnBrk="1" hangingPunct="0">
@@ -19244,17 +20027,17 @@
         <a:solidFill>
           <a:srgbClr val="FFFFFF"/>
         </a:solidFill>
-        <a:ln w="12700" cap="flat">
+        <a:ln w="25400" cap="flat">
           <a:solidFill>
             <a:schemeClr val="accent1"/>
           </a:solidFill>
           <a:prstDash val="solid"/>
-          <a:miter lim="800000"/>
+          <a:round/>
         </a:ln>
         <a:effectLst/>
         <a:sp3d/>
       </a:spPr>
-      <a:bodyPr rot="0" spcFirstLastPara="1" vertOverflow="overflow" horzOverflow="overflow" vert="horz" wrap="square" lIns="45719" tIns="45719" rIns="45719" bIns="45719" numCol="1" spcCol="38100" rtlCol="0" anchor="ctr" upright="0">
+      <a:bodyPr rot="0" spcFirstLastPara="1" vertOverflow="overflow" horzOverflow="overflow" vert="horz" wrap="square" lIns="45718" tIns="45718" rIns="45718" bIns="45718" numCol="1" spcCol="38100" rtlCol="0" anchor="ctr" upright="0">
         <a:spAutoFit/>
       </a:bodyPr>
       <a:lstStyle>
@@ -19282,10 +20065,10 @@
             </a:solidFill>
             <a:effectLst/>
             <a:uFillTx/>
-            <a:latin typeface="+mj-lt"/>
-            <a:ea typeface="+mj-ea"/>
-            <a:cs typeface="+mj-cs"/>
-            <a:sym typeface="Calibri"/>
+            <a:latin typeface="+mn-lt"/>
+            <a:ea typeface="+mn-ea"/>
+            <a:cs typeface="+mn-cs"/>
+            <a:sym typeface="Helvetica"/>
           </a:defRPr>
         </a:defPPr>
         <a:lvl1pPr marL="0" marR="0" indent="0" algn="l" defTabSz="914400" rtl="0" fontAlgn="auto" latinLnBrk="1" hangingPunct="0">
@@ -19533,12 +20316,12 @@
     <a:lnDef>
       <a:spPr>
         <a:noFill/>
-        <a:ln w="12700" cap="flat">
+        <a:ln w="25400" cap="flat">
           <a:solidFill>
             <a:schemeClr val="accent1"/>
           </a:solidFill>
           <a:prstDash val="solid"/>
-          <a:miter lim="800000"/>
+          <a:round/>
         </a:ln>
         <a:effectLst/>
         <a:sp3d/>
@@ -19825,7 +20608,7 @@
         <a:effectLst/>
         <a:sp3d/>
       </a:spPr>
-      <a:bodyPr rot="0" spcFirstLastPara="1" vertOverflow="overflow" horzOverflow="overflow" vert="horz" wrap="square" lIns="45719" tIns="45719" rIns="45719" bIns="45719" numCol="1" spcCol="38100" rtlCol="0" anchor="t" upright="0">
+      <a:bodyPr rot="0" spcFirstLastPara="1" vertOverflow="overflow" horzOverflow="overflow" vert="horz" wrap="square" lIns="45718" tIns="45718" rIns="45718" bIns="45718" numCol="1" spcCol="38100" rtlCol="0" anchor="t" upright="0">
         <a:spAutoFit/>
       </a:bodyPr>
       <a:lstStyle>
@@ -19853,10 +20636,10 @@
             </a:solidFill>
             <a:effectLst/>
             <a:uFillTx/>
-            <a:latin typeface="+mj-lt"/>
-            <a:ea typeface="+mj-ea"/>
-            <a:cs typeface="+mj-cs"/>
-            <a:sym typeface="Calibri"/>
+            <a:latin typeface="+mn-lt"/>
+            <a:ea typeface="+mn-ea"/>
+            <a:cs typeface="+mn-cs"/>
+            <a:sym typeface="Helvetica"/>
           </a:defRPr>
         </a:defPPr>
         <a:lvl1pPr marL="0" marR="0" indent="0" algn="l" defTabSz="914400" rtl="0" fontAlgn="auto" latinLnBrk="1" hangingPunct="0">
